--- a/static/ppts/G6_Math_T1_Order_Operations.pptx
+++ b/static/ppts/G6_Math_T1_Order_Operations.pptx
@@ -9,9 +9,10 @@
     <p:sldId id="257" r:id="rId3"/>
     <p:sldId id="258" r:id="rId4"/>
     <p:sldId id="259" r:id="rId5"/>
+    <p:sldId id="260" r:id="rId6"/>
   </p:sldIdLst>
   <p:notesMasterIdLst>
-    <p:notesMasterId r:id="rId6"/>
+    <p:notesMasterId r:id="rId7"/>
   </p:notesMasterIdLst>
   <p:sldSz cx="9144000" cy="5143500"/>
   <p:notesSz cx="5143500" cy="9144000"/>
@@ -811,6 +812,94 @@
 </p:notes>
 </file>
 
+<file path=ppt/notesSlides/notesSlide5.xml><?xml version="1.0" encoding="utf-8"?>
+<p:notes xmlns:a="http://schemas.openxmlformats.org/drawingml/2006/main" xmlns:r="http://schemas.openxmlformats.org/officeDocument/2006/relationships" xmlns:p="http://schemas.openxmlformats.org/presentationml/2006/main">
+  <p:cSld>
+    <p:spTree>
+      <p:nvGrpSpPr>
+        <p:cNvPr id="1" name=""/>
+        <p:cNvGrpSpPr/>
+        <p:nvPr/>
+      </p:nvGrpSpPr>
+      <p:grpSpPr>
+        <a:xfrm>
+          <a:off x="0" y="0"/>
+          <a:ext cx="0" cy="0"/>
+          <a:chOff x="0" y="0"/>
+          <a:chExt cx="0" cy="0"/>
+        </a:xfrm>
+      </p:grpSpPr>
+      <p:sp>
+        <p:nvSpPr>
+          <p:cNvPr id="2" name="Slide Image Placeholder 1"/>
+          <p:cNvSpPr>
+            <a:spLocks noGrp="1" noRot="1" noChangeAspect="1"/>
+          </p:cNvSpPr>
+          <p:nvPr>
+            <p:ph type="sldImg"/>
+          </p:nvPr>
+        </p:nvSpPr>
+        <p:spPr/>
+      </p:sp>
+      <p:sp>
+        <p:nvSpPr>
+          <p:cNvPr id="3" name="Notes Placeholder 2"/>
+          <p:cNvSpPr>
+            <a:spLocks noGrp="1"/>
+          </p:cNvSpPr>
+          <p:nvPr>
+            <p:ph type="body" idx="1"/>
+          </p:nvPr>
+        </p:nvSpPr>
+        <p:spPr/>
+        <p:txBody>
+          <a:bodyPr/>
+          <a:lstStyle/>
+          <a:p>
+            <a:r>
+              <a:rPr lang="en-US" dirty="0"/>
+              <a:t/>
+            </a:r>
+            <a:endParaRPr lang="en-US" dirty="0"/>
+          </a:p>
+        </p:txBody>
+      </p:sp>
+      <p:sp>
+        <p:nvSpPr>
+          <p:cNvPr id="4" name="Slide Number Placeholder 3"/>
+          <p:cNvSpPr>
+            <a:spLocks noGrp="1"/>
+          </p:cNvSpPr>
+          <p:nvPr>
+            <p:ph type="sldNum" sz="quarter" idx="10"/>
+          </p:nvPr>
+        </p:nvSpPr>
+        <p:spPr/>
+        <p:txBody>
+          <a:bodyPr/>
+          <a:lstStyle/>
+          <a:p>
+            <a:fld id="{F7021451-1387-4CA6-816F-3879F97B5CBC}" type="slidenum">
+              <a:rPr lang="en-US"/>
+              <a:t>5</a:t>
+            </a:fld>
+            <a:endParaRPr lang="en-US"/>
+          </a:p>
+        </p:txBody>
+      </p:sp>
+    </p:spTree>
+    <p:extLst>
+      <p:ext uri="{BB962C8B-B14F-4D97-AF65-F5344CB8AC3E}">
+        <p14:creationId xmlns:p14="http://schemas.microsoft.com/office/powerpoint/2010/main" val="1024086991"/>
+      </p:ext>
+    </p:extLst>
+  </p:cSld>
+  <p:clrMapOvr>
+    <a:masterClrMapping/>
+  </p:clrMapOvr>
+</p:notes>
+</file>
+
 <file path=ppt/slideLayouts/slideLayout1.xml><?xml version="1.0" encoding="utf-8"?>
 <p:sldLayout xmlns:a="http://schemas.openxmlformats.org/drawingml/2006/main" xmlns:r="http://schemas.openxmlformats.org/officeDocument/2006/relationships" xmlns:p="http://schemas.openxmlformats.org/presentationml/2006/main" preserve="1">
   <p:cSld name="DEFAULT">
@@ -1170,7 +1259,7 @@
         </p:nvSpPr>
         <p:spPr>
           <a:xfrm>
-            <a:off x="731520" y="1280160"/>
+            <a:off x="731520" y="1097280"/>
             <a:ext cx="7772400" cy="1371600"/>
           </a:xfrm>
           <a:prstGeom prst="rect">
@@ -1187,7 +1276,7 @@
               <a:buNone/>
             </a:pPr>
             <a:r>
-              <a:rPr lang="en-US" sz="3600" b="1" dirty="0">
+              <a:rPr lang="en-US" sz="4000" b="1" dirty="0">
                 <a:solidFill>
                   <a:srgbClr val="FFFFFF"/>
                 </a:solidFill>
@@ -1197,7 +1286,7 @@
               </a:rPr>
               <a:t>Order of Operations (BIDMAS)</a:t>
             </a:r>
-            <a:endParaRPr lang="en-US" sz="3600" dirty="0"/>
+            <a:endParaRPr lang="en-US" sz="4000" dirty="0"/>
           </a:p>
         </p:txBody>
       </p:sp>
@@ -1209,7 +1298,7 @@
         </p:nvSpPr>
         <p:spPr>
           <a:xfrm>
-            <a:off x="731520" y="2743200"/>
+            <a:off x="731520" y="2560320"/>
             <a:ext cx="7772400" cy="548640"/>
           </a:xfrm>
           <a:prstGeom prst="rect">
@@ -1228,13 +1317,13 @@
             <a:r>
               <a:rPr lang="en-US" sz="1600" dirty="0">
                 <a:solidFill>
-                  <a:srgbClr val="9B9690"/>
+                  <a:srgbClr val="E9C46A"/>
                 </a:solidFill>
                 <a:latin typeface="Calibri" pitchFamily="34" charset="0"/>
                 <a:ea typeface="Calibri" pitchFamily="34" charset="-122"/>
                 <a:cs typeface="Calibri" pitchFamily="34" charset="-120"/>
               </a:rPr>
-              <a:t>G6 Maths · Number Sense</a:t>
+              <a:t>Grade 6 Mathematics · Mr Zocchi</a:t>
             </a:r>
             <a:endParaRPr lang="en-US" sz="1600" dirty="0"/>
           </a:p>
@@ -1242,14 +1331,36 @@
       </p:sp>
       <p:sp>
         <p:nvSpPr>
-          <p:cNvPr id="5" name="Text 3"/>
-          <p:cNvSpPr/>
-          <p:nvPr/>
-        </p:nvSpPr>
-        <p:spPr>
-          <a:xfrm>
-            <a:off x="731520" y="4389120"/>
-            <a:ext cx="7772400" cy="457200"/>
+          <p:cNvPr id="5" name="Shape 3"/>
+          <p:cNvSpPr/>
+          <p:nvPr/>
+        </p:nvSpPr>
+        <p:spPr>
+          <a:xfrm>
+            <a:off x="731520" y="3474720"/>
+            <a:ext cx="2011680" cy="411480"/>
+          </a:xfrm>
+          <a:prstGeom prst="roundRect">
+            <a:avLst>
+              <a:gd name="adj" fmla="val 17778"/>
+            </a:avLst>
+          </a:prstGeom>
+          <a:solidFill>
+            <a:srgbClr val="2A9D8F"/>
+          </a:solidFill>
+          <a:ln/>
+        </p:spPr>
+      </p:sp>
+      <p:sp>
+        <p:nvSpPr>
+          <p:cNvPr id="6" name="Text 4"/>
+          <p:cNvSpPr/>
+          <p:nvPr/>
+        </p:nvSpPr>
+        <p:spPr>
+          <a:xfrm>
+            <a:off x="731520" y="3474720"/>
+            <a:ext cx="2011680" cy="411480"/>
           </a:xfrm>
           <a:prstGeom prst="rect">
             <a:avLst/>
@@ -1261,21 +1372,21 @@
           <a:bodyPr wrap="square" rtlCol="0" anchor="ctr"/>
           <a:lstStyle/>
           <a:p>
-            <a:pPr indent="0" marL="0">
+            <a:pPr algn="ctr" indent="0" marL="0">
               <a:buNone/>
             </a:pPr>
             <a:r>
-              <a:rPr lang="en-US" sz="1000" dirty="0">
-                <a:solidFill>
-                  <a:srgbClr val="6B6660"/>
+              <a:rPr lang="en-US" sz="1200" b="1" dirty="0">
+                <a:solidFill>
+                  <a:srgbClr val="FFFFFF"/>
                 </a:solidFill>
                 <a:latin typeface="Calibri" pitchFamily="34" charset="0"/>
                 <a:ea typeface="Calibri" pitchFamily="34" charset="-122"/>
                 <a:cs typeface="Calibri" pitchFamily="34" charset="-120"/>
               </a:rPr>
-              <a:t>Mr Zocchi · mrzocchi.com</a:t>
-            </a:r>
-            <a:endParaRPr lang="en-US" sz="1000" dirty="0"/>
+              <a:t>Term 1 · Number Sense</a:t>
+            </a:r>
+            <a:endParaRPr lang="en-US" sz="1200" dirty="0"/>
           </a:p>
         </p:txBody>
       </p:sp>
@@ -1293,7 +1404,7 @@
     <p:bg>
       <p:bgPr>
         <a:solidFill>
-          <a:srgbClr val="FFFFFF"/>
+          <a:srgbClr val="FAF8F5"/>
         </a:solidFill>
       </p:bgPr>
     </p:bg>
@@ -1339,8 +1450,8 @@
         </p:nvSpPr>
         <p:spPr>
           <a:xfrm>
-            <a:off x="548640" y="274320"/>
-            <a:ext cx="8046720" cy="640080"/>
+            <a:off x="7772400" y="4709160"/>
+            <a:ext cx="1097280" cy="320040"/>
           </a:xfrm>
           <a:prstGeom prst="rect">
             <a:avLst/>
@@ -1349,14 +1460,105 @@
           <a:ln/>
         </p:spPr>
         <p:txBody>
-          <a:bodyPr wrap="square" lIns="0" tIns="0" rIns="0" bIns="0" rtlCol="0" anchor="ctr"/>
+          <a:bodyPr wrap="square" rtlCol="0" anchor="ctr"/>
+          <a:lstStyle/>
+          <a:p>
+            <a:pPr algn="r" indent="0" marL="0">
+              <a:buNone/>
+            </a:pPr>
+            <a:r>
+              <a:rPr lang="en-US" sz="900" dirty="0">
+                <a:solidFill>
+                  <a:srgbClr val="6B6660"/>
+                </a:solidFill>
+                <a:latin typeface="Calibri" pitchFamily="34" charset="0"/>
+                <a:ea typeface="Calibri" pitchFamily="34" charset="-122"/>
+                <a:cs typeface="Calibri" pitchFamily="34" charset="-120"/>
+              </a:rPr>
+              <a:t>2 / 5</a:t>
+            </a:r>
+            <a:endParaRPr lang="en-US" sz="900" dirty="0"/>
+          </a:p>
+        </p:txBody>
+      </p:sp>
+      <p:sp>
+        <p:nvSpPr>
+          <p:cNvPr id="4" name="Shape 2"/>
+          <p:cNvSpPr/>
+          <p:nvPr/>
+        </p:nvSpPr>
+        <p:spPr>
+          <a:xfrm>
+            <a:off x="1371600" y="914400"/>
+            <a:ext cx="6400800" cy="3200400"/>
+          </a:xfrm>
+          <a:prstGeom prst="rect">
+            <a:avLst/>
+          </a:prstGeom>
+          <a:solidFill>
+            <a:srgbClr val="FFFFFF"/>
+          </a:solidFill>
+          <a:ln w="12700">
+            <a:solidFill>
+              <a:srgbClr val="E5E2DC"/>
+            </a:solidFill>
+            <a:prstDash val="solid"/>
+          </a:ln>
+          <a:effectLst>
+            <a:outerShdw sx="100000" sy="100000" kx="0" ky="0" algn="bl" rotWithShape="0" blurRad="50800" dist="25400" dir="8100000">
+              <a:srgbClr val="000000">
+                <a:alpha val="10000"/>
+              </a:srgbClr>
+            </a:outerShdw>
+          </a:effectLst>
+        </p:spPr>
+      </p:sp>
+      <p:sp>
+        <p:nvSpPr>
+          <p:cNvPr id="5" name="Shape 3"/>
+          <p:cNvSpPr/>
+          <p:nvPr/>
+        </p:nvSpPr>
+        <p:spPr>
+          <a:xfrm>
+            <a:off x="1371600" y="914400"/>
+            <a:ext cx="91440" cy="3200400"/>
+          </a:xfrm>
+          <a:prstGeom prst="rect">
+            <a:avLst/>
+          </a:prstGeom>
+          <a:solidFill>
+            <a:srgbClr val="2A9D8F"/>
+          </a:solidFill>
+          <a:ln/>
+        </p:spPr>
+      </p:sp>
+      <p:sp>
+        <p:nvSpPr>
+          <p:cNvPr id="6" name="Text 4"/>
+          <p:cNvSpPr/>
+          <p:nvPr/>
+        </p:nvSpPr>
+        <p:spPr>
+          <a:xfrm>
+            <a:off x="1828800" y="1097280"/>
+            <a:ext cx="5669280" cy="640080"/>
+          </a:xfrm>
+          <a:prstGeom prst="rect">
+            <a:avLst/>
+          </a:prstGeom>
+          <a:noFill/>
+          <a:ln/>
+        </p:spPr>
+        <p:txBody>
+          <a:bodyPr wrap="square" rtlCol="0" anchor="ctr"/>
           <a:lstStyle/>
           <a:p>
             <a:pPr indent="0" marL="0">
               <a:buNone/>
             </a:pPr>
             <a:r>
-              <a:rPr lang="en-US" sz="2600" b="1" dirty="0">
+              <a:rPr lang="en-US" sz="2400" b="1" dirty="0">
                 <a:solidFill>
                   <a:srgbClr val="1B2A4A"/>
                 </a:solidFill>
@@ -1364,22 +1566,22 @@
                 <a:ea typeface="Georgia" pitchFamily="34" charset="-122"/>
                 <a:cs typeface="Georgia" pitchFamily="34" charset="-120"/>
               </a:rPr>
-              <a:t>BIDMAS / BODMAS</a:t>
-            </a:r>
-            <a:endParaRPr lang="en-US" sz="2600" dirty="0"/>
-          </a:p>
-        </p:txBody>
-      </p:sp>
-      <p:sp>
-        <p:nvSpPr>
-          <p:cNvPr id="4" name="Text 2"/>
-          <p:cNvSpPr/>
-          <p:nvPr/>
-        </p:nvSpPr>
-        <p:spPr>
-          <a:xfrm>
-            <a:off x="548640" y="1097280"/>
-            <a:ext cx="8046720" cy="3474720"/>
+              <a:t>Why Order Matters</a:t>
+            </a:r>
+            <a:endParaRPr lang="en-US" sz="2400" dirty="0"/>
+          </a:p>
+        </p:txBody>
+      </p:sp>
+      <p:sp>
+        <p:nvSpPr>
+          <p:cNvPr id="7" name="Text 5"/>
+          <p:cNvSpPr/>
+          <p:nvPr/>
+        </p:nvSpPr>
+        <p:spPr>
+          <a:xfrm>
+            <a:off x="1828800" y="1828800"/>
+            <a:ext cx="5669280" cy="2011680"/>
           </a:xfrm>
           <a:prstGeom prst="rect">
             <a:avLst/>
@@ -1391,12 +1593,11 @@
           <a:bodyPr wrap="square" rtlCol="0" anchor="t"/>
           <a:lstStyle/>
           <a:p>
-            <a:pPr marL="342900" indent="-342900">
-              <a:spcAft>
-                <a:spcPts val="800"/>
-              </a:spcAft>
-              <a:buSzPct val="100000"/>
-              <a:buChar char="•"/>
+            <a:pPr indent="0" marL="0">
+              <a:lnSpc>
+                <a:spcPct val="130000"/>
+              </a:lnSpc>
+              <a:buNone/>
             </a:pPr>
             <a:r>
               <a:rPr lang="en-US" sz="1500" dirty="0">
@@ -1407,171 +1608,9 @@
                 <a:ea typeface="Calibri" pitchFamily="34" charset="-122"/>
                 <a:cs typeface="Calibri" pitchFamily="34" charset="-120"/>
               </a:rPr>
-              <a:t>BIDMAS tells us the ORDER to do operations in a calculation</a:t>
+              <a:t>Without a standard order, 3 + 4 × 2 could equal 14 or 11. Mathematicians agreed on BIDMAS (also called BODMAS or PEMDAS) to ensure everyone gets the same answer. The correct answer is 11 because multiplication comes before addition.</a:t>
             </a:r>
             <a:endParaRPr lang="en-US" sz="1500" dirty="0"/>
-          </a:p>
-          <a:p>
-            <a:pPr marL="342900" indent="-342900">
-              <a:spcAft>
-                <a:spcPts val="800"/>
-              </a:spcAft>
-              <a:buSzPct val="100000"/>
-              <a:buChar char="•"/>
-            </a:pPr>
-            <a:r>
-              <a:rPr lang="en-US" sz="1500" dirty="0">
-                <a:solidFill>
-                  <a:srgbClr val="3D3A36"/>
-                </a:solidFill>
-                <a:latin typeface="Calibri" pitchFamily="34" charset="0"/>
-                <a:ea typeface="Calibri" pitchFamily="34" charset="-122"/>
-                <a:cs typeface="Calibri" pitchFamily="34" charset="-120"/>
-              </a:rPr>
-              <a:t>B = Brackets first</a:t>
-            </a:r>
-            <a:endParaRPr lang="en-US" sz="1500" dirty="0"/>
-          </a:p>
-          <a:p>
-            <a:pPr marL="342900" indent="-342900">
-              <a:spcAft>
-                <a:spcPts val="800"/>
-              </a:spcAft>
-              <a:buSzPct val="100000"/>
-              <a:buChar char="•"/>
-            </a:pPr>
-            <a:r>
-              <a:rPr lang="en-US" sz="1500" dirty="0">
-                <a:solidFill>
-                  <a:srgbClr val="3D3A36"/>
-                </a:solidFill>
-                <a:latin typeface="Calibri" pitchFamily="34" charset="0"/>
-                <a:ea typeface="Calibri" pitchFamily="34" charset="-122"/>
-                <a:cs typeface="Calibri" pitchFamily="34" charset="-120"/>
-              </a:rPr>
-              <a:t>I = Indices (powers like 2², 3³)</a:t>
-            </a:r>
-            <a:endParaRPr lang="en-US" sz="1500" dirty="0"/>
-          </a:p>
-          <a:p>
-            <a:pPr marL="342900" indent="-342900">
-              <a:spcAft>
-                <a:spcPts val="800"/>
-              </a:spcAft>
-              <a:buSzPct val="100000"/>
-              <a:buChar char="•"/>
-            </a:pPr>
-            <a:r>
-              <a:rPr lang="en-US" sz="1500" dirty="0">
-                <a:solidFill>
-                  <a:srgbClr val="3D3A36"/>
-                </a:solidFill>
-                <a:latin typeface="Calibri" pitchFamily="34" charset="0"/>
-                <a:ea typeface="Calibri" pitchFamily="34" charset="-122"/>
-                <a:cs typeface="Calibri" pitchFamily="34" charset="-120"/>
-              </a:rPr>
-              <a:t>D = Division (left to right with multiplication)</a:t>
-            </a:r>
-            <a:endParaRPr lang="en-US" sz="1500" dirty="0"/>
-          </a:p>
-          <a:p>
-            <a:pPr marL="342900" indent="-342900">
-              <a:spcAft>
-                <a:spcPts val="800"/>
-              </a:spcAft>
-              <a:buSzPct val="100000"/>
-              <a:buChar char="•"/>
-            </a:pPr>
-            <a:r>
-              <a:rPr lang="en-US" sz="1500" dirty="0">
-                <a:solidFill>
-                  <a:srgbClr val="3D3A36"/>
-                </a:solidFill>
-                <a:latin typeface="Calibri" pitchFamily="34" charset="0"/>
-                <a:ea typeface="Calibri" pitchFamily="34" charset="-122"/>
-                <a:cs typeface="Calibri" pitchFamily="34" charset="-120"/>
-              </a:rPr>
-              <a:t>M = Multiplication (left to right with division)</a:t>
-            </a:r>
-            <a:endParaRPr lang="en-US" sz="1500" dirty="0"/>
-          </a:p>
-          <a:p>
-            <a:pPr marL="342900" indent="-342900">
-              <a:spcAft>
-                <a:spcPts val="800"/>
-              </a:spcAft>
-              <a:buSzPct val="100000"/>
-              <a:buChar char="•"/>
-            </a:pPr>
-            <a:r>
-              <a:rPr lang="en-US" sz="1500" dirty="0">
-                <a:solidFill>
-                  <a:srgbClr val="3D3A36"/>
-                </a:solidFill>
-                <a:latin typeface="Calibri" pitchFamily="34" charset="0"/>
-                <a:ea typeface="Calibri" pitchFamily="34" charset="-122"/>
-                <a:cs typeface="Calibri" pitchFamily="34" charset="-120"/>
-              </a:rPr>
-              <a:t>A = Addition (left to right with subtraction)</a:t>
-            </a:r>
-            <a:endParaRPr lang="en-US" sz="1500" dirty="0"/>
-          </a:p>
-          <a:p>
-            <a:pPr marL="342900" indent="-342900">
-              <a:spcAft>
-                <a:spcPts val="800"/>
-              </a:spcAft>
-              <a:buSzPct val="100000"/>
-              <a:buChar char="•"/>
-            </a:pPr>
-            <a:r>
-              <a:rPr lang="en-US" sz="1500" dirty="0">
-                <a:solidFill>
-                  <a:srgbClr val="3D3A36"/>
-                </a:solidFill>
-                <a:latin typeface="Calibri" pitchFamily="34" charset="0"/>
-                <a:ea typeface="Calibri" pitchFamily="34" charset="-122"/>
-                <a:cs typeface="Calibri" pitchFamily="34" charset="-120"/>
-              </a:rPr>
-              <a:t>S = Subtraction (left to right with addition)</a:t>
-            </a:r>
-            <a:endParaRPr lang="en-US" sz="1500" dirty="0"/>
-          </a:p>
-        </p:txBody>
-      </p:sp>
-      <p:sp>
-        <p:nvSpPr>
-          <p:cNvPr id="5" name="Text 3"/>
-          <p:cNvSpPr/>
-          <p:nvPr/>
-        </p:nvSpPr>
-        <p:spPr>
-          <a:xfrm>
-            <a:off x="548640" y="4800600"/>
-            <a:ext cx="3657600" cy="274320"/>
-          </a:xfrm>
-          <a:prstGeom prst="rect">
-            <a:avLst/>
-          </a:prstGeom>
-          <a:noFill/>
-          <a:ln/>
-        </p:spPr>
-        <p:txBody>
-          <a:bodyPr wrap="square" rtlCol="0" anchor="ctr"/>
-          <a:lstStyle/>
-          <a:p>
-            <a:pPr indent="0" marL="0">
-              <a:buNone/>
-            </a:pPr>
-            <a:r>
-              <a:rPr lang="en-US" sz="800" dirty="0">
-                <a:solidFill>
-                  <a:srgbClr val="9B9690"/>
-                </a:solidFill>
-              </a:rPr>
-              <a:t>mrzocchi.com</a:t>
-            </a:r>
-            <a:endParaRPr lang="en-US" sz="800" dirty="0"/>
           </a:p>
         </p:txBody>
       </p:sp>
@@ -1589,7 +1628,7 @@
     <p:bg>
       <p:bgPr>
         <a:solidFill>
-          <a:srgbClr val="FFFFFF"/>
+          <a:srgbClr val="FAF8F5"/>
         </a:solidFill>
       </p:bgPr>
     </p:bg>
@@ -1635,8 +1674,8 @@
         </p:nvSpPr>
         <p:spPr>
           <a:xfrm>
-            <a:off x="548640" y="274320"/>
-            <a:ext cx="8046720" cy="640080"/>
+            <a:off x="7772400" y="4709160"/>
+            <a:ext cx="1097280" cy="320040"/>
           </a:xfrm>
           <a:prstGeom prst="rect">
             <a:avLst/>
@@ -1645,7 +1684,46 @@
           <a:ln/>
         </p:spPr>
         <p:txBody>
-          <a:bodyPr wrap="square" lIns="0" tIns="0" rIns="0" bIns="0" rtlCol="0" anchor="ctr"/>
+          <a:bodyPr wrap="square" rtlCol="0" anchor="ctr"/>
+          <a:lstStyle/>
+          <a:p>
+            <a:pPr algn="r" indent="0" marL="0">
+              <a:buNone/>
+            </a:pPr>
+            <a:r>
+              <a:rPr lang="en-US" sz="900" dirty="0">
+                <a:solidFill>
+                  <a:srgbClr val="6B6660"/>
+                </a:solidFill>
+                <a:latin typeface="Calibri" pitchFamily="34" charset="0"/>
+                <a:ea typeface="Calibri" pitchFamily="34" charset="-122"/>
+                <a:cs typeface="Calibri" pitchFamily="34" charset="-120"/>
+              </a:rPr>
+              <a:t>3 / 5</a:t>
+            </a:r>
+            <a:endParaRPr lang="en-US" sz="900" dirty="0"/>
+          </a:p>
+        </p:txBody>
+      </p:sp>
+      <p:sp>
+        <p:nvSpPr>
+          <p:cNvPr id="4" name="Text 2"/>
+          <p:cNvSpPr/>
+          <p:nvPr/>
+        </p:nvSpPr>
+        <p:spPr>
+          <a:xfrm>
+            <a:off x="457200" y="274320"/>
+            <a:ext cx="8229600" cy="640080"/>
+          </a:xfrm>
+          <a:prstGeom prst="rect">
+            <a:avLst/>
+          </a:prstGeom>
+          <a:noFill/>
+          <a:ln/>
+        </p:spPr>
+        <p:txBody>
+          <a:bodyPr wrap="square" rtlCol="0" anchor="ctr"/>
           <a:lstStyle/>
           <a:p>
             <a:pPr indent="0" marL="0">
@@ -1660,7 +1738,7 @@
                 <a:ea typeface="Georgia" pitchFamily="34" charset="-122"/>
                 <a:cs typeface="Georgia" pitchFamily="34" charset="-120"/>
               </a:rPr>
-              <a:t>Worked Examples</a:t>
+              <a:t>BIDMAS</a:t>
             </a:r>
             <a:endParaRPr lang="en-US" sz="2600" dirty="0"/>
           </a:p>
@@ -1668,14 +1746,66 @@
       </p:sp>
       <p:sp>
         <p:nvSpPr>
-          <p:cNvPr id="4" name="Text 2"/>
-          <p:cNvSpPr/>
-          <p:nvPr/>
-        </p:nvSpPr>
-        <p:spPr>
-          <a:xfrm>
-            <a:off x="548640" y="1097280"/>
-            <a:ext cx="8046720" cy="3474720"/>
+          <p:cNvPr id="5" name="Shape 3"/>
+          <p:cNvSpPr/>
+          <p:nvPr/>
+        </p:nvSpPr>
+        <p:spPr>
+          <a:xfrm>
+            <a:off x="457200" y="1188720"/>
+            <a:ext cx="2560320" cy="1828800"/>
+          </a:xfrm>
+          <a:prstGeom prst="rect">
+            <a:avLst/>
+          </a:prstGeom>
+          <a:solidFill>
+            <a:srgbClr val="FFFFFF"/>
+          </a:solidFill>
+          <a:ln w="12700">
+            <a:solidFill>
+              <a:srgbClr val="E5E2DC"/>
+            </a:solidFill>
+            <a:prstDash val="solid"/>
+          </a:ln>
+          <a:effectLst>
+            <a:outerShdw sx="100000" sy="100000" kx="0" ky="0" algn="bl" rotWithShape="0" blurRad="50800" dist="25400" dir="8100000">
+              <a:srgbClr val="000000">
+                <a:alpha val="10000"/>
+              </a:srgbClr>
+            </a:outerShdw>
+          </a:effectLst>
+        </p:spPr>
+      </p:sp>
+      <p:sp>
+        <p:nvSpPr>
+          <p:cNvPr id="6" name="Shape 4"/>
+          <p:cNvSpPr/>
+          <p:nvPr/>
+        </p:nvSpPr>
+        <p:spPr>
+          <a:xfrm>
+            <a:off x="457200" y="1188720"/>
+            <a:ext cx="2560320" cy="54864"/>
+          </a:xfrm>
+          <a:prstGeom prst="rect">
+            <a:avLst/>
+          </a:prstGeom>
+          <a:solidFill>
+            <a:srgbClr val="2A9D8F"/>
+          </a:solidFill>
+          <a:ln/>
+        </p:spPr>
+      </p:sp>
+      <p:sp>
+        <p:nvSpPr>
+          <p:cNvPr id="7" name="Text 5"/>
+          <p:cNvSpPr/>
+          <p:nvPr/>
+        </p:nvSpPr>
+        <p:spPr>
+          <a:xfrm>
+            <a:off x="594360" y="1325880"/>
+            <a:ext cx="2286000" cy="365760"/>
           </a:xfrm>
           <a:prstGeom prst="rect">
             <a:avLst/>
@@ -1684,39 +1814,53 @@
           <a:ln/>
         </p:spPr>
         <p:txBody>
-          <a:bodyPr wrap="square" rtlCol="0" anchor="t"/>
-          <a:lstStyle/>
-          <a:p>
-            <a:pPr marL="342900" indent="-342900">
-              <a:spcAft>
-                <a:spcPts val="800"/>
-              </a:spcAft>
-              <a:buSzPct val="100000"/>
-              <a:buChar char="•"/>
-            </a:pPr>
-            <a:r>
-              <a:rPr lang="en-US" sz="1500" dirty="0">
-                <a:solidFill>
-                  <a:srgbClr val="3D3A36"/>
+          <a:bodyPr wrap="square" rtlCol="0" anchor="ctr"/>
+          <a:lstStyle/>
+          <a:p>
+            <a:pPr indent="0" marL="0">
+              <a:buNone/>
+            </a:pPr>
+            <a:r>
+              <a:rPr lang="en-US" sz="1400" b="1" dirty="0">
+                <a:solidFill>
+                  <a:srgbClr val="1B2A4A"/>
                 </a:solidFill>
                 <a:latin typeface="Calibri" pitchFamily="34" charset="0"/>
                 <a:ea typeface="Calibri" pitchFamily="34" charset="-122"/>
                 <a:cs typeface="Calibri" pitchFamily="34" charset="-120"/>
               </a:rPr>
-              <a:t>3 + 4 × 2 = 3 + 8 = 11 (NOT 14 — multiplication before addition)</a:t>
-            </a:r>
-            <a:endParaRPr lang="en-US" sz="1500" dirty="0"/>
-          </a:p>
-          <a:p>
-            <a:pPr marL="342900" indent="-342900">
-              <a:spcAft>
-                <a:spcPts val="800"/>
-              </a:spcAft>
-              <a:buSzPct val="100000"/>
-              <a:buChar char="•"/>
-            </a:pPr>
-            <a:r>
-              <a:rPr lang="en-US" sz="1500" dirty="0">
+              <a:t>B — Brackets</a:t>
+            </a:r>
+            <a:endParaRPr lang="en-US" sz="1400" dirty="0"/>
+          </a:p>
+        </p:txBody>
+      </p:sp>
+      <p:sp>
+        <p:nvSpPr>
+          <p:cNvPr id="8" name="Text 6"/>
+          <p:cNvSpPr/>
+          <p:nvPr/>
+        </p:nvSpPr>
+        <p:spPr>
+          <a:xfrm>
+            <a:off x="594360" y="1737360"/>
+            <a:ext cx="2286000" cy="1097280"/>
+          </a:xfrm>
+          <a:prstGeom prst="rect">
+            <a:avLst/>
+          </a:prstGeom>
+          <a:noFill/>
+          <a:ln/>
+        </p:spPr>
+        <p:txBody>
+          <a:bodyPr wrap="square" rtlCol="0" anchor="t"/>
+          <a:lstStyle/>
+          <a:p>
+            <a:pPr indent="0" marL="0">
+              <a:buNone/>
+            </a:pPr>
+            <a:r>
+              <a:rPr lang="en-US" sz="1100" dirty="0">
                 <a:solidFill>
                   <a:srgbClr val="3D3A36"/>
                 </a:solidFill>
@@ -1724,41 +1868,129 @@
                 <a:ea typeface="Calibri" pitchFamily="34" charset="-122"/>
                 <a:cs typeface="Calibri" pitchFamily="34" charset="-120"/>
               </a:rPr>
-              <a:t>(3 + 4) × 2 = 7 × 2 = 14 (brackets change the order!)</a:t>
-            </a:r>
-            <a:endParaRPr lang="en-US" sz="1500" dirty="0"/>
-          </a:p>
-          <a:p>
-            <a:pPr marL="342900" indent="-342900">
-              <a:spcAft>
-                <a:spcPts val="800"/>
-              </a:spcAft>
-              <a:buSzPct val="100000"/>
-              <a:buChar char="•"/>
-            </a:pPr>
-            <a:r>
-              <a:rPr lang="en-US" sz="1500" dirty="0">
-                <a:solidFill>
-                  <a:srgbClr val="3D3A36"/>
+              <a:t>Always do brackets first. 3 × (4 + 2) = 3 × 6 = 18. Without brackets: 3 × 4 + 2 = 12 + 2 = 14. Brackets change the answer!</a:t>
+            </a:r>
+            <a:endParaRPr lang="en-US" sz="1100" dirty="0"/>
+          </a:p>
+        </p:txBody>
+      </p:sp>
+      <p:sp>
+        <p:nvSpPr>
+          <p:cNvPr id="9" name="Shape 7"/>
+          <p:cNvSpPr/>
+          <p:nvPr/>
+        </p:nvSpPr>
+        <p:spPr>
+          <a:xfrm>
+            <a:off x="3291840" y="1188720"/>
+            <a:ext cx="2560320" cy="1828800"/>
+          </a:xfrm>
+          <a:prstGeom prst="rect">
+            <a:avLst/>
+          </a:prstGeom>
+          <a:solidFill>
+            <a:srgbClr val="FFFFFF"/>
+          </a:solidFill>
+          <a:ln w="12700">
+            <a:solidFill>
+              <a:srgbClr val="E5E2DC"/>
+            </a:solidFill>
+            <a:prstDash val="solid"/>
+          </a:ln>
+          <a:effectLst>
+            <a:outerShdw sx="100000" sy="100000" kx="0" ky="0" algn="bl" rotWithShape="0" blurRad="50800" dist="25400" dir="8100000">
+              <a:srgbClr val="000000">
+                <a:alpha val="10000"/>
+              </a:srgbClr>
+            </a:outerShdw>
+          </a:effectLst>
+        </p:spPr>
+      </p:sp>
+      <p:sp>
+        <p:nvSpPr>
+          <p:cNvPr id="10" name="Shape 8"/>
+          <p:cNvSpPr/>
+          <p:nvPr/>
+        </p:nvSpPr>
+        <p:spPr>
+          <a:xfrm>
+            <a:off x="3291840" y="1188720"/>
+            <a:ext cx="2560320" cy="54864"/>
+          </a:xfrm>
+          <a:prstGeom prst="rect">
+            <a:avLst/>
+          </a:prstGeom>
+          <a:solidFill>
+            <a:srgbClr val="2A9D8F"/>
+          </a:solidFill>
+          <a:ln/>
+        </p:spPr>
+      </p:sp>
+      <p:sp>
+        <p:nvSpPr>
+          <p:cNvPr id="11" name="Text 9"/>
+          <p:cNvSpPr/>
+          <p:nvPr/>
+        </p:nvSpPr>
+        <p:spPr>
+          <a:xfrm>
+            <a:off x="3429000" y="1325880"/>
+            <a:ext cx="2286000" cy="365760"/>
+          </a:xfrm>
+          <a:prstGeom prst="rect">
+            <a:avLst/>
+          </a:prstGeom>
+          <a:noFill/>
+          <a:ln/>
+        </p:spPr>
+        <p:txBody>
+          <a:bodyPr wrap="square" rtlCol="0" anchor="ctr"/>
+          <a:lstStyle/>
+          <a:p>
+            <a:pPr indent="0" marL="0">
+              <a:buNone/>
+            </a:pPr>
+            <a:r>
+              <a:rPr lang="en-US" sz="1400" b="1" dirty="0">
+                <a:solidFill>
+                  <a:srgbClr val="1B2A4A"/>
                 </a:solidFill>
                 <a:latin typeface="Calibri" pitchFamily="34" charset="0"/>
                 <a:ea typeface="Calibri" pitchFamily="34" charset="-122"/>
                 <a:cs typeface="Calibri" pitchFamily="34" charset="-120"/>
               </a:rPr>
-              <a:t>2 + 3² = 2 + 9 = 11 (indices before addition)</a:t>
-            </a:r>
-            <a:endParaRPr lang="en-US" sz="1500" dirty="0"/>
-          </a:p>
-          <a:p>
-            <a:pPr marL="342900" indent="-342900">
-              <a:spcAft>
-                <a:spcPts val="800"/>
-              </a:spcAft>
-              <a:buSzPct val="100000"/>
-              <a:buChar char="•"/>
-            </a:pPr>
-            <a:r>
-              <a:rPr lang="en-US" sz="1500" dirty="0">
+              <a:t>I — Indices</a:t>
+            </a:r>
+            <a:endParaRPr lang="en-US" sz="1400" dirty="0"/>
+          </a:p>
+        </p:txBody>
+      </p:sp>
+      <p:sp>
+        <p:nvSpPr>
+          <p:cNvPr id="12" name="Text 10"/>
+          <p:cNvSpPr/>
+          <p:nvPr/>
+        </p:nvSpPr>
+        <p:spPr>
+          <a:xfrm>
+            <a:off x="3429000" y="1737360"/>
+            <a:ext cx="2286000" cy="1097280"/>
+          </a:xfrm>
+          <a:prstGeom prst="rect">
+            <a:avLst/>
+          </a:prstGeom>
+          <a:noFill/>
+          <a:ln/>
+        </p:spPr>
+        <p:txBody>
+          <a:bodyPr wrap="square" rtlCol="0" anchor="t"/>
+          <a:lstStyle/>
+          <a:p>
+            <a:pPr indent="0" marL="0">
+              <a:buNone/>
+            </a:pPr>
+            <a:r>
+              <a:rPr lang="en-US" sz="1100" dirty="0">
                 <a:solidFill>
                   <a:srgbClr val="3D3A36"/>
                 </a:solidFill>
@@ -1766,43 +1998,113 @@
                 <a:ea typeface="Calibri" pitchFamily="34" charset="-122"/>
                 <a:cs typeface="Calibri" pitchFamily="34" charset="-120"/>
               </a:rPr>
-              <a:t>12 ÷ 3 + 2 × 4 = 4 + 8 = 12 (division and multiplication first, left to right)</a:t>
-            </a:r>
-            <a:endParaRPr lang="en-US" sz="1500" dirty="0"/>
-          </a:p>
-          <a:p>
-            <a:pPr marL="342900" indent="-342900">
-              <a:spcAft>
-                <a:spcPts val="800"/>
-              </a:spcAft>
-              <a:buSzPct val="100000"/>
-              <a:buChar char="•"/>
-            </a:pPr>
-            <a:r>
-              <a:rPr lang="en-US" sz="1500" dirty="0">
-                <a:solidFill>
-                  <a:srgbClr val="3D3A36"/>
+              <a:t>Powers/exponents come second. 2 + 3² = 2 + 9 = 11. NOT (2 + 3)² = 25. Indices = squares, cubes, etc.</a:t>
+            </a:r>
+            <a:endParaRPr lang="en-US" sz="1100" dirty="0"/>
+          </a:p>
+        </p:txBody>
+      </p:sp>
+      <p:sp>
+        <p:nvSpPr>
+          <p:cNvPr id="13" name="Shape 11"/>
+          <p:cNvSpPr/>
+          <p:nvPr/>
+        </p:nvSpPr>
+        <p:spPr>
+          <a:xfrm>
+            <a:off x="6126480" y="1188720"/>
+            <a:ext cx="2560320" cy="1828800"/>
+          </a:xfrm>
+          <a:prstGeom prst="rect">
+            <a:avLst/>
+          </a:prstGeom>
+          <a:solidFill>
+            <a:srgbClr val="FFFFFF"/>
+          </a:solidFill>
+          <a:ln w="12700">
+            <a:solidFill>
+              <a:srgbClr val="E5E2DC"/>
+            </a:solidFill>
+            <a:prstDash val="solid"/>
+          </a:ln>
+          <a:effectLst>
+            <a:outerShdw sx="100000" sy="100000" kx="0" ky="0" algn="bl" rotWithShape="0" blurRad="50800" dist="25400" dir="8100000">
+              <a:srgbClr val="000000">
+                <a:alpha val="10000"/>
+              </a:srgbClr>
+            </a:outerShdw>
+          </a:effectLst>
+        </p:spPr>
+      </p:sp>
+      <p:sp>
+        <p:nvSpPr>
+          <p:cNvPr id="14" name="Shape 12"/>
+          <p:cNvSpPr/>
+          <p:nvPr/>
+        </p:nvSpPr>
+        <p:spPr>
+          <a:xfrm>
+            <a:off x="6126480" y="1188720"/>
+            <a:ext cx="2560320" cy="54864"/>
+          </a:xfrm>
+          <a:prstGeom prst="rect">
+            <a:avLst/>
+          </a:prstGeom>
+          <a:solidFill>
+            <a:srgbClr val="2A9D8F"/>
+          </a:solidFill>
+          <a:ln/>
+        </p:spPr>
+      </p:sp>
+      <p:sp>
+        <p:nvSpPr>
+          <p:cNvPr id="15" name="Text 13"/>
+          <p:cNvSpPr/>
+          <p:nvPr/>
+        </p:nvSpPr>
+        <p:spPr>
+          <a:xfrm>
+            <a:off x="6263640" y="1325880"/>
+            <a:ext cx="2286000" cy="365760"/>
+          </a:xfrm>
+          <a:prstGeom prst="rect">
+            <a:avLst/>
+          </a:prstGeom>
+          <a:noFill/>
+          <a:ln/>
+        </p:spPr>
+        <p:txBody>
+          <a:bodyPr wrap="square" rtlCol="0" anchor="ctr"/>
+          <a:lstStyle/>
+          <a:p>
+            <a:pPr indent="0" marL="0">
+              <a:buNone/>
+            </a:pPr>
+            <a:r>
+              <a:rPr lang="en-US" sz="1400" b="1" dirty="0">
+                <a:solidFill>
+                  <a:srgbClr val="1B2A4A"/>
                 </a:solidFill>
                 <a:latin typeface="Calibri" pitchFamily="34" charset="0"/>
                 <a:ea typeface="Calibri" pitchFamily="34" charset="-122"/>
                 <a:cs typeface="Calibri" pitchFamily="34" charset="-120"/>
               </a:rPr>
-              <a:t>Always work through step by step — show your working</a:t>
-            </a:r>
-            <a:endParaRPr lang="en-US" sz="1500" dirty="0"/>
-          </a:p>
-        </p:txBody>
-      </p:sp>
-      <p:sp>
-        <p:nvSpPr>
-          <p:cNvPr id="5" name="Text 3"/>
-          <p:cNvSpPr/>
-          <p:nvPr/>
-        </p:nvSpPr>
-        <p:spPr>
-          <a:xfrm>
-            <a:off x="548640" y="4800600"/>
-            <a:ext cx="3657600" cy="274320"/>
+              <a:t>DM — Division &amp; Multiplication</a:t>
+            </a:r>
+            <a:endParaRPr lang="en-US" sz="1400" dirty="0"/>
+          </a:p>
+        </p:txBody>
+      </p:sp>
+      <p:sp>
+        <p:nvSpPr>
+          <p:cNvPr id="16" name="Text 14"/>
+          <p:cNvSpPr/>
+          <p:nvPr/>
+        </p:nvSpPr>
+        <p:spPr>
+          <a:xfrm>
+            <a:off x="6263640" y="1737360"/>
+            <a:ext cx="2286000" cy="1097280"/>
           </a:xfrm>
           <a:prstGeom prst="rect">
             <a:avLst/>
@@ -1811,21 +2113,24 @@
           <a:ln/>
         </p:spPr>
         <p:txBody>
-          <a:bodyPr wrap="square" rtlCol="0" anchor="ctr"/>
+          <a:bodyPr wrap="square" rtlCol="0" anchor="t"/>
           <a:lstStyle/>
           <a:p>
             <a:pPr indent="0" marL="0">
               <a:buNone/>
             </a:pPr>
             <a:r>
-              <a:rPr lang="en-US" sz="800" dirty="0">
-                <a:solidFill>
-                  <a:srgbClr val="9B9690"/>
-                </a:solidFill>
-              </a:rPr>
-              <a:t>mrzocchi.com</a:t>
-            </a:r>
-            <a:endParaRPr lang="en-US" sz="800" dirty="0"/>
+              <a:rPr lang="en-US" sz="1100" dirty="0">
+                <a:solidFill>
+                  <a:srgbClr val="3D3A36"/>
+                </a:solidFill>
+                <a:latin typeface="Calibri" pitchFamily="34" charset="0"/>
+                <a:ea typeface="Calibri" pitchFamily="34" charset="-122"/>
+                <a:cs typeface="Calibri" pitchFamily="34" charset="-120"/>
+              </a:rPr>
+              <a:t>Equal priority — work left to right. 12 ÷ 3 × 2 = 4 × 2 = 8. NOT 12 ÷ 6 = 2.</a:t>
+            </a:r>
+            <a:endParaRPr lang="en-US" sz="1100" dirty="0"/>
           </a:p>
         </p:txBody>
       </p:sp>
@@ -1840,6 +2145,466 @@
 <file path=ppt/slides/slide4.xml><?xml version="1.0" encoding="utf-8"?>
 <p:sld xmlns:a="http://schemas.openxmlformats.org/drawingml/2006/main" xmlns:r="http://schemas.openxmlformats.org/officeDocument/2006/relationships" xmlns:p="http://schemas.openxmlformats.org/presentationml/2006/main">
   <p:cSld name="Slide 4">
+    <p:bg>
+      <p:bgPr>
+        <a:solidFill>
+          <a:srgbClr val="FAF8F5"/>
+        </a:solidFill>
+      </p:bgPr>
+    </p:bg>
+    <p:spTree>
+      <p:nvGrpSpPr>
+        <p:cNvPr id="1" name=""/>
+        <p:cNvGrpSpPr/>
+        <p:nvPr/>
+      </p:nvGrpSpPr>
+      <p:grpSpPr>
+        <a:xfrm>
+          <a:off x="0" y="0"/>
+          <a:ext cx="0" cy="0"/>
+          <a:chOff x="0" y="0"/>
+          <a:chExt cx="0" cy="0"/>
+        </a:xfrm>
+      </p:grpSpPr>
+      <p:sp>
+        <p:nvSpPr>
+          <p:cNvPr id="2" name="Shape 0"/>
+          <p:cNvSpPr/>
+          <p:nvPr/>
+        </p:nvSpPr>
+        <p:spPr>
+          <a:xfrm>
+            <a:off x="0" y="0"/>
+            <a:ext cx="9144000" cy="54864"/>
+          </a:xfrm>
+          <a:prstGeom prst="rect">
+            <a:avLst/>
+          </a:prstGeom>
+          <a:solidFill>
+            <a:srgbClr val="2A9D8F"/>
+          </a:solidFill>
+          <a:ln/>
+        </p:spPr>
+      </p:sp>
+      <p:sp>
+        <p:nvSpPr>
+          <p:cNvPr id="3" name="Text 1"/>
+          <p:cNvSpPr/>
+          <p:nvPr/>
+        </p:nvSpPr>
+        <p:spPr>
+          <a:xfrm>
+            <a:off x="7772400" y="4709160"/>
+            <a:ext cx="1097280" cy="320040"/>
+          </a:xfrm>
+          <a:prstGeom prst="rect">
+            <a:avLst/>
+          </a:prstGeom>
+          <a:noFill/>
+          <a:ln/>
+        </p:spPr>
+        <p:txBody>
+          <a:bodyPr wrap="square" rtlCol="0" anchor="ctr"/>
+          <a:lstStyle/>
+          <a:p>
+            <a:pPr algn="r" indent="0" marL="0">
+              <a:buNone/>
+            </a:pPr>
+            <a:r>
+              <a:rPr lang="en-US" sz="900" dirty="0">
+                <a:solidFill>
+                  <a:srgbClr val="6B6660"/>
+                </a:solidFill>
+                <a:latin typeface="Calibri" pitchFamily="34" charset="0"/>
+                <a:ea typeface="Calibri" pitchFamily="34" charset="-122"/>
+                <a:cs typeface="Calibri" pitchFamily="34" charset="-120"/>
+              </a:rPr>
+              <a:t>4 / 5</a:t>
+            </a:r>
+            <a:endParaRPr lang="en-US" sz="900" dirty="0"/>
+          </a:p>
+        </p:txBody>
+      </p:sp>
+      <p:sp>
+        <p:nvSpPr>
+          <p:cNvPr id="4" name="Text 2"/>
+          <p:cNvSpPr/>
+          <p:nvPr/>
+        </p:nvSpPr>
+        <p:spPr>
+          <a:xfrm>
+            <a:off x="457200" y="274320"/>
+            <a:ext cx="8229600" cy="640080"/>
+          </a:xfrm>
+          <a:prstGeom prst="rect">
+            <a:avLst/>
+          </a:prstGeom>
+          <a:noFill/>
+          <a:ln/>
+        </p:spPr>
+        <p:txBody>
+          <a:bodyPr wrap="square" rtlCol="0" anchor="ctr"/>
+          <a:lstStyle/>
+          <a:p>
+            <a:pPr indent="0" marL="0">
+              <a:buNone/>
+            </a:pPr>
+            <a:r>
+              <a:rPr lang="en-US" sz="2600" b="1" dirty="0">
+                <a:solidFill>
+                  <a:srgbClr val="1B2A4A"/>
+                </a:solidFill>
+                <a:latin typeface="Georgia" pitchFamily="34" charset="0"/>
+                <a:ea typeface="Georgia" pitchFamily="34" charset="-122"/>
+                <a:cs typeface="Georgia" pitchFamily="34" charset="-120"/>
+              </a:rPr>
+              <a:t>Practice Problems</a:t>
+            </a:r>
+            <a:endParaRPr lang="en-US" sz="2600" dirty="0"/>
+          </a:p>
+        </p:txBody>
+      </p:sp>
+      <p:sp>
+        <p:nvSpPr>
+          <p:cNvPr id="5" name="Text 3"/>
+          <p:cNvSpPr/>
+          <p:nvPr/>
+        </p:nvSpPr>
+        <p:spPr>
+          <a:xfrm>
+            <a:off x="457200" y="1188720"/>
+            <a:ext cx="3840480" cy="3474720"/>
+          </a:xfrm>
+          <a:prstGeom prst="rect">
+            <a:avLst/>
+          </a:prstGeom>
+          <a:noFill/>
+          <a:ln/>
+        </p:spPr>
+        <p:txBody>
+          <a:bodyPr wrap="square" rtlCol="0" anchor="t"/>
+          <a:lstStyle/>
+          <a:p>
+            <a:pPr marL="342900" indent="-342900">
+              <a:spcAft>
+                <a:spcPts val="600"/>
+              </a:spcAft>
+              <a:buSzPct val="100000"/>
+              <a:buChar char="•"/>
+            </a:pPr>
+            <a:r>
+              <a:rPr lang="en-US" sz="1400" dirty="0">
+                <a:solidFill>
+                  <a:srgbClr val="3D3A36"/>
+                </a:solidFill>
+                <a:latin typeface="Calibri" pitchFamily="34" charset="0"/>
+                <a:ea typeface="Calibri" pitchFamily="34" charset="-122"/>
+                <a:cs typeface="Calibri" pitchFamily="34" charset="-120"/>
+              </a:rPr>
+              <a:t>5 + 3 × 2 = 5 + 6 = 11</a:t>
+            </a:r>
+            <a:endParaRPr lang="en-US" sz="1400" dirty="0"/>
+          </a:p>
+          <a:p>
+            <a:pPr marL="342900" indent="-342900">
+              <a:spcAft>
+                <a:spcPts val="600"/>
+              </a:spcAft>
+              <a:buSzPct val="100000"/>
+              <a:buChar char="•"/>
+            </a:pPr>
+            <a:r>
+              <a:rPr lang="en-US" sz="1400" dirty="0">
+                <a:solidFill>
+                  <a:srgbClr val="3D3A36"/>
+                </a:solidFill>
+                <a:latin typeface="Calibri" pitchFamily="34" charset="0"/>
+                <a:ea typeface="Calibri" pitchFamily="34" charset="-122"/>
+                <a:cs typeface="Calibri" pitchFamily="34" charset="-120"/>
+              </a:rPr>
+              <a:t>(5 + 3) × 2 = 8 × 2 = 16</a:t>
+            </a:r>
+            <a:endParaRPr lang="en-US" sz="1400" dirty="0"/>
+          </a:p>
+          <a:p>
+            <a:pPr marL="342900" indent="-342900">
+              <a:spcAft>
+                <a:spcPts val="600"/>
+              </a:spcAft>
+              <a:buSzPct val="100000"/>
+              <a:buChar char="•"/>
+            </a:pPr>
+            <a:r>
+              <a:rPr lang="en-US" sz="1400" dirty="0">
+                <a:solidFill>
+                  <a:srgbClr val="3D3A36"/>
+                </a:solidFill>
+                <a:latin typeface="Calibri" pitchFamily="34" charset="0"/>
+                <a:ea typeface="Calibri" pitchFamily="34" charset="-122"/>
+                <a:cs typeface="Calibri" pitchFamily="34" charset="-120"/>
+              </a:rPr>
+              <a:t>4 + 6 ÷ 2 = 4 + 3 = 7</a:t>
+            </a:r>
+            <a:endParaRPr lang="en-US" sz="1400" dirty="0"/>
+          </a:p>
+          <a:p>
+            <a:pPr marL="342900" indent="-342900">
+              <a:spcAft>
+                <a:spcPts val="600"/>
+              </a:spcAft>
+              <a:buSzPct val="100000"/>
+              <a:buChar char="•"/>
+            </a:pPr>
+            <a:r>
+              <a:rPr lang="en-US" sz="1400" dirty="0">
+                <a:solidFill>
+                  <a:srgbClr val="3D3A36"/>
+                </a:solidFill>
+                <a:latin typeface="Calibri" pitchFamily="34" charset="0"/>
+                <a:ea typeface="Calibri" pitchFamily="34" charset="-122"/>
+                <a:cs typeface="Calibri" pitchFamily="34" charset="-120"/>
+              </a:rPr>
+              <a:t>10 − 2² + 1 = 10 − 4 + 1 = 7</a:t>
+            </a:r>
+            <a:endParaRPr lang="en-US" sz="1400" dirty="0"/>
+          </a:p>
+          <a:p>
+            <a:pPr marL="342900" indent="-342900">
+              <a:spcAft>
+                <a:spcPts val="600"/>
+              </a:spcAft>
+              <a:buSzPct val="100000"/>
+              <a:buChar char="•"/>
+            </a:pPr>
+            <a:r>
+              <a:rPr lang="en-US" sz="1400" dirty="0">
+                <a:solidFill>
+                  <a:srgbClr val="3D3A36"/>
+                </a:solidFill>
+                <a:latin typeface="Calibri" pitchFamily="34" charset="0"/>
+                <a:ea typeface="Calibri" pitchFamily="34" charset="-122"/>
+                <a:cs typeface="Calibri" pitchFamily="34" charset="-120"/>
+              </a:rPr>
+              <a:t>3 × (8 − 5)² = 3 × 3² = 3 × 9 = 27</a:t>
+            </a:r>
+            <a:endParaRPr lang="en-US" sz="1400" dirty="0"/>
+          </a:p>
+        </p:txBody>
+      </p:sp>
+      <p:sp>
+        <p:nvSpPr>
+          <p:cNvPr id="6" name="Shape 4"/>
+          <p:cNvSpPr/>
+          <p:nvPr/>
+        </p:nvSpPr>
+        <p:spPr>
+          <a:xfrm>
+            <a:off x="4846320" y="1188720"/>
+            <a:ext cx="3840480" cy="3474720"/>
+          </a:xfrm>
+          <a:prstGeom prst="rect">
+            <a:avLst/>
+          </a:prstGeom>
+          <a:solidFill>
+            <a:srgbClr val="FFFFFF"/>
+          </a:solidFill>
+          <a:ln w="12700">
+            <a:solidFill>
+              <a:srgbClr val="E5E2DC"/>
+            </a:solidFill>
+            <a:prstDash val="solid"/>
+          </a:ln>
+          <a:effectLst>
+            <a:outerShdw sx="100000" sy="100000" kx="0" ky="0" algn="bl" rotWithShape="0" blurRad="50800" dist="25400" dir="8100000">
+              <a:srgbClr val="000000">
+                <a:alpha val="10000"/>
+              </a:srgbClr>
+            </a:outerShdw>
+          </a:effectLst>
+        </p:spPr>
+      </p:sp>
+      <p:sp>
+        <p:nvSpPr>
+          <p:cNvPr id="7" name="Shape 5"/>
+          <p:cNvSpPr/>
+          <p:nvPr/>
+        </p:nvSpPr>
+        <p:spPr>
+          <a:xfrm>
+            <a:off x="4846320" y="1188720"/>
+            <a:ext cx="3840480" cy="54864"/>
+          </a:xfrm>
+          <a:prstGeom prst="rect">
+            <a:avLst/>
+          </a:prstGeom>
+          <a:solidFill>
+            <a:srgbClr val="2A9D8F"/>
+          </a:solidFill>
+          <a:ln/>
+        </p:spPr>
+      </p:sp>
+      <p:sp>
+        <p:nvSpPr>
+          <p:cNvPr id="8" name="Text 6"/>
+          <p:cNvSpPr/>
+          <p:nvPr/>
+        </p:nvSpPr>
+        <p:spPr>
+          <a:xfrm>
+            <a:off x="5120640" y="1371600"/>
+            <a:ext cx="3291840" cy="3108960"/>
+          </a:xfrm>
+          <a:prstGeom prst="rect">
+            <a:avLst/>
+          </a:prstGeom>
+          <a:noFill/>
+          <a:ln/>
+        </p:spPr>
+        <p:txBody>
+          <a:bodyPr wrap="square" rtlCol="0" anchor="t"/>
+          <a:lstStyle/>
+          <a:p>
+            <a:pPr indent="0" marL="0">
+              <a:spcAft>
+                <a:spcPts val="400"/>
+              </a:spcAft>
+              <a:buNone/>
+            </a:pPr>
+            <a:r>
+              <a:rPr lang="en-US" sz="1600" b="1" dirty="0">
+                <a:solidFill>
+                  <a:srgbClr val="1B2A4A"/>
+                </a:solidFill>
+                <a:latin typeface="Calibri" pitchFamily="34" charset="0"/>
+                <a:ea typeface="Calibri" pitchFamily="34" charset="-122"/>
+                <a:cs typeface="Calibri" pitchFamily="34" charset="-120"/>
+              </a:rPr>
+              <a:t>AS — Addition &amp; Subtraction</a:t>
+            </a:r>
+            <a:endParaRPr lang="en-US" sz="1600" dirty="0"/>
+          </a:p>
+          <a:p>
+            <a:pPr indent="0" marL="0">
+              <a:spcAft>
+                <a:spcPts val="400"/>
+              </a:spcAft>
+              <a:buNone/>
+            </a:pPr>
+            <a:endParaRPr lang="en-US" sz="1600" dirty="0"/>
+          </a:p>
+          <a:p>
+            <a:pPr indent="0" marL="0">
+              <a:spcAft>
+                <a:spcPts val="400"/>
+              </a:spcAft>
+              <a:buNone/>
+            </a:pPr>
+            <a:r>
+              <a:rPr lang="en-US" sz="1300" dirty="0">
+                <a:solidFill>
+                  <a:srgbClr val="3D3A36"/>
+                </a:solidFill>
+                <a:latin typeface="Calibri" pitchFamily="34" charset="0"/>
+                <a:ea typeface="Calibri" pitchFamily="34" charset="-122"/>
+                <a:cs typeface="Calibri" pitchFamily="34" charset="-120"/>
+              </a:rPr>
+              <a:t>Lowest priority — done last</a:t>
+            </a:r>
+            <a:endParaRPr lang="en-US" sz="1600" dirty="0"/>
+          </a:p>
+          <a:p>
+            <a:pPr indent="0" marL="0">
+              <a:spcAft>
+                <a:spcPts val="400"/>
+              </a:spcAft>
+              <a:buNone/>
+            </a:pPr>
+            <a:r>
+              <a:rPr lang="en-US" sz="1300" dirty="0">
+                <a:solidFill>
+                  <a:srgbClr val="3D3A36"/>
+                </a:solidFill>
+                <a:latin typeface="Calibri" pitchFamily="34" charset="0"/>
+                <a:ea typeface="Calibri" pitchFamily="34" charset="-122"/>
+                <a:cs typeface="Calibri" pitchFamily="34" charset="-120"/>
+              </a:rPr>
+              <a:t>Equal priority: work left to right</a:t>
+            </a:r>
+            <a:endParaRPr lang="en-US" sz="1600" dirty="0"/>
+          </a:p>
+          <a:p>
+            <a:pPr indent="0" marL="0">
+              <a:spcAft>
+                <a:spcPts val="400"/>
+              </a:spcAft>
+              <a:buNone/>
+            </a:pPr>
+            <a:r>
+              <a:rPr lang="en-US" sz="1300" dirty="0">
+                <a:solidFill>
+                  <a:srgbClr val="3D3A36"/>
+                </a:solidFill>
+                <a:latin typeface="Calibri" pitchFamily="34" charset="0"/>
+                <a:ea typeface="Calibri" pitchFamily="34" charset="-122"/>
+                <a:cs typeface="Calibri" pitchFamily="34" charset="-120"/>
+              </a:rPr>
+              <a:t>10 − 3 + 2 = 7 + 2 = 9 (not 10 − 5 = 5)</a:t>
+            </a:r>
+            <a:endParaRPr lang="en-US" sz="1600" dirty="0"/>
+          </a:p>
+          <a:p>
+            <a:pPr indent="0" marL="0">
+              <a:spcAft>
+                <a:spcPts val="400"/>
+              </a:spcAft>
+              <a:buNone/>
+            </a:pPr>
+            <a:r>
+              <a:rPr lang="en-US" sz="1300" dirty="0">
+                <a:solidFill>
+                  <a:srgbClr val="3D3A36"/>
+                </a:solidFill>
+                <a:latin typeface="Calibri" pitchFamily="34" charset="0"/>
+                <a:ea typeface="Calibri" pitchFamily="34" charset="-122"/>
+                <a:cs typeface="Calibri" pitchFamily="34" charset="-120"/>
+              </a:rPr>
+              <a:t>Remember: BIDMAS is the ORDER you follow</a:t>
+            </a:r>
+            <a:endParaRPr lang="en-US" sz="1600" dirty="0"/>
+          </a:p>
+          <a:p>
+            <a:pPr indent="0" marL="0">
+              <a:spcAft>
+                <a:spcPts val="400"/>
+              </a:spcAft>
+              <a:buNone/>
+            </a:pPr>
+            <a:r>
+              <a:rPr lang="en-US" sz="1300" dirty="0">
+                <a:solidFill>
+                  <a:srgbClr val="3D3A36"/>
+                </a:solidFill>
+                <a:latin typeface="Calibri" pitchFamily="34" charset="0"/>
+                <a:ea typeface="Calibri" pitchFamily="34" charset="-122"/>
+                <a:cs typeface="Calibri" pitchFamily="34" charset="-120"/>
+              </a:rPr>
+              <a:t>Use brackets to override the default order</a:t>
+            </a:r>
+            <a:endParaRPr lang="en-US" sz="1600" dirty="0"/>
+          </a:p>
+        </p:txBody>
+      </p:sp>
+    </p:spTree>
+  </p:cSld>
+  <p:clrMapOvr>
+    <a:masterClrMapping/>
+  </p:clrMapOvr>
+</p:sld>
+</file>
+
+<file path=ppt/slides/slide5.xml><?xml version="1.0" encoding="utf-8"?>
+<p:sld xmlns:a="http://schemas.openxmlformats.org/drawingml/2006/main" xmlns:r="http://schemas.openxmlformats.org/officeDocument/2006/relationships" xmlns:p="http://schemas.openxmlformats.org/presentationml/2006/main">
+  <p:cSld name="Slide 5">
     <p:bg>
       <p:bgPr>
         <a:solidFill>
@@ -1870,13 +2635,13 @@
         <p:spPr>
           <a:xfrm>
             <a:off x="0" y="0"/>
-            <a:ext cx="9144000" cy="54864"/>
-          </a:xfrm>
-          <a:prstGeom prst="rect">
-            <a:avLst/>
-          </a:prstGeom>
-          <a:solidFill>
-            <a:srgbClr val="2A9D8F"/>
+            <a:ext cx="109728" cy="5143500"/>
+          </a:xfrm>
+          <a:prstGeom prst="rect">
+            <a:avLst/>
+          </a:prstGeom>
+          <a:solidFill>
+            <a:srgbClr val="E9C46A"/>
           </a:solidFill>
           <a:ln/>
         </p:spPr>
@@ -1889,8 +2654,8 @@
         </p:nvSpPr>
         <p:spPr>
           <a:xfrm>
-            <a:off x="548640" y="457200"/>
-            <a:ext cx="8046720" cy="640080"/>
+            <a:off x="731520" y="457200"/>
+            <a:ext cx="7772400" cy="731520"/>
           </a:xfrm>
           <a:prstGeom prst="rect">
             <a:avLst/>
@@ -1906,7 +2671,7 @@
               <a:buNone/>
             </a:pPr>
             <a:r>
-              <a:rPr lang="en-US" sz="2800" b="1" dirty="0">
+              <a:rPr lang="en-US" sz="3200" b="1" dirty="0">
                 <a:solidFill>
                   <a:srgbClr val="FFFFFF"/>
                 </a:solidFill>
@@ -1916,7 +2681,7 @@
               </a:rPr>
               <a:t>Key Takeaways</a:t>
             </a:r>
-            <a:endParaRPr lang="en-US" sz="2800" dirty="0"/>
+            <a:endParaRPr lang="en-US" sz="3200" dirty="0"/>
           </a:p>
         </p:txBody>
       </p:sp>
@@ -1928,8 +2693,8 @@
         </p:nvSpPr>
         <p:spPr>
           <a:xfrm>
-            <a:off x="731520" y="1371600"/>
-            <a:ext cx="7680960" cy="3200400"/>
+            <a:off x="731520" y="1463040"/>
+            <a:ext cx="7772400" cy="3200400"/>
           </a:xfrm>
           <a:prstGeom prst="rect">
             <a:avLst/>
@@ -1949,7 +2714,7 @@
               <a:buChar char="•"/>
             </a:pPr>
             <a:r>
-              <a:rPr lang="en-US" sz="1600" dirty="0">
+              <a:rPr lang="en-US" sz="1500" dirty="0">
                 <a:solidFill>
                   <a:srgbClr val="CADCFC"/>
                 </a:solidFill>
@@ -1959,7 +2724,7 @@
               </a:rPr>
               <a:t>BIDMAS: Brackets, Indices, Division, Multiplication, Addition, Subtraction</a:t>
             </a:r>
-            <a:endParaRPr lang="en-US" sz="1600" dirty="0"/>
+            <a:endParaRPr lang="en-US" sz="1500" dirty="0"/>
           </a:p>
           <a:p>
             <a:pPr marL="342900" indent="-342900">
@@ -1970,7 +2735,7 @@
               <a:buChar char="•"/>
             </a:pPr>
             <a:r>
-              <a:rPr lang="en-US" sz="1600" dirty="0">
+              <a:rPr lang="en-US" sz="1500" dirty="0">
                 <a:solidFill>
                   <a:srgbClr val="CADCFC"/>
                 </a:solidFill>
@@ -1978,9 +2743,9 @@
                 <a:ea typeface="Calibri" pitchFamily="34" charset="-122"/>
                 <a:cs typeface="Calibri" pitchFamily="34" charset="-120"/>
               </a:rPr>
-              <a:t>Multiplication and division are done LEFT to RIGHT (same priority)</a:t>
-            </a:r>
-            <a:endParaRPr lang="en-US" sz="1600" dirty="0"/>
+              <a:t>Brackets first, then indices, then × ÷ (left to right), then + − (left to right)</a:t>
+            </a:r>
+            <a:endParaRPr lang="en-US" sz="1500" dirty="0"/>
           </a:p>
           <a:p>
             <a:pPr marL="342900" indent="-342900">
@@ -1991,7 +2756,7 @@
               <a:buChar char="•"/>
             </a:pPr>
             <a:r>
-              <a:rPr lang="en-US" sz="1600" dirty="0">
+              <a:rPr lang="en-US" sz="1500" dirty="0">
                 <a:solidFill>
                   <a:srgbClr val="CADCFC"/>
                 </a:solidFill>
@@ -1999,9 +2764,9 @@
                 <a:ea typeface="Calibri" pitchFamily="34" charset="-122"/>
                 <a:cs typeface="Calibri" pitchFamily="34" charset="-120"/>
               </a:rPr>
-              <a:t>Addition and subtraction are done LEFT to RIGHT (same priority)</a:t>
-            </a:r>
-            <a:endParaRPr lang="en-US" sz="1600" dirty="0"/>
+              <a:t>Multiplication and division have EQUAL priority (left to right)</a:t>
+            </a:r>
+            <a:endParaRPr lang="en-US" sz="1500" dirty="0"/>
           </a:p>
           <a:p>
             <a:pPr marL="342900" indent="-342900">
@@ -2012,7 +2777,7 @@
               <a:buChar char="•"/>
             </a:pPr>
             <a:r>
-              <a:rPr lang="en-US" sz="1600" dirty="0">
+              <a:rPr lang="en-US" sz="1500" dirty="0">
                 <a:solidFill>
                   <a:srgbClr val="CADCFC"/>
                 </a:solidFill>
@@ -2020,9 +2785,30 @@
                 <a:ea typeface="Calibri" pitchFamily="34" charset="-122"/>
                 <a:cs typeface="Calibri" pitchFamily="34" charset="-120"/>
               </a:rPr>
-              <a:t>Brackets always come first — they override everything</a:t>
-            </a:r>
-            <a:endParaRPr lang="en-US" sz="1600" dirty="0"/>
+              <a:t>Addition and subtraction have EQUAL priority (left to right)</a:t>
+            </a:r>
+            <a:endParaRPr lang="en-US" sz="1500" dirty="0"/>
+          </a:p>
+          <a:p>
+            <a:pPr marL="342900" indent="-342900">
+              <a:spcAft>
+                <a:spcPts val="1000"/>
+              </a:spcAft>
+              <a:buSzPct val="100000"/>
+              <a:buChar char="•"/>
+            </a:pPr>
+            <a:r>
+              <a:rPr lang="en-US" sz="1500" dirty="0">
+                <a:solidFill>
+                  <a:srgbClr val="CADCFC"/>
+                </a:solidFill>
+                <a:latin typeface="Calibri" pitchFamily="34" charset="0"/>
+                <a:ea typeface="Calibri" pitchFamily="34" charset="-122"/>
+                <a:cs typeface="Calibri" pitchFamily="34" charset="-120"/>
+              </a:rPr>
+              <a:t>Use brackets when you want to change the order</a:t>
+            </a:r>
+            <a:endParaRPr lang="en-US" sz="1500" dirty="0"/>
           </a:p>
         </p:txBody>
       </p:sp>
@@ -2034,8 +2820,8 @@
         </p:nvSpPr>
         <p:spPr>
           <a:xfrm>
-            <a:off x="548640" y="4572000"/>
-            <a:ext cx="3657600" cy="274320"/>
+            <a:off x="731520" y="4572000"/>
+            <a:ext cx="7772400" cy="365760"/>
           </a:xfrm>
           <a:prstGeom prst="rect">
             <a:avLst/>
@@ -2051,14 +2837,17 @@
               <a:buNone/>
             </a:pPr>
             <a:r>
-              <a:rPr lang="en-US" sz="1000" dirty="0">
-                <a:solidFill>
-                  <a:srgbClr val="6B6660"/>
-                </a:solidFill>
+              <a:rPr lang="en-US" sz="1100" dirty="0">
+                <a:solidFill>
+                  <a:srgbClr val="E9C46A"/>
+                </a:solidFill>
+                <a:latin typeface="Calibri" pitchFamily="34" charset="0"/>
+                <a:ea typeface="Calibri" pitchFamily="34" charset="-122"/>
+                <a:cs typeface="Calibri" pitchFamily="34" charset="-120"/>
               </a:rPr>
               <a:t>mrzocchi.com</a:t>
             </a:r>
-            <a:endParaRPr lang="en-US" sz="1000" dirty="0"/>
+            <a:endParaRPr lang="en-US" sz="1100" dirty="0"/>
           </a:p>
         </p:txBody>
       </p:sp>

--- a/static/ppts/G6_Math_T1_Order_Operations.pptx
+++ b/static/ppts/G6_Math_T1_Order_Operations.pptx
@@ -10,9 +10,11 @@
     <p:sldId id="258" r:id="rId4"/>
     <p:sldId id="259" r:id="rId5"/>
     <p:sldId id="260" r:id="rId6"/>
+    <p:sldId id="261" r:id="rId7"/>
+    <p:sldId id="262" r:id="rId8"/>
   </p:sldIdLst>
   <p:notesMasterIdLst>
-    <p:notesMasterId r:id="rId7"/>
+    <p:notesMasterId r:id="rId9"/>
   </p:notesMasterIdLst>
   <p:sldSz cx="9144000" cy="5143500"/>
   <p:notesSz cx="5143500" cy="9144000"/>
@@ -900,6 +902,182 @@
 </p:notes>
 </file>
 
+<file path=ppt/notesSlides/notesSlide6.xml><?xml version="1.0" encoding="utf-8"?>
+<p:notes xmlns:a="http://schemas.openxmlformats.org/drawingml/2006/main" xmlns:r="http://schemas.openxmlformats.org/officeDocument/2006/relationships" xmlns:p="http://schemas.openxmlformats.org/presentationml/2006/main">
+  <p:cSld>
+    <p:spTree>
+      <p:nvGrpSpPr>
+        <p:cNvPr id="1" name=""/>
+        <p:cNvGrpSpPr/>
+        <p:nvPr/>
+      </p:nvGrpSpPr>
+      <p:grpSpPr>
+        <a:xfrm>
+          <a:off x="0" y="0"/>
+          <a:ext cx="0" cy="0"/>
+          <a:chOff x="0" y="0"/>
+          <a:chExt cx="0" cy="0"/>
+        </a:xfrm>
+      </p:grpSpPr>
+      <p:sp>
+        <p:nvSpPr>
+          <p:cNvPr id="2" name="Slide Image Placeholder 1"/>
+          <p:cNvSpPr>
+            <a:spLocks noGrp="1" noRot="1" noChangeAspect="1"/>
+          </p:cNvSpPr>
+          <p:nvPr>
+            <p:ph type="sldImg"/>
+          </p:nvPr>
+        </p:nvSpPr>
+        <p:spPr/>
+      </p:sp>
+      <p:sp>
+        <p:nvSpPr>
+          <p:cNvPr id="3" name="Notes Placeholder 2"/>
+          <p:cNvSpPr>
+            <a:spLocks noGrp="1"/>
+          </p:cNvSpPr>
+          <p:nvPr>
+            <p:ph type="body" idx="1"/>
+          </p:nvPr>
+        </p:nvSpPr>
+        <p:spPr/>
+        <p:txBody>
+          <a:bodyPr/>
+          <a:lstStyle/>
+          <a:p>
+            <a:r>
+              <a:rPr lang="en-US" dirty="0"/>
+              <a:t/>
+            </a:r>
+            <a:endParaRPr lang="en-US" dirty="0"/>
+          </a:p>
+        </p:txBody>
+      </p:sp>
+      <p:sp>
+        <p:nvSpPr>
+          <p:cNvPr id="4" name="Slide Number Placeholder 3"/>
+          <p:cNvSpPr>
+            <a:spLocks noGrp="1"/>
+          </p:cNvSpPr>
+          <p:nvPr>
+            <p:ph type="sldNum" sz="quarter" idx="10"/>
+          </p:nvPr>
+        </p:nvSpPr>
+        <p:spPr/>
+        <p:txBody>
+          <a:bodyPr/>
+          <a:lstStyle/>
+          <a:p>
+            <a:fld id="{F7021451-1387-4CA6-816F-3879F97B5CBC}" type="slidenum">
+              <a:rPr lang="en-US"/>
+              <a:t>6</a:t>
+            </a:fld>
+            <a:endParaRPr lang="en-US"/>
+          </a:p>
+        </p:txBody>
+      </p:sp>
+    </p:spTree>
+    <p:extLst>
+      <p:ext uri="{BB962C8B-B14F-4D97-AF65-F5344CB8AC3E}">
+        <p14:creationId xmlns:p14="http://schemas.microsoft.com/office/powerpoint/2010/main" val="1024086991"/>
+      </p:ext>
+    </p:extLst>
+  </p:cSld>
+  <p:clrMapOvr>
+    <a:masterClrMapping/>
+  </p:clrMapOvr>
+</p:notes>
+</file>
+
+<file path=ppt/notesSlides/notesSlide7.xml><?xml version="1.0" encoding="utf-8"?>
+<p:notes xmlns:a="http://schemas.openxmlformats.org/drawingml/2006/main" xmlns:r="http://schemas.openxmlformats.org/officeDocument/2006/relationships" xmlns:p="http://schemas.openxmlformats.org/presentationml/2006/main">
+  <p:cSld>
+    <p:spTree>
+      <p:nvGrpSpPr>
+        <p:cNvPr id="1" name=""/>
+        <p:cNvGrpSpPr/>
+        <p:nvPr/>
+      </p:nvGrpSpPr>
+      <p:grpSpPr>
+        <a:xfrm>
+          <a:off x="0" y="0"/>
+          <a:ext cx="0" cy="0"/>
+          <a:chOff x="0" y="0"/>
+          <a:chExt cx="0" cy="0"/>
+        </a:xfrm>
+      </p:grpSpPr>
+      <p:sp>
+        <p:nvSpPr>
+          <p:cNvPr id="2" name="Slide Image Placeholder 1"/>
+          <p:cNvSpPr>
+            <a:spLocks noGrp="1" noRot="1" noChangeAspect="1"/>
+          </p:cNvSpPr>
+          <p:nvPr>
+            <p:ph type="sldImg"/>
+          </p:nvPr>
+        </p:nvSpPr>
+        <p:spPr/>
+      </p:sp>
+      <p:sp>
+        <p:nvSpPr>
+          <p:cNvPr id="3" name="Notes Placeholder 2"/>
+          <p:cNvSpPr>
+            <a:spLocks noGrp="1"/>
+          </p:cNvSpPr>
+          <p:nvPr>
+            <p:ph type="body" idx="1"/>
+          </p:nvPr>
+        </p:nvSpPr>
+        <p:spPr/>
+        <p:txBody>
+          <a:bodyPr/>
+          <a:lstStyle/>
+          <a:p>
+            <a:r>
+              <a:rPr lang="en-US" dirty="0"/>
+              <a:t/>
+            </a:r>
+            <a:endParaRPr lang="en-US" dirty="0"/>
+          </a:p>
+        </p:txBody>
+      </p:sp>
+      <p:sp>
+        <p:nvSpPr>
+          <p:cNvPr id="4" name="Slide Number Placeholder 3"/>
+          <p:cNvSpPr>
+            <a:spLocks noGrp="1"/>
+          </p:cNvSpPr>
+          <p:nvPr>
+            <p:ph type="sldNum" sz="quarter" idx="10"/>
+          </p:nvPr>
+        </p:nvSpPr>
+        <p:spPr/>
+        <p:txBody>
+          <a:bodyPr/>
+          <a:lstStyle/>
+          <a:p>
+            <a:fld id="{F7021451-1387-4CA6-816F-3879F97B5CBC}" type="slidenum">
+              <a:rPr lang="en-US"/>
+              <a:t>7</a:t>
+            </a:fld>
+            <a:endParaRPr lang="en-US"/>
+          </a:p>
+        </p:txBody>
+      </p:sp>
+    </p:spTree>
+    <p:extLst>
+      <p:ext uri="{BB962C8B-B14F-4D97-AF65-F5344CB8AC3E}">
+        <p14:creationId xmlns:p14="http://schemas.microsoft.com/office/powerpoint/2010/main" val="1024086991"/>
+      </p:ext>
+    </p:extLst>
+  </p:cSld>
+  <p:clrMapOvr>
+    <a:masterClrMapping/>
+  </p:clrMapOvr>
+</p:notes>
+</file>
+
 <file path=ppt/slideLayouts/slideLayout1.xml><?xml version="1.0" encoding="utf-8"?>
 <p:sldLayout xmlns:a="http://schemas.openxmlformats.org/drawingml/2006/main" xmlns:r="http://schemas.openxmlformats.org/officeDocument/2006/relationships" xmlns:p="http://schemas.openxmlformats.org/presentationml/2006/main" preserve="1">
   <p:cSld name="DEFAULT">
@@ -1210,13 +1388,6 @@
 <file path=ppt/slides/slide1.xml><?xml version="1.0" encoding="utf-8"?>
 <p:sld xmlns:a="http://schemas.openxmlformats.org/drawingml/2006/main" xmlns:r="http://schemas.openxmlformats.org/officeDocument/2006/relationships" xmlns:p="http://schemas.openxmlformats.org/presentationml/2006/main">
   <p:cSld name="Slide 1">
-    <p:bg>
-      <p:bgPr>
-        <a:solidFill>
-          <a:srgbClr val="1B2A4A"/>
-        </a:solidFill>
-      </p:bgPr>
-    </p:bg>
     <p:spTree>
       <p:nvGrpSpPr>
         <p:cNvPr id="1" name=""/>
@@ -1240,7 +1411,27 @@
         <p:spPr>
           <a:xfrm>
             <a:off x="0" y="0"/>
-            <a:ext cx="109728" cy="5143500"/>
+            <a:ext cx="9144000" cy="5143500"/>
+          </a:xfrm>
+          <a:prstGeom prst="rect">
+            <a:avLst/>
+          </a:prstGeom>
+          <a:solidFill>
+            <a:srgbClr val="1B2A4A"/>
+          </a:solidFill>
+          <a:ln/>
+        </p:spPr>
+      </p:sp>
+      <p:sp>
+        <p:nvSpPr>
+          <p:cNvPr id="3" name="Shape 1"/>
+          <p:cNvSpPr/>
+          <p:nvPr/>
+        </p:nvSpPr>
+        <p:spPr>
+          <a:xfrm>
+            <a:off x="0" y="4777740"/>
+            <a:ext cx="9144000" cy="365760"/>
           </a:xfrm>
           <a:prstGeom prst="rect">
             <a:avLst/>
@@ -1253,14 +1444,36 @@
       </p:sp>
       <p:sp>
         <p:nvSpPr>
-          <p:cNvPr id="3" name="Text 1"/>
-          <p:cNvSpPr/>
-          <p:nvPr/>
-        </p:nvSpPr>
-        <p:spPr>
-          <a:xfrm>
-            <a:off x="731520" y="1097280"/>
-            <a:ext cx="7772400" cy="1371600"/>
+          <p:cNvPr id="4" name="Shape 2"/>
+          <p:cNvSpPr/>
+          <p:nvPr/>
+        </p:nvSpPr>
+        <p:spPr>
+          <a:xfrm>
+            <a:off x="6858000" y="-1371600"/>
+            <a:ext cx="4572000" cy="4572000"/>
+          </a:xfrm>
+          <a:prstGeom prst="ellipse">
+            <a:avLst/>
+          </a:prstGeom>
+          <a:solidFill>
+            <a:srgbClr val="2A9D8F">
+              <a:alpha val="12000"/>
+            </a:srgbClr>
+          </a:solidFill>
+          <a:ln/>
+        </p:spPr>
+      </p:sp>
+      <p:sp>
+        <p:nvSpPr>
+          <p:cNvPr id="5" name="Text 3"/>
+          <p:cNvSpPr/>
+          <p:nvPr/>
+        </p:nvSpPr>
+        <p:spPr>
+          <a:xfrm>
+            <a:off x="731520" y="914400"/>
+            <a:ext cx="7680960" cy="457200"/>
           </a:xfrm>
           <a:prstGeom prst="rect">
             <a:avLst/>
@@ -1276,7 +1489,46 @@
               <a:buNone/>
             </a:pPr>
             <a:r>
-              <a:rPr lang="en-US" sz="4000" b="1" dirty="0">
+              <a:rPr lang="en-US" sz="1300" b="1" spc="500" kern="0" dirty="0">
+                <a:solidFill>
+                  <a:srgbClr val="2A9D8F"/>
+                </a:solidFill>
+                <a:latin typeface="Calibri" pitchFamily="34" charset="0"/>
+                <a:ea typeface="Calibri" pitchFamily="34" charset="-122"/>
+                <a:cs typeface="Calibri" pitchFamily="34" charset="-120"/>
+              </a:rPr>
+              <a:t>GRADE 6 MATHEMATICS</a:t>
+            </a:r>
+            <a:endParaRPr lang="en-US" sz="1300" dirty="0"/>
+          </a:p>
+        </p:txBody>
+      </p:sp>
+      <p:sp>
+        <p:nvSpPr>
+          <p:cNvPr id="6" name="Text 4"/>
+          <p:cNvSpPr/>
+          <p:nvPr/>
+        </p:nvSpPr>
+        <p:spPr>
+          <a:xfrm>
+            <a:off x="731520" y="1463040"/>
+            <a:ext cx="6858000" cy="1645920"/>
+          </a:xfrm>
+          <a:prstGeom prst="rect">
+            <a:avLst/>
+          </a:prstGeom>
+          <a:noFill/>
+          <a:ln/>
+        </p:spPr>
+        <p:txBody>
+          <a:bodyPr wrap="square" rtlCol="0" anchor="t"/>
+          <a:lstStyle/>
+          <a:p>
+            <a:pPr indent="0" marL="0">
+              <a:buNone/>
+            </a:pPr>
+            <a:r>
+              <a:rPr lang="en-US" sz="3800" b="1" dirty="0">
                 <a:solidFill>
                   <a:srgbClr val="FFFFFF"/>
                 </a:solidFill>
@@ -1284,46 +1536,63 @@
                 <a:ea typeface="Georgia" pitchFamily="34" charset="-122"/>
                 <a:cs typeface="Georgia" pitchFamily="34" charset="-120"/>
               </a:rPr>
-              <a:t>Order of Operations (BIDMAS)</a:t>
-            </a:r>
-            <a:endParaRPr lang="en-US" sz="4000" dirty="0"/>
-          </a:p>
-        </p:txBody>
-      </p:sp>
-      <p:sp>
-        <p:nvSpPr>
-          <p:cNvPr id="4" name="Text 2"/>
-          <p:cNvSpPr/>
-          <p:nvPr/>
-        </p:nvSpPr>
-        <p:spPr>
-          <a:xfrm>
-            <a:off x="731520" y="2560320"/>
-            <a:ext cx="7772400" cy="548640"/>
-          </a:xfrm>
-          <a:prstGeom prst="rect">
-            <a:avLst/>
-          </a:prstGeom>
-          <a:noFill/>
-          <a:ln/>
-        </p:spPr>
-        <p:txBody>
-          <a:bodyPr wrap="square" rtlCol="0" anchor="ctr"/>
-          <a:lstStyle/>
+              <a:t>Order of Operations</a:t>
+            </a:r>
+            <a:endParaRPr lang="en-US" sz="3800" dirty="0"/>
+          </a:p>
           <a:p>
             <a:pPr indent="0" marL="0">
               <a:buNone/>
             </a:pPr>
             <a:r>
-              <a:rPr lang="en-US" sz="1600" dirty="0">
-                <a:solidFill>
-                  <a:srgbClr val="E9C46A"/>
+              <a:rPr lang="en-US" sz="3800" b="1" dirty="0">
+                <a:solidFill>
+                  <a:srgbClr val="FFFFFF"/>
+                </a:solidFill>
+                <a:latin typeface="Georgia" pitchFamily="34" charset="0"/>
+                <a:ea typeface="Georgia" pitchFamily="34" charset="-122"/>
+                <a:cs typeface="Georgia" pitchFamily="34" charset="-120"/>
+              </a:rPr>
+              <a:t>(BIDMAS)</a:t>
+            </a:r>
+            <a:endParaRPr lang="en-US" sz="3800" dirty="0"/>
+          </a:p>
+        </p:txBody>
+      </p:sp>
+      <p:sp>
+        <p:nvSpPr>
+          <p:cNvPr id="7" name="Text 5"/>
+          <p:cNvSpPr/>
+          <p:nvPr/>
+        </p:nvSpPr>
+        <p:spPr>
+          <a:xfrm>
+            <a:off x="731520" y="3200400"/>
+            <a:ext cx="6400800" cy="548640"/>
+          </a:xfrm>
+          <a:prstGeom prst="rect">
+            <a:avLst/>
+          </a:prstGeom>
+          <a:noFill/>
+          <a:ln/>
+        </p:spPr>
+        <p:txBody>
+          <a:bodyPr wrap="square" rtlCol="0" anchor="ctr"/>
+          <a:lstStyle/>
+          <a:p>
+            <a:pPr indent="0" marL="0">
+              <a:buNone/>
+            </a:pPr>
+            <a:r>
+              <a:rPr lang="en-US" sz="1600" i="1" dirty="0">
+                <a:solidFill>
+                  <a:srgbClr val="9B9690"/>
                 </a:solidFill>
                 <a:latin typeface="Calibri" pitchFamily="34" charset="0"/>
                 <a:ea typeface="Calibri" pitchFamily="34" charset="-122"/>
                 <a:cs typeface="Calibri" pitchFamily="34" charset="-120"/>
               </a:rPr>
-              <a:t>Grade 6 Mathematics · Mr Zocchi</a:t>
+              <a:t>The rules that tell us which operation to do first</a:t>
             </a:r>
             <a:endParaRPr lang="en-US" sz="1600" dirty="0"/>
           </a:p>
@@ -1331,36 +1600,14 @@
       </p:sp>
       <p:sp>
         <p:nvSpPr>
-          <p:cNvPr id="5" name="Shape 3"/>
-          <p:cNvSpPr/>
-          <p:nvPr/>
-        </p:nvSpPr>
-        <p:spPr>
-          <a:xfrm>
-            <a:off x="731520" y="3474720"/>
-            <a:ext cx="2011680" cy="411480"/>
-          </a:xfrm>
-          <a:prstGeom prst="roundRect">
-            <a:avLst>
-              <a:gd name="adj" fmla="val 17778"/>
-            </a:avLst>
-          </a:prstGeom>
-          <a:solidFill>
-            <a:srgbClr val="2A9D8F"/>
-          </a:solidFill>
-          <a:ln/>
-        </p:spPr>
-      </p:sp>
-      <p:sp>
-        <p:nvSpPr>
-          <p:cNvPr id="6" name="Text 4"/>
-          <p:cNvSpPr/>
-          <p:nvPr/>
-        </p:nvSpPr>
-        <p:spPr>
-          <a:xfrm>
-            <a:off x="731520" y="3474720"/>
-            <a:ext cx="2011680" cy="411480"/>
+          <p:cNvPr id="8" name="Text 6"/>
+          <p:cNvSpPr/>
+          <p:nvPr/>
+        </p:nvSpPr>
+        <p:spPr>
+          <a:xfrm>
+            <a:off x="731520" y="4297680"/>
+            <a:ext cx="2743200" cy="365760"/>
           </a:xfrm>
           <a:prstGeom prst="rect">
             <a:avLst/>
@@ -1372,21 +1619,21 @@
           <a:bodyPr wrap="square" rtlCol="0" anchor="ctr"/>
           <a:lstStyle/>
           <a:p>
-            <a:pPr algn="ctr" indent="0" marL="0">
+            <a:pPr indent="0" marL="0">
               <a:buNone/>
             </a:pPr>
             <a:r>
-              <a:rPr lang="en-US" sz="1200" b="1" dirty="0">
-                <a:solidFill>
-                  <a:srgbClr val="FFFFFF"/>
+              <a:rPr lang="en-US" sz="1100" dirty="0">
+                <a:solidFill>
+                  <a:srgbClr val="9B9690"/>
                 </a:solidFill>
                 <a:latin typeface="Calibri" pitchFamily="34" charset="0"/>
                 <a:ea typeface="Calibri" pitchFamily="34" charset="-122"/>
                 <a:cs typeface="Calibri" pitchFamily="34" charset="-120"/>
               </a:rPr>
-              <a:t>Term 1 · Number Sense</a:t>
-            </a:r>
-            <a:endParaRPr lang="en-US" sz="1200" dirty="0"/>
+              <a:t>mrzocchi.com</a:t>
+            </a:r>
+            <a:endParaRPr lang="en-US" sz="1100" dirty="0"/>
           </a:p>
         </p:txBody>
       </p:sp>
@@ -1431,7 +1678,47 @@
         <p:spPr>
           <a:xfrm>
             <a:off x="0" y="0"/>
-            <a:ext cx="9144000" cy="54864"/>
+            <a:ext cx="9144000" cy="822960"/>
+          </a:xfrm>
+          <a:prstGeom prst="rect">
+            <a:avLst/>
+          </a:prstGeom>
+          <a:solidFill>
+            <a:srgbClr val="FFFFFF"/>
+          </a:solidFill>
+          <a:ln/>
+        </p:spPr>
+      </p:sp>
+      <p:sp>
+        <p:nvSpPr>
+          <p:cNvPr id="3" name="Shape 1"/>
+          <p:cNvSpPr/>
+          <p:nvPr/>
+        </p:nvSpPr>
+        <p:spPr>
+          <a:xfrm>
+            <a:off x="0" y="804672"/>
+            <a:ext cx="9144000" cy="27432"/>
+          </a:xfrm>
+          <a:prstGeom prst="rect">
+            <a:avLst/>
+          </a:prstGeom>
+          <a:solidFill>
+            <a:srgbClr val="E5E2DC"/>
+          </a:solidFill>
+          <a:ln/>
+        </p:spPr>
+      </p:sp>
+      <p:sp>
+        <p:nvSpPr>
+          <p:cNvPr id="4" name="Shape 2"/>
+          <p:cNvSpPr/>
+          <p:nvPr/>
+        </p:nvSpPr>
+        <p:spPr>
+          <a:xfrm>
+            <a:off x="548640" y="201168"/>
+            <a:ext cx="54864" cy="420624"/>
           </a:xfrm>
           <a:prstGeom prst="rect">
             <a:avLst/>
@@ -1444,14 +1731,14 @@
       </p:sp>
       <p:sp>
         <p:nvSpPr>
-          <p:cNvPr id="3" name="Text 1"/>
-          <p:cNvSpPr/>
-          <p:nvPr/>
-        </p:nvSpPr>
-        <p:spPr>
-          <a:xfrm>
-            <a:off x="7772400" y="4709160"/>
-            <a:ext cx="1097280" cy="320040"/>
+          <p:cNvPr id="5" name="Text 3"/>
+          <p:cNvSpPr/>
+          <p:nvPr/>
+        </p:nvSpPr>
+        <p:spPr>
+          <a:xfrm>
+            <a:off x="777240" y="137160"/>
+            <a:ext cx="7772400" cy="548640"/>
           </a:xfrm>
           <a:prstGeom prst="rect">
             <a:avLst/>
@@ -1460,37 +1747,37 @@
           <a:ln/>
         </p:spPr>
         <p:txBody>
-          <a:bodyPr wrap="square" rtlCol="0" anchor="ctr"/>
-          <a:lstStyle/>
-          <a:p>
-            <a:pPr algn="r" indent="0" marL="0">
+          <a:bodyPr wrap="square" lIns="0" tIns="0" rIns="0" bIns="0" rtlCol="0" anchor="ctr"/>
+          <a:lstStyle/>
+          <a:p>
+            <a:pPr indent="0" marL="0">
               <a:buNone/>
             </a:pPr>
             <a:r>
-              <a:rPr lang="en-US" sz="900" dirty="0">
-                <a:solidFill>
-                  <a:srgbClr val="6B6660"/>
-                </a:solidFill>
-                <a:latin typeface="Calibri" pitchFamily="34" charset="0"/>
-                <a:ea typeface="Calibri" pitchFamily="34" charset="-122"/>
-                <a:cs typeface="Calibri" pitchFamily="34" charset="-120"/>
-              </a:rPr>
-              <a:t>2 / 5</a:t>
-            </a:r>
-            <a:endParaRPr lang="en-US" sz="900" dirty="0"/>
-          </a:p>
-        </p:txBody>
-      </p:sp>
-      <p:sp>
-        <p:nvSpPr>
-          <p:cNvPr id="4" name="Shape 2"/>
-          <p:cNvSpPr/>
-          <p:nvPr/>
-        </p:nvSpPr>
-        <p:spPr>
-          <a:xfrm>
-            <a:off x="1371600" y="914400"/>
-            <a:ext cx="6400800" cy="3200400"/>
+              <a:rPr lang="en-US" sz="2000" b="1" dirty="0">
+                <a:solidFill>
+                  <a:srgbClr val="1B2A4A"/>
+                </a:solidFill>
+                <a:latin typeface="Georgia" pitchFamily="34" charset="0"/>
+                <a:ea typeface="Georgia" pitchFamily="34" charset="-122"/>
+                <a:cs typeface="Georgia" pitchFamily="34" charset="-120"/>
+              </a:rPr>
+              <a:t>Key Vocabulary</a:t>
+            </a:r>
+            <a:endParaRPr lang="en-US" sz="2000" dirty="0"/>
+          </a:p>
+        </p:txBody>
+      </p:sp>
+      <p:sp>
+        <p:nvSpPr>
+          <p:cNvPr id="6" name="Shape 4"/>
+          <p:cNvSpPr/>
+          <p:nvPr/>
+        </p:nvSpPr>
+        <p:spPr>
+          <a:xfrm>
+            <a:off x="731520" y="1051560"/>
+            <a:ext cx="3657600" cy="658368"/>
           </a:xfrm>
           <a:prstGeom prst="rect">
             <a:avLst/>
@@ -1498,12 +1785,7 @@
           <a:solidFill>
             <a:srgbClr val="FFFFFF"/>
           </a:solidFill>
-          <a:ln w="12700">
-            <a:solidFill>
-              <a:srgbClr val="E5E2DC"/>
-            </a:solidFill>
-            <a:prstDash val="solid"/>
-          </a:ln>
+          <a:ln/>
           <a:effectLst>
             <a:outerShdw sx="100000" sy="100000" kx="0" ky="0" algn="bl" rotWithShape="0" blurRad="50800" dist="25400" dir="8100000">
               <a:srgbClr val="000000">
@@ -1515,14 +1797,14 @@
       </p:sp>
       <p:sp>
         <p:nvSpPr>
-          <p:cNvPr id="5" name="Shape 3"/>
-          <p:cNvSpPr/>
-          <p:nvPr/>
-        </p:nvSpPr>
-        <p:spPr>
-          <a:xfrm>
-            <a:off x="1371600" y="914400"/>
-            <a:ext cx="91440" cy="3200400"/>
+          <p:cNvPr id="7" name="Shape 5"/>
+          <p:cNvSpPr/>
+          <p:nvPr/>
+        </p:nvSpPr>
+        <p:spPr>
+          <a:xfrm>
+            <a:off x="731520" y="1051560"/>
+            <a:ext cx="54864" cy="658368"/>
           </a:xfrm>
           <a:prstGeom prst="rect">
             <a:avLst/>
@@ -1535,14 +1817,14 @@
       </p:sp>
       <p:sp>
         <p:nvSpPr>
-          <p:cNvPr id="6" name="Text 4"/>
-          <p:cNvSpPr/>
-          <p:nvPr/>
-        </p:nvSpPr>
-        <p:spPr>
-          <a:xfrm>
-            <a:off x="1828800" y="1097280"/>
-            <a:ext cx="5669280" cy="640080"/>
+          <p:cNvPr id="8" name="Text 6"/>
+          <p:cNvSpPr/>
+          <p:nvPr/>
+        </p:nvSpPr>
+        <p:spPr>
+          <a:xfrm>
+            <a:off x="914400" y="1051560"/>
+            <a:ext cx="1463040" cy="658368"/>
           </a:xfrm>
           <a:prstGeom prst="rect">
             <a:avLst/>
@@ -1551,14 +1833,14 @@
           <a:ln/>
         </p:spPr>
         <p:txBody>
-          <a:bodyPr wrap="square" rtlCol="0" anchor="ctr"/>
+          <a:bodyPr wrap="square" lIns="0" tIns="0" rIns="0" bIns="0" rtlCol="0" anchor="ctr"/>
           <a:lstStyle/>
           <a:p>
             <a:pPr indent="0" marL="0">
               <a:buNone/>
             </a:pPr>
             <a:r>
-              <a:rPr lang="en-US" sz="2400" b="1" dirty="0">
+              <a:rPr lang="en-US" sz="1300" b="1" dirty="0">
                 <a:solidFill>
                   <a:srgbClr val="1B2A4A"/>
                 </a:solidFill>
@@ -1566,22 +1848,22 @@
                 <a:ea typeface="Georgia" pitchFamily="34" charset="-122"/>
                 <a:cs typeface="Georgia" pitchFamily="34" charset="-120"/>
               </a:rPr>
-              <a:t>Why Order Matters</a:t>
-            </a:r>
-            <a:endParaRPr lang="en-US" sz="2400" dirty="0"/>
-          </a:p>
-        </p:txBody>
-      </p:sp>
-      <p:sp>
-        <p:nvSpPr>
-          <p:cNvPr id="7" name="Text 5"/>
-          <p:cNvSpPr/>
-          <p:nvPr/>
-        </p:nvSpPr>
-        <p:spPr>
-          <a:xfrm>
-            <a:off x="1828800" y="1828800"/>
-            <a:ext cx="5669280" cy="2011680"/>
+              <a:t>BIDMAS</a:t>
+            </a:r>
+            <a:endParaRPr lang="en-US" sz="1300" dirty="0"/>
+          </a:p>
+        </p:txBody>
+      </p:sp>
+      <p:sp>
+        <p:nvSpPr>
+          <p:cNvPr id="9" name="Text 7"/>
+          <p:cNvSpPr/>
+          <p:nvPr/>
+        </p:nvSpPr>
+        <p:spPr>
+          <a:xfrm>
+            <a:off x="2377440" y="1051560"/>
+            <a:ext cx="1920240" cy="658368"/>
           </a:xfrm>
           <a:prstGeom prst="rect">
             <a:avLst/>
@@ -1590,27 +1872,524 @@
           <a:ln/>
         </p:spPr>
         <p:txBody>
-          <a:bodyPr wrap="square" rtlCol="0" anchor="t"/>
+          <a:bodyPr wrap="square" lIns="0" tIns="0" rIns="0" bIns="0" rtlCol="0" anchor="ctr"/>
           <a:lstStyle/>
           <a:p>
             <a:pPr indent="0" marL="0">
-              <a:lnSpc>
-                <a:spcPct val="130000"/>
-              </a:lnSpc>
               <a:buNone/>
             </a:pPr>
             <a:r>
-              <a:rPr lang="en-US" sz="1500" dirty="0">
-                <a:solidFill>
-                  <a:srgbClr val="3D3A36"/>
+              <a:rPr lang="en-US" sz="1100" dirty="0">
+                <a:solidFill>
+                  <a:srgbClr val="6B6660"/>
                 </a:solidFill>
                 <a:latin typeface="Calibri" pitchFamily="34" charset="0"/>
                 <a:ea typeface="Calibri" pitchFamily="34" charset="-122"/>
                 <a:cs typeface="Calibri" pitchFamily="34" charset="-120"/>
               </a:rPr>
-              <a:t>Without a standard order, 3 + 4 × 2 could equal 14 or 11. Mathematicians agreed on BIDMAS (also called BODMAS or PEMDAS) to ensure everyone gets the same answer. The correct answer is 11 because multiplication comes before addition.</a:t>
-            </a:r>
-            <a:endParaRPr lang="en-US" sz="1500" dirty="0"/>
+              <a:t>Brackets, Indices, Division, Multiplication, Addition, Subtraction</a:t>
+            </a:r>
+            <a:endParaRPr lang="en-US" sz="1100" dirty="0"/>
+          </a:p>
+        </p:txBody>
+      </p:sp>
+      <p:sp>
+        <p:nvSpPr>
+          <p:cNvPr id="10" name="Shape 8"/>
+          <p:cNvSpPr/>
+          <p:nvPr/>
+        </p:nvSpPr>
+        <p:spPr>
+          <a:xfrm>
+            <a:off x="4754880" y="1051560"/>
+            <a:ext cx="3657600" cy="658368"/>
+          </a:xfrm>
+          <a:prstGeom prst="rect">
+            <a:avLst/>
+          </a:prstGeom>
+          <a:solidFill>
+            <a:srgbClr val="FFFFFF"/>
+          </a:solidFill>
+          <a:ln/>
+          <a:effectLst>
+            <a:outerShdw sx="100000" sy="100000" kx="0" ky="0" algn="bl" rotWithShape="0" blurRad="50800" dist="25400" dir="8100000">
+              <a:srgbClr val="000000">
+                <a:alpha val="10000"/>
+              </a:srgbClr>
+            </a:outerShdw>
+          </a:effectLst>
+        </p:spPr>
+      </p:sp>
+      <p:sp>
+        <p:nvSpPr>
+          <p:cNvPr id="11" name="Shape 9"/>
+          <p:cNvSpPr/>
+          <p:nvPr/>
+        </p:nvSpPr>
+        <p:spPr>
+          <a:xfrm>
+            <a:off x="4754880" y="1051560"/>
+            <a:ext cx="54864" cy="658368"/>
+          </a:xfrm>
+          <a:prstGeom prst="rect">
+            <a:avLst/>
+          </a:prstGeom>
+          <a:solidFill>
+            <a:srgbClr val="2A9D8F"/>
+          </a:solidFill>
+          <a:ln/>
+        </p:spPr>
+      </p:sp>
+      <p:sp>
+        <p:nvSpPr>
+          <p:cNvPr id="12" name="Text 10"/>
+          <p:cNvSpPr/>
+          <p:nvPr/>
+        </p:nvSpPr>
+        <p:spPr>
+          <a:xfrm>
+            <a:off x="4937760" y="1051560"/>
+            <a:ext cx="1463040" cy="658368"/>
+          </a:xfrm>
+          <a:prstGeom prst="rect">
+            <a:avLst/>
+          </a:prstGeom>
+          <a:noFill/>
+          <a:ln/>
+        </p:spPr>
+        <p:txBody>
+          <a:bodyPr wrap="square" lIns="0" tIns="0" rIns="0" bIns="0" rtlCol="0" anchor="ctr"/>
+          <a:lstStyle/>
+          <a:p>
+            <a:pPr indent="0" marL="0">
+              <a:buNone/>
+            </a:pPr>
+            <a:r>
+              <a:rPr lang="en-US" sz="1300" b="1" dirty="0">
+                <a:solidFill>
+                  <a:srgbClr val="1B2A4A"/>
+                </a:solidFill>
+                <a:latin typeface="Georgia" pitchFamily="34" charset="0"/>
+                <a:ea typeface="Georgia" pitchFamily="34" charset="-122"/>
+                <a:cs typeface="Georgia" pitchFamily="34" charset="-120"/>
+              </a:rPr>
+              <a:t>Brackets</a:t>
+            </a:r>
+            <a:endParaRPr lang="en-US" sz="1300" dirty="0"/>
+          </a:p>
+        </p:txBody>
+      </p:sp>
+      <p:sp>
+        <p:nvSpPr>
+          <p:cNvPr id="13" name="Text 11"/>
+          <p:cNvSpPr/>
+          <p:nvPr/>
+        </p:nvSpPr>
+        <p:spPr>
+          <a:xfrm>
+            <a:off x="6400800" y="1051560"/>
+            <a:ext cx="1920240" cy="658368"/>
+          </a:xfrm>
+          <a:prstGeom prst="rect">
+            <a:avLst/>
+          </a:prstGeom>
+          <a:noFill/>
+          <a:ln/>
+        </p:spPr>
+        <p:txBody>
+          <a:bodyPr wrap="square" lIns="0" tIns="0" rIns="0" bIns="0" rtlCol="0" anchor="ctr"/>
+          <a:lstStyle/>
+          <a:p>
+            <a:pPr indent="0" marL="0">
+              <a:buNone/>
+            </a:pPr>
+            <a:r>
+              <a:rPr lang="en-US" sz="1100" dirty="0">
+                <a:solidFill>
+                  <a:srgbClr val="6B6660"/>
+                </a:solidFill>
+                <a:latin typeface="Calibri" pitchFamily="34" charset="0"/>
+                <a:ea typeface="Calibri" pitchFamily="34" charset="-122"/>
+                <a:cs typeface="Calibri" pitchFamily="34" charset="-120"/>
+              </a:rPr>
+              <a:t>Do these FIRST: (3 + 2)</a:t>
+            </a:r>
+            <a:endParaRPr lang="en-US" sz="1100" dirty="0"/>
+          </a:p>
+        </p:txBody>
+      </p:sp>
+      <p:sp>
+        <p:nvSpPr>
+          <p:cNvPr id="14" name="Shape 12"/>
+          <p:cNvSpPr/>
+          <p:nvPr/>
+        </p:nvSpPr>
+        <p:spPr>
+          <a:xfrm>
+            <a:off x="731520" y="1819656"/>
+            <a:ext cx="3657600" cy="658368"/>
+          </a:xfrm>
+          <a:prstGeom prst="rect">
+            <a:avLst/>
+          </a:prstGeom>
+          <a:solidFill>
+            <a:srgbClr val="FFFFFF"/>
+          </a:solidFill>
+          <a:ln/>
+          <a:effectLst>
+            <a:outerShdw sx="100000" sy="100000" kx="0" ky="0" algn="bl" rotWithShape="0" blurRad="50800" dist="25400" dir="8100000">
+              <a:srgbClr val="000000">
+                <a:alpha val="10000"/>
+              </a:srgbClr>
+            </a:outerShdw>
+          </a:effectLst>
+        </p:spPr>
+      </p:sp>
+      <p:sp>
+        <p:nvSpPr>
+          <p:cNvPr id="15" name="Shape 13"/>
+          <p:cNvSpPr/>
+          <p:nvPr/>
+        </p:nvSpPr>
+        <p:spPr>
+          <a:xfrm>
+            <a:off x="731520" y="1819656"/>
+            <a:ext cx="54864" cy="658368"/>
+          </a:xfrm>
+          <a:prstGeom prst="rect">
+            <a:avLst/>
+          </a:prstGeom>
+          <a:solidFill>
+            <a:srgbClr val="2A9D8F"/>
+          </a:solidFill>
+          <a:ln/>
+        </p:spPr>
+      </p:sp>
+      <p:sp>
+        <p:nvSpPr>
+          <p:cNvPr id="16" name="Text 14"/>
+          <p:cNvSpPr/>
+          <p:nvPr/>
+        </p:nvSpPr>
+        <p:spPr>
+          <a:xfrm>
+            <a:off x="914400" y="1819656"/>
+            <a:ext cx="1463040" cy="658368"/>
+          </a:xfrm>
+          <a:prstGeom prst="rect">
+            <a:avLst/>
+          </a:prstGeom>
+          <a:noFill/>
+          <a:ln/>
+        </p:spPr>
+        <p:txBody>
+          <a:bodyPr wrap="square" lIns="0" tIns="0" rIns="0" bIns="0" rtlCol="0" anchor="ctr"/>
+          <a:lstStyle/>
+          <a:p>
+            <a:pPr indent="0" marL="0">
+              <a:buNone/>
+            </a:pPr>
+            <a:r>
+              <a:rPr lang="en-US" sz="1300" b="1" dirty="0">
+                <a:solidFill>
+                  <a:srgbClr val="1B2A4A"/>
+                </a:solidFill>
+                <a:latin typeface="Georgia" pitchFamily="34" charset="0"/>
+                <a:ea typeface="Georgia" pitchFamily="34" charset="-122"/>
+                <a:cs typeface="Georgia" pitchFamily="34" charset="-120"/>
+              </a:rPr>
+              <a:t>Indices</a:t>
+            </a:r>
+            <a:endParaRPr lang="en-US" sz="1300" dirty="0"/>
+          </a:p>
+        </p:txBody>
+      </p:sp>
+      <p:sp>
+        <p:nvSpPr>
+          <p:cNvPr id="17" name="Text 15"/>
+          <p:cNvSpPr/>
+          <p:nvPr/>
+        </p:nvSpPr>
+        <p:spPr>
+          <a:xfrm>
+            <a:off x="2377440" y="1819656"/>
+            <a:ext cx="1920240" cy="658368"/>
+          </a:xfrm>
+          <a:prstGeom prst="rect">
+            <a:avLst/>
+          </a:prstGeom>
+          <a:noFill/>
+          <a:ln/>
+        </p:spPr>
+        <p:txBody>
+          <a:bodyPr wrap="square" lIns="0" tIns="0" rIns="0" bIns="0" rtlCol="0" anchor="ctr"/>
+          <a:lstStyle/>
+          <a:p>
+            <a:pPr indent="0" marL="0">
+              <a:buNone/>
+            </a:pPr>
+            <a:r>
+              <a:rPr lang="en-US" sz="1100" dirty="0">
+                <a:solidFill>
+                  <a:srgbClr val="6B6660"/>
+                </a:solidFill>
+                <a:latin typeface="Calibri" pitchFamily="34" charset="0"/>
+                <a:ea typeface="Calibri" pitchFamily="34" charset="-122"/>
+                <a:cs typeface="Calibri" pitchFamily="34" charset="-120"/>
+              </a:rPr>
+              <a:t>Powers: 2³ = 8</a:t>
+            </a:r>
+            <a:endParaRPr lang="en-US" sz="1100" dirty="0"/>
+          </a:p>
+        </p:txBody>
+      </p:sp>
+      <p:sp>
+        <p:nvSpPr>
+          <p:cNvPr id="18" name="Shape 16"/>
+          <p:cNvSpPr/>
+          <p:nvPr/>
+        </p:nvSpPr>
+        <p:spPr>
+          <a:xfrm>
+            <a:off x="4754880" y="1819656"/>
+            <a:ext cx="3657600" cy="658368"/>
+          </a:xfrm>
+          <a:prstGeom prst="rect">
+            <a:avLst/>
+          </a:prstGeom>
+          <a:solidFill>
+            <a:srgbClr val="FFFFFF"/>
+          </a:solidFill>
+          <a:ln/>
+          <a:effectLst>
+            <a:outerShdw sx="100000" sy="100000" kx="0" ky="0" algn="bl" rotWithShape="0" blurRad="50800" dist="25400" dir="8100000">
+              <a:srgbClr val="000000">
+                <a:alpha val="10000"/>
+              </a:srgbClr>
+            </a:outerShdw>
+          </a:effectLst>
+        </p:spPr>
+      </p:sp>
+      <p:sp>
+        <p:nvSpPr>
+          <p:cNvPr id="19" name="Shape 17"/>
+          <p:cNvSpPr/>
+          <p:nvPr/>
+        </p:nvSpPr>
+        <p:spPr>
+          <a:xfrm>
+            <a:off x="4754880" y="1819656"/>
+            <a:ext cx="54864" cy="658368"/>
+          </a:xfrm>
+          <a:prstGeom prst="rect">
+            <a:avLst/>
+          </a:prstGeom>
+          <a:solidFill>
+            <a:srgbClr val="2A9D8F"/>
+          </a:solidFill>
+          <a:ln/>
+        </p:spPr>
+      </p:sp>
+      <p:sp>
+        <p:nvSpPr>
+          <p:cNvPr id="20" name="Text 18"/>
+          <p:cNvSpPr/>
+          <p:nvPr/>
+        </p:nvSpPr>
+        <p:spPr>
+          <a:xfrm>
+            <a:off x="4937760" y="1819656"/>
+            <a:ext cx="1463040" cy="658368"/>
+          </a:xfrm>
+          <a:prstGeom prst="rect">
+            <a:avLst/>
+          </a:prstGeom>
+          <a:noFill/>
+          <a:ln/>
+        </p:spPr>
+        <p:txBody>
+          <a:bodyPr wrap="square" lIns="0" tIns="0" rIns="0" bIns="0" rtlCol="0" anchor="ctr"/>
+          <a:lstStyle/>
+          <a:p>
+            <a:pPr indent="0" marL="0">
+              <a:buNone/>
+            </a:pPr>
+            <a:r>
+              <a:rPr lang="en-US" sz="1300" b="1" dirty="0">
+                <a:solidFill>
+                  <a:srgbClr val="1B2A4A"/>
+                </a:solidFill>
+                <a:latin typeface="Georgia" pitchFamily="34" charset="0"/>
+                <a:ea typeface="Georgia" pitchFamily="34" charset="-122"/>
+                <a:cs typeface="Georgia" pitchFamily="34" charset="-120"/>
+              </a:rPr>
+              <a:t>Operation</a:t>
+            </a:r>
+            <a:endParaRPr lang="en-US" sz="1300" dirty="0"/>
+          </a:p>
+        </p:txBody>
+      </p:sp>
+      <p:sp>
+        <p:nvSpPr>
+          <p:cNvPr id="21" name="Text 19"/>
+          <p:cNvSpPr/>
+          <p:nvPr/>
+        </p:nvSpPr>
+        <p:spPr>
+          <a:xfrm>
+            <a:off x="6400800" y="1819656"/>
+            <a:ext cx="1920240" cy="658368"/>
+          </a:xfrm>
+          <a:prstGeom prst="rect">
+            <a:avLst/>
+          </a:prstGeom>
+          <a:noFill/>
+          <a:ln/>
+        </p:spPr>
+        <p:txBody>
+          <a:bodyPr wrap="square" lIns="0" tIns="0" rIns="0" bIns="0" rtlCol="0" anchor="ctr"/>
+          <a:lstStyle/>
+          <a:p>
+            <a:pPr indent="0" marL="0">
+              <a:buNone/>
+            </a:pPr>
+            <a:r>
+              <a:rPr lang="en-US" sz="1100" dirty="0">
+                <a:solidFill>
+                  <a:srgbClr val="6B6660"/>
+                </a:solidFill>
+                <a:latin typeface="Calibri" pitchFamily="34" charset="0"/>
+                <a:ea typeface="Calibri" pitchFamily="34" charset="-122"/>
+                <a:cs typeface="Calibri" pitchFamily="34" charset="-120"/>
+              </a:rPr>
+              <a:t>+, −, ×, ÷</a:t>
+            </a:r>
+            <a:endParaRPr lang="en-US" sz="1100" dirty="0"/>
+          </a:p>
+        </p:txBody>
+      </p:sp>
+      <p:sp>
+        <p:nvSpPr>
+          <p:cNvPr id="22" name="Shape 20"/>
+          <p:cNvSpPr/>
+          <p:nvPr/>
+        </p:nvSpPr>
+        <p:spPr>
+          <a:xfrm>
+            <a:off x="731520" y="2587752"/>
+            <a:ext cx="3657600" cy="658368"/>
+          </a:xfrm>
+          <a:prstGeom prst="rect">
+            <a:avLst/>
+          </a:prstGeom>
+          <a:solidFill>
+            <a:srgbClr val="FFFFFF"/>
+          </a:solidFill>
+          <a:ln/>
+          <a:effectLst>
+            <a:outerShdw sx="100000" sy="100000" kx="0" ky="0" algn="bl" rotWithShape="0" blurRad="50800" dist="25400" dir="8100000">
+              <a:srgbClr val="000000">
+                <a:alpha val="10000"/>
+              </a:srgbClr>
+            </a:outerShdw>
+          </a:effectLst>
+        </p:spPr>
+      </p:sp>
+      <p:sp>
+        <p:nvSpPr>
+          <p:cNvPr id="23" name="Shape 21"/>
+          <p:cNvSpPr/>
+          <p:nvPr/>
+        </p:nvSpPr>
+        <p:spPr>
+          <a:xfrm>
+            <a:off x="731520" y="2587752"/>
+            <a:ext cx="54864" cy="658368"/>
+          </a:xfrm>
+          <a:prstGeom prst="rect">
+            <a:avLst/>
+          </a:prstGeom>
+          <a:solidFill>
+            <a:srgbClr val="2A9D8F"/>
+          </a:solidFill>
+          <a:ln/>
+        </p:spPr>
+      </p:sp>
+      <p:sp>
+        <p:nvSpPr>
+          <p:cNvPr id="24" name="Text 22"/>
+          <p:cNvSpPr/>
+          <p:nvPr/>
+        </p:nvSpPr>
+        <p:spPr>
+          <a:xfrm>
+            <a:off x="914400" y="2587752"/>
+            <a:ext cx="1463040" cy="658368"/>
+          </a:xfrm>
+          <a:prstGeom prst="rect">
+            <a:avLst/>
+          </a:prstGeom>
+          <a:noFill/>
+          <a:ln/>
+        </p:spPr>
+        <p:txBody>
+          <a:bodyPr wrap="square" lIns="0" tIns="0" rIns="0" bIns="0" rtlCol="0" anchor="ctr"/>
+          <a:lstStyle/>
+          <a:p>
+            <a:pPr indent="0" marL="0">
+              <a:buNone/>
+            </a:pPr>
+            <a:r>
+              <a:rPr lang="en-US" sz="1300" b="1" dirty="0">
+                <a:solidFill>
+                  <a:srgbClr val="1B2A4A"/>
+                </a:solidFill>
+                <a:latin typeface="Georgia" pitchFamily="34" charset="0"/>
+                <a:ea typeface="Georgia" pitchFamily="34" charset="-122"/>
+                <a:cs typeface="Georgia" pitchFamily="34" charset="-120"/>
+              </a:rPr>
+              <a:t>Expression</a:t>
+            </a:r>
+            <a:endParaRPr lang="en-US" sz="1300" dirty="0"/>
+          </a:p>
+        </p:txBody>
+      </p:sp>
+      <p:sp>
+        <p:nvSpPr>
+          <p:cNvPr id="25" name="Text 23"/>
+          <p:cNvSpPr/>
+          <p:nvPr/>
+        </p:nvSpPr>
+        <p:spPr>
+          <a:xfrm>
+            <a:off x="2377440" y="2587752"/>
+            <a:ext cx="1920240" cy="658368"/>
+          </a:xfrm>
+          <a:prstGeom prst="rect">
+            <a:avLst/>
+          </a:prstGeom>
+          <a:noFill/>
+          <a:ln/>
+        </p:spPr>
+        <p:txBody>
+          <a:bodyPr wrap="square" lIns="0" tIns="0" rIns="0" bIns="0" rtlCol="0" anchor="ctr"/>
+          <a:lstStyle/>
+          <a:p>
+            <a:pPr indent="0" marL="0">
+              <a:buNone/>
+            </a:pPr>
+            <a:r>
+              <a:rPr lang="en-US" sz="1100" dirty="0">
+                <a:solidFill>
+                  <a:srgbClr val="6B6660"/>
+                </a:solidFill>
+                <a:latin typeface="Calibri" pitchFamily="34" charset="0"/>
+                <a:ea typeface="Calibri" pitchFamily="34" charset="-122"/>
+                <a:cs typeface="Calibri" pitchFamily="34" charset="-120"/>
+              </a:rPr>
+              <a:t>A combination of numbers and operations</a:t>
+            </a:r>
+            <a:endParaRPr lang="en-US" sz="1100" dirty="0"/>
           </a:p>
         </p:txBody>
       </p:sp>
@@ -1655,7 +2434,47 @@
         <p:spPr>
           <a:xfrm>
             <a:off x="0" y="0"/>
-            <a:ext cx="9144000" cy="54864"/>
+            <a:ext cx="9144000" cy="822960"/>
+          </a:xfrm>
+          <a:prstGeom prst="rect">
+            <a:avLst/>
+          </a:prstGeom>
+          <a:solidFill>
+            <a:srgbClr val="FFFFFF"/>
+          </a:solidFill>
+          <a:ln/>
+        </p:spPr>
+      </p:sp>
+      <p:sp>
+        <p:nvSpPr>
+          <p:cNvPr id="3" name="Shape 1"/>
+          <p:cNvSpPr/>
+          <p:nvPr/>
+        </p:nvSpPr>
+        <p:spPr>
+          <a:xfrm>
+            <a:off x="0" y="804672"/>
+            <a:ext cx="9144000" cy="27432"/>
+          </a:xfrm>
+          <a:prstGeom prst="rect">
+            <a:avLst/>
+          </a:prstGeom>
+          <a:solidFill>
+            <a:srgbClr val="E5E2DC"/>
+          </a:solidFill>
+          <a:ln/>
+        </p:spPr>
+      </p:sp>
+      <p:sp>
+        <p:nvSpPr>
+          <p:cNvPr id="4" name="Shape 2"/>
+          <p:cNvSpPr/>
+          <p:nvPr/>
+        </p:nvSpPr>
+        <p:spPr>
+          <a:xfrm>
+            <a:off x="548640" y="201168"/>
+            <a:ext cx="54864" cy="420624"/>
           </a:xfrm>
           <a:prstGeom prst="rect">
             <a:avLst/>
@@ -1668,14 +2487,14 @@
       </p:sp>
       <p:sp>
         <p:nvSpPr>
-          <p:cNvPr id="3" name="Text 1"/>
-          <p:cNvSpPr/>
-          <p:nvPr/>
-        </p:nvSpPr>
-        <p:spPr>
-          <a:xfrm>
-            <a:off x="7772400" y="4709160"/>
-            <a:ext cx="1097280" cy="320040"/>
+          <p:cNvPr id="5" name="Text 3"/>
+          <p:cNvSpPr/>
+          <p:nvPr/>
+        </p:nvSpPr>
+        <p:spPr>
+          <a:xfrm>
+            <a:off x="777240" y="137160"/>
+            <a:ext cx="7772400" cy="548640"/>
           </a:xfrm>
           <a:prstGeom prst="rect">
             <a:avLst/>
@@ -1684,89 +2503,172 @@
           <a:ln/>
         </p:spPr>
         <p:txBody>
-          <a:bodyPr wrap="square" rtlCol="0" anchor="ctr"/>
-          <a:lstStyle/>
-          <a:p>
-            <a:pPr algn="r" indent="0" marL="0">
+          <a:bodyPr wrap="square" lIns="0" tIns="0" rIns="0" bIns="0" rtlCol="0" anchor="ctr"/>
+          <a:lstStyle/>
+          <a:p>
+            <a:pPr indent="0" marL="0">
               <a:buNone/>
             </a:pPr>
             <a:r>
-              <a:rPr lang="en-US" sz="900" dirty="0">
-                <a:solidFill>
-                  <a:srgbClr val="6B6660"/>
+              <a:rPr lang="en-US" sz="2000" b="1" dirty="0">
+                <a:solidFill>
+                  <a:srgbClr val="1B2A4A"/>
+                </a:solidFill>
+                <a:latin typeface="Georgia" pitchFamily="34" charset="0"/>
+                <a:ea typeface="Georgia" pitchFamily="34" charset="-122"/>
+                <a:cs typeface="Georgia" pitchFamily="34" charset="-120"/>
+              </a:rPr>
+              <a:t>BIDMAS — The Order Matters!</a:t>
+            </a:r>
+            <a:endParaRPr lang="en-US" sz="2000" dirty="0"/>
+          </a:p>
+        </p:txBody>
+      </p:sp>
+      <p:sp>
+        <p:nvSpPr>
+          <p:cNvPr id="6" name="Text 4"/>
+          <p:cNvSpPr/>
+          <p:nvPr/>
+        </p:nvSpPr>
+        <p:spPr>
+          <a:xfrm>
+            <a:off x="731520" y="1051560"/>
+            <a:ext cx="7680960" cy="3108960"/>
+          </a:xfrm>
+          <a:prstGeom prst="rect">
+            <a:avLst/>
+          </a:prstGeom>
+          <a:noFill/>
+          <a:ln/>
+        </p:spPr>
+        <p:txBody>
+          <a:bodyPr wrap="square" rtlCol="0" anchor="t"/>
+          <a:lstStyle/>
+          <a:p>
+            <a:pPr marL="342900" indent="-342900">
+              <a:spcAft>
+                <a:spcPts val="800"/>
+              </a:spcAft>
+              <a:buSzPct val="100000"/>
+              <a:buChar char="•"/>
+            </a:pPr>
+            <a:r>
+              <a:rPr lang="en-US" sz="1500" dirty="0">
+                <a:solidFill>
+                  <a:srgbClr val="3D3A36"/>
                 </a:solidFill>
                 <a:latin typeface="Calibri" pitchFamily="34" charset="0"/>
                 <a:ea typeface="Calibri" pitchFamily="34" charset="-122"/>
                 <a:cs typeface="Calibri" pitchFamily="34" charset="-120"/>
               </a:rPr>
-              <a:t>3 / 5</a:t>
-            </a:r>
-            <a:endParaRPr lang="en-US" sz="900" dirty="0"/>
-          </a:p>
-        </p:txBody>
-      </p:sp>
-      <p:sp>
-        <p:nvSpPr>
-          <p:cNvPr id="4" name="Text 2"/>
-          <p:cNvSpPr/>
-          <p:nvPr/>
-        </p:nvSpPr>
-        <p:spPr>
-          <a:xfrm>
-            <a:off x="457200" y="274320"/>
-            <a:ext cx="8229600" cy="640080"/>
-          </a:xfrm>
-          <a:prstGeom prst="rect">
-            <a:avLst/>
-          </a:prstGeom>
-          <a:noFill/>
-          <a:ln/>
-        </p:spPr>
-        <p:txBody>
-          <a:bodyPr wrap="square" rtlCol="0" anchor="ctr"/>
-          <a:lstStyle/>
-          <a:p>
-            <a:pPr indent="0" marL="0">
-              <a:buNone/>
-            </a:pPr>
-            <a:r>
-              <a:rPr lang="en-US" sz="2600" b="1" dirty="0">
-                <a:solidFill>
-                  <a:srgbClr val="1B2A4A"/>
-                </a:solidFill>
-                <a:latin typeface="Georgia" pitchFamily="34" charset="0"/>
-                <a:ea typeface="Georgia" pitchFamily="34" charset="-122"/>
-                <a:cs typeface="Georgia" pitchFamily="34" charset="-120"/>
-              </a:rPr>
-              <a:t>BIDMAS</a:t>
-            </a:r>
-            <a:endParaRPr lang="en-US" sz="2600" dirty="0"/>
-          </a:p>
-        </p:txBody>
-      </p:sp>
-      <p:sp>
-        <p:nvSpPr>
-          <p:cNvPr id="5" name="Shape 3"/>
-          <p:cNvSpPr/>
-          <p:nvPr/>
-        </p:nvSpPr>
-        <p:spPr>
-          <a:xfrm>
-            <a:off x="457200" y="1188720"/>
-            <a:ext cx="2560320" cy="1828800"/>
-          </a:xfrm>
-          <a:prstGeom prst="rect">
-            <a:avLst/>
-          </a:prstGeom>
-          <a:solidFill>
-            <a:srgbClr val="FFFFFF"/>
-          </a:solidFill>
-          <a:ln w="12700">
-            <a:solidFill>
-              <a:srgbClr val="E5E2DC"/>
-            </a:solidFill>
-            <a:prstDash val="solid"/>
-          </a:ln>
+              <a:t>B — Brackets first: calculate anything inside ( ) before anything else.</a:t>
+            </a:r>
+            <a:endParaRPr lang="en-US" sz="1500" dirty="0"/>
+          </a:p>
+          <a:p>
+            <a:pPr marL="342900" indent="-342900">
+              <a:spcAft>
+                <a:spcPts val="800"/>
+              </a:spcAft>
+              <a:buSzPct val="100000"/>
+              <a:buChar char="•"/>
+            </a:pPr>
+            <a:r>
+              <a:rPr lang="en-US" sz="1500" dirty="0">
+                <a:solidFill>
+                  <a:srgbClr val="3D3A36"/>
+                </a:solidFill>
+                <a:latin typeface="Calibri" pitchFamily="34" charset="0"/>
+                <a:ea typeface="Calibri" pitchFamily="34" charset="-122"/>
+                <a:cs typeface="Calibri" pitchFamily="34" charset="-120"/>
+              </a:rPr>
+              <a:t>I — Indices (powers): calculate squares, cubes, etc.</a:t>
+            </a:r>
+            <a:endParaRPr lang="en-US" sz="1500" dirty="0"/>
+          </a:p>
+          <a:p>
+            <a:pPr marL="342900" indent="-342900">
+              <a:spcAft>
+                <a:spcPts val="800"/>
+              </a:spcAft>
+              <a:buSzPct val="100000"/>
+              <a:buChar char="•"/>
+            </a:pPr>
+            <a:r>
+              <a:rPr lang="en-US" sz="1500" dirty="0">
+                <a:solidFill>
+                  <a:srgbClr val="3D3A36"/>
+                </a:solidFill>
+                <a:latin typeface="Calibri" pitchFamily="34" charset="0"/>
+                <a:ea typeface="Calibri" pitchFamily="34" charset="-122"/>
+                <a:cs typeface="Calibri" pitchFamily="34" charset="-120"/>
+              </a:rPr>
+              <a:t>D/M — Division and Multiplication: left to right (same priority).</a:t>
+            </a:r>
+            <a:endParaRPr lang="en-US" sz="1500" dirty="0"/>
+          </a:p>
+          <a:p>
+            <a:pPr marL="342900" indent="-342900">
+              <a:spcAft>
+                <a:spcPts val="800"/>
+              </a:spcAft>
+              <a:buSzPct val="100000"/>
+              <a:buChar char="•"/>
+            </a:pPr>
+            <a:r>
+              <a:rPr lang="en-US" sz="1500" dirty="0">
+                <a:solidFill>
+                  <a:srgbClr val="3D3A36"/>
+                </a:solidFill>
+                <a:latin typeface="Calibri" pitchFamily="34" charset="0"/>
+                <a:ea typeface="Calibri" pitchFamily="34" charset="-122"/>
+                <a:cs typeface="Calibri" pitchFamily="34" charset="-120"/>
+              </a:rPr>
+              <a:t>A/S — Addition and Subtraction: left to right (same priority).</a:t>
+            </a:r>
+            <a:endParaRPr lang="en-US" sz="1500" dirty="0"/>
+          </a:p>
+          <a:p>
+            <a:pPr marL="342900" indent="-342900">
+              <a:spcAft>
+                <a:spcPts val="800"/>
+              </a:spcAft>
+              <a:buSzPct val="100000"/>
+              <a:buChar char="•"/>
+            </a:pPr>
+            <a:r>
+              <a:rPr lang="en-US" sz="1500" dirty="0">
+                <a:solidFill>
+                  <a:srgbClr val="3D3A36"/>
+                </a:solidFill>
+                <a:latin typeface="Calibri" pitchFamily="34" charset="0"/>
+                <a:ea typeface="Calibri" pitchFamily="34" charset="-122"/>
+                <a:cs typeface="Calibri" pitchFamily="34" charset="-120"/>
+              </a:rPr>
+              <a:t>Without BIDMAS, 3 + 4 × 2 could mean 14 or 11 — BIDMAS says 11 is correct.</a:t>
+            </a:r>
+            <a:endParaRPr lang="en-US" sz="1500" dirty="0"/>
+          </a:p>
+        </p:txBody>
+      </p:sp>
+      <p:sp>
+        <p:nvSpPr>
+          <p:cNvPr id="7" name="Shape 5"/>
+          <p:cNvSpPr/>
+          <p:nvPr/>
+        </p:nvSpPr>
+        <p:spPr>
+          <a:xfrm>
+            <a:off x="731520" y="4206240"/>
+            <a:ext cx="7680960" cy="640080"/>
+          </a:xfrm>
+          <a:prstGeom prst="rect">
+            <a:avLst/>
+          </a:prstGeom>
+          <a:solidFill>
+            <a:srgbClr val="E8F5F3"/>
+          </a:solidFill>
+          <a:ln/>
           <a:effectLst>
             <a:outerShdw sx="100000" sy="100000" kx="0" ky="0" algn="bl" rotWithShape="0" blurRad="50800" dist="25400" dir="8100000">
               <a:srgbClr val="000000">
@@ -1778,34 +2680,14 @@
       </p:sp>
       <p:sp>
         <p:nvSpPr>
-          <p:cNvPr id="6" name="Shape 4"/>
-          <p:cNvSpPr/>
-          <p:nvPr/>
-        </p:nvSpPr>
-        <p:spPr>
-          <a:xfrm>
-            <a:off x="457200" y="1188720"/>
-            <a:ext cx="2560320" cy="54864"/>
-          </a:xfrm>
-          <a:prstGeom prst="rect">
-            <a:avLst/>
-          </a:prstGeom>
-          <a:solidFill>
-            <a:srgbClr val="2A9D8F"/>
-          </a:solidFill>
-          <a:ln/>
-        </p:spPr>
-      </p:sp>
-      <p:sp>
-        <p:nvSpPr>
-          <p:cNvPr id="7" name="Text 5"/>
-          <p:cNvSpPr/>
-          <p:nvPr/>
-        </p:nvSpPr>
-        <p:spPr>
-          <a:xfrm>
-            <a:off x="594360" y="1325880"/>
-            <a:ext cx="2286000" cy="365760"/>
+          <p:cNvPr id="8" name="Text 6"/>
+          <p:cNvSpPr/>
+          <p:nvPr/>
+        </p:nvSpPr>
+        <p:spPr>
+          <a:xfrm>
+            <a:off x="914400" y="4251960"/>
+            <a:ext cx="7315200" cy="548640"/>
           </a:xfrm>
           <a:prstGeom prst="rect">
             <a:avLst/>
@@ -1821,46 +2703,21 @@
               <a:buNone/>
             </a:pPr>
             <a:r>
-              <a:rPr lang="en-US" sz="1400" b="1" dirty="0">
-                <a:solidFill>
-                  <a:srgbClr val="1B2A4A"/>
+              <a:rPr lang="en-US" sz="1200" b="1" dirty="0">
+                <a:solidFill>
+                  <a:srgbClr val="2A9D8F"/>
                 </a:solidFill>
                 <a:latin typeface="Calibri" pitchFamily="34" charset="0"/>
                 <a:ea typeface="Calibri" pitchFamily="34" charset="-122"/>
                 <a:cs typeface="Calibri" pitchFamily="34" charset="-120"/>
               </a:rPr>
-              <a:t>B — Brackets</a:t>
-            </a:r>
-            <a:endParaRPr lang="en-US" sz="1400" dirty="0"/>
-          </a:p>
-        </p:txBody>
-      </p:sp>
-      <p:sp>
-        <p:nvSpPr>
-          <p:cNvPr id="8" name="Text 6"/>
-          <p:cNvSpPr/>
-          <p:nvPr/>
-        </p:nvSpPr>
-        <p:spPr>
-          <a:xfrm>
-            <a:off x="594360" y="1737360"/>
-            <a:ext cx="2286000" cy="1097280"/>
-          </a:xfrm>
-          <a:prstGeom prst="rect">
-            <a:avLst/>
-          </a:prstGeom>
-          <a:noFill/>
-          <a:ln/>
-        </p:spPr>
-        <p:txBody>
-          <a:bodyPr wrap="square" rtlCol="0" anchor="t"/>
-          <a:lstStyle/>
-          <a:p>
+              <a:t>Key Idea: </a:t>
+            </a:r>
             <a:pPr indent="0" marL="0">
               <a:buNone/>
             </a:pPr>
             <a:r>
-              <a:rPr lang="en-US" sz="1100" dirty="0">
+              <a:rPr lang="en-US" sz="1200" i="1" dirty="0">
                 <a:solidFill>
                   <a:srgbClr val="3D3A36"/>
                 </a:solidFill>
@@ -1868,269 +2725,9 @@
                 <a:ea typeface="Calibri" pitchFamily="34" charset="-122"/>
                 <a:cs typeface="Calibri" pitchFamily="34" charset="-120"/>
               </a:rPr>
-              <a:t>Always do brackets first. 3 × (4 + 2) = 3 × 6 = 18. Without brackets: 3 × 4 + 2 = 12 + 2 = 14. Brackets change the answer!</a:t>
-            </a:r>
-            <a:endParaRPr lang="en-US" sz="1100" dirty="0"/>
-          </a:p>
-        </p:txBody>
-      </p:sp>
-      <p:sp>
-        <p:nvSpPr>
-          <p:cNvPr id="9" name="Shape 7"/>
-          <p:cNvSpPr/>
-          <p:nvPr/>
-        </p:nvSpPr>
-        <p:spPr>
-          <a:xfrm>
-            <a:off x="3291840" y="1188720"/>
-            <a:ext cx="2560320" cy="1828800"/>
-          </a:xfrm>
-          <a:prstGeom prst="rect">
-            <a:avLst/>
-          </a:prstGeom>
-          <a:solidFill>
-            <a:srgbClr val="FFFFFF"/>
-          </a:solidFill>
-          <a:ln w="12700">
-            <a:solidFill>
-              <a:srgbClr val="E5E2DC"/>
-            </a:solidFill>
-            <a:prstDash val="solid"/>
-          </a:ln>
-          <a:effectLst>
-            <a:outerShdw sx="100000" sy="100000" kx="0" ky="0" algn="bl" rotWithShape="0" blurRad="50800" dist="25400" dir="8100000">
-              <a:srgbClr val="000000">
-                <a:alpha val="10000"/>
-              </a:srgbClr>
-            </a:outerShdw>
-          </a:effectLst>
-        </p:spPr>
-      </p:sp>
-      <p:sp>
-        <p:nvSpPr>
-          <p:cNvPr id="10" name="Shape 8"/>
-          <p:cNvSpPr/>
-          <p:nvPr/>
-        </p:nvSpPr>
-        <p:spPr>
-          <a:xfrm>
-            <a:off x="3291840" y="1188720"/>
-            <a:ext cx="2560320" cy="54864"/>
-          </a:xfrm>
-          <a:prstGeom prst="rect">
-            <a:avLst/>
-          </a:prstGeom>
-          <a:solidFill>
-            <a:srgbClr val="2A9D8F"/>
-          </a:solidFill>
-          <a:ln/>
-        </p:spPr>
-      </p:sp>
-      <p:sp>
-        <p:nvSpPr>
-          <p:cNvPr id="11" name="Text 9"/>
-          <p:cNvSpPr/>
-          <p:nvPr/>
-        </p:nvSpPr>
-        <p:spPr>
-          <a:xfrm>
-            <a:off x="3429000" y="1325880"/>
-            <a:ext cx="2286000" cy="365760"/>
-          </a:xfrm>
-          <a:prstGeom prst="rect">
-            <a:avLst/>
-          </a:prstGeom>
-          <a:noFill/>
-          <a:ln/>
-        </p:spPr>
-        <p:txBody>
-          <a:bodyPr wrap="square" rtlCol="0" anchor="ctr"/>
-          <a:lstStyle/>
-          <a:p>
-            <a:pPr indent="0" marL="0">
-              <a:buNone/>
-            </a:pPr>
-            <a:r>
-              <a:rPr lang="en-US" sz="1400" b="1" dirty="0">
-                <a:solidFill>
-                  <a:srgbClr val="1B2A4A"/>
-                </a:solidFill>
-                <a:latin typeface="Calibri" pitchFamily="34" charset="0"/>
-                <a:ea typeface="Calibri" pitchFamily="34" charset="-122"/>
-                <a:cs typeface="Calibri" pitchFamily="34" charset="-120"/>
-              </a:rPr>
-              <a:t>I — Indices</a:t>
-            </a:r>
-            <a:endParaRPr lang="en-US" sz="1400" dirty="0"/>
-          </a:p>
-        </p:txBody>
-      </p:sp>
-      <p:sp>
-        <p:nvSpPr>
-          <p:cNvPr id="12" name="Text 10"/>
-          <p:cNvSpPr/>
-          <p:nvPr/>
-        </p:nvSpPr>
-        <p:spPr>
-          <a:xfrm>
-            <a:off x="3429000" y="1737360"/>
-            <a:ext cx="2286000" cy="1097280"/>
-          </a:xfrm>
-          <a:prstGeom prst="rect">
-            <a:avLst/>
-          </a:prstGeom>
-          <a:noFill/>
-          <a:ln/>
-        </p:spPr>
-        <p:txBody>
-          <a:bodyPr wrap="square" rtlCol="0" anchor="t"/>
-          <a:lstStyle/>
-          <a:p>
-            <a:pPr indent="0" marL="0">
-              <a:buNone/>
-            </a:pPr>
-            <a:r>
-              <a:rPr lang="en-US" sz="1100" dirty="0">
-                <a:solidFill>
-                  <a:srgbClr val="3D3A36"/>
-                </a:solidFill>
-                <a:latin typeface="Calibri" pitchFamily="34" charset="0"/>
-                <a:ea typeface="Calibri" pitchFamily="34" charset="-122"/>
-                <a:cs typeface="Calibri" pitchFamily="34" charset="-120"/>
-              </a:rPr>
-              <a:t>Powers/exponents come second. 2 + 3² = 2 + 9 = 11. NOT (2 + 3)² = 25. Indices = squares, cubes, etc.</a:t>
-            </a:r>
-            <a:endParaRPr lang="en-US" sz="1100" dirty="0"/>
-          </a:p>
-        </p:txBody>
-      </p:sp>
-      <p:sp>
-        <p:nvSpPr>
-          <p:cNvPr id="13" name="Shape 11"/>
-          <p:cNvSpPr/>
-          <p:nvPr/>
-        </p:nvSpPr>
-        <p:spPr>
-          <a:xfrm>
-            <a:off x="6126480" y="1188720"/>
-            <a:ext cx="2560320" cy="1828800"/>
-          </a:xfrm>
-          <a:prstGeom prst="rect">
-            <a:avLst/>
-          </a:prstGeom>
-          <a:solidFill>
-            <a:srgbClr val="FFFFFF"/>
-          </a:solidFill>
-          <a:ln w="12700">
-            <a:solidFill>
-              <a:srgbClr val="E5E2DC"/>
-            </a:solidFill>
-            <a:prstDash val="solid"/>
-          </a:ln>
-          <a:effectLst>
-            <a:outerShdw sx="100000" sy="100000" kx="0" ky="0" algn="bl" rotWithShape="0" blurRad="50800" dist="25400" dir="8100000">
-              <a:srgbClr val="000000">
-                <a:alpha val="10000"/>
-              </a:srgbClr>
-            </a:outerShdw>
-          </a:effectLst>
-        </p:spPr>
-      </p:sp>
-      <p:sp>
-        <p:nvSpPr>
-          <p:cNvPr id="14" name="Shape 12"/>
-          <p:cNvSpPr/>
-          <p:nvPr/>
-        </p:nvSpPr>
-        <p:spPr>
-          <a:xfrm>
-            <a:off x="6126480" y="1188720"/>
-            <a:ext cx="2560320" cy="54864"/>
-          </a:xfrm>
-          <a:prstGeom prst="rect">
-            <a:avLst/>
-          </a:prstGeom>
-          <a:solidFill>
-            <a:srgbClr val="2A9D8F"/>
-          </a:solidFill>
-          <a:ln/>
-        </p:spPr>
-      </p:sp>
-      <p:sp>
-        <p:nvSpPr>
-          <p:cNvPr id="15" name="Text 13"/>
-          <p:cNvSpPr/>
-          <p:nvPr/>
-        </p:nvSpPr>
-        <p:spPr>
-          <a:xfrm>
-            <a:off x="6263640" y="1325880"/>
-            <a:ext cx="2286000" cy="365760"/>
-          </a:xfrm>
-          <a:prstGeom prst="rect">
-            <a:avLst/>
-          </a:prstGeom>
-          <a:noFill/>
-          <a:ln/>
-        </p:spPr>
-        <p:txBody>
-          <a:bodyPr wrap="square" rtlCol="0" anchor="ctr"/>
-          <a:lstStyle/>
-          <a:p>
-            <a:pPr indent="0" marL="0">
-              <a:buNone/>
-            </a:pPr>
-            <a:r>
-              <a:rPr lang="en-US" sz="1400" b="1" dirty="0">
-                <a:solidFill>
-                  <a:srgbClr val="1B2A4A"/>
-                </a:solidFill>
-                <a:latin typeface="Calibri" pitchFamily="34" charset="0"/>
-                <a:ea typeface="Calibri" pitchFamily="34" charset="-122"/>
-                <a:cs typeface="Calibri" pitchFamily="34" charset="-120"/>
-              </a:rPr>
-              <a:t>DM — Division &amp; Multiplication</a:t>
-            </a:r>
-            <a:endParaRPr lang="en-US" sz="1400" dirty="0"/>
-          </a:p>
-        </p:txBody>
-      </p:sp>
-      <p:sp>
-        <p:nvSpPr>
-          <p:cNvPr id="16" name="Text 14"/>
-          <p:cNvSpPr/>
-          <p:nvPr/>
-        </p:nvSpPr>
-        <p:spPr>
-          <a:xfrm>
-            <a:off x="6263640" y="1737360"/>
-            <a:ext cx="2286000" cy="1097280"/>
-          </a:xfrm>
-          <a:prstGeom prst="rect">
-            <a:avLst/>
-          </a:prstGeom>
-          <a:noFill/>
-          <a:ln/>
-        </p:spPr>
-        <p:txBody>
-          <a:bodyPr wrap="square" rtlCol="0" anchor="t"/>
-          <a:lstStyle/>
-          <a:p>
-            <a:pPr indent="0" marL="0">
-              <a:buNone/>
-            </a:pPr>
-            <a:r>
-              <a:rPr lang="en-US" sz="1100" dirty="0">
-                <a:solidFill>
-                  <a:srgbClr val="3D3A36"/>
-                </a:solidFill>
-                <a:latin typeface="Calibri" pitchFamily="34" charset="0"/>
-                <a:ea typeface="Calibri" pitchFamily="34" charset="-122"/>
-                <a:cs typeface="Calibri" pitchFamily="34" charset="-120"/>
-              </a:rPr>
-              <a:t>Equal priority — work left to right. 12 ÷ 3 × 2 = 4 × 2 = 8. NOT 12 ÷ 6 = 2.</a:t>
-            </a:r>
-            <a:endParaRPr lang="en-US" sz="1100" dirty="0"/>
+              <a:t>Division and Multiplication have EQUAL priority — work LEFT to RIGHT.</a:t>
+            </a:r>
+            <a:endParaRPr lang="en-US" sz="1200" dirty="0"/>
           </a:p>
         </p:txBody>
       </p:sp>
@@ -2175,7 +2772,47 @@
         <p:spPr>
           <a:xfrm>
             <a:off x="0" y="0"/>
-            <a:ext cx="9144000" cy="54864"/>
+            <a:ext cx="9144000" cy="822960"/>
+          </a:xfrm>
+          <a:prstGeom prst="rect">
+            <a:avLst/>
+          </a:prstGeom>
+          <a:solidFill>
+            <a:srgbClr val="FFFFFF"/>
+          </a:solidFill>
+          <a:ln/>
+        </p:spPr>
+      </p:sp>
+      <p:sp>
+        <p:nvSpPr>
+          <p:cNvPr id="3" name="Shape 1"/>
+          <p:cNvSpPr/>
+          <p:nvPr/>
+        </p:nvSpPr>
+        <p:spPr>
+          <a:xfrm>
+            <a:off x="0" y="804672"/>
+            <a:ext cx="9144000" cy="27432"/>
+          </a:xfrm>
+          <a:prstGeom prst="rect">
+            <a:avLst/>
+          </a:prstGeom>
+          <a:solidFill>
+            <a:srgbClr val="E5E2DC"/>
+          </a:solidFill>
+          <a:ln/>
+        </p:spPr>
+      </p:sp>
+      <p:sp>
+        <p:nvSpPr>
+          <p:cNvPr id="4" name="Shape 2"/>
+          <p:cNvSpPr/>
+          <p:nvPr/>
+        </p:nvSpPr>
+        <p:spPr>
+          <a:xfrm>
+            <a:off x="548640" y="201168"/>
+            <a:ext cx="54864" cy="420624"/>
           </a:xfrm>
           <a:prstGeom prst="rect">
             <a:avLst/>
@@ -2188,14 +2825,14 @@
       </p:sp>
       <p:sp>
         <p:nvSpPr>
-          <p:cNvPr id="3" name="Text 1"/>
-          <p:cNvSpPr/>
-          <p:nvPr/>
-        </p:nvSpPr>
-        <p:spPr>
-          <a:xfrm>
-            <a:off x="7772400" y="4709160"/>
-            <a:ext cx="1097280" cy="320040"/>
+          <p:cNvPr id="5" name="Text 3"/>
+          <p:cNvSpPr/>
+          <p:nvPr/>
+        </p:nvSpPr>
+        <p:spPr>
+          <a:xfrm>
+            <a:off x="777240" y="137160"/>
+            <a:ext cx="7772400" cy="548640"/>
           </a:xfrm>
           <a:prstGeom prst="rect">
             <a:avLst/>
@@ -2204,53 +2841,14 @@
           <a:ln/>
         </p:spPr>
         <p:txBody>
-          <a:bodyPr wrap="square" rtlCol="0" anchor="ctr"/>
-          <a:lstStyle/>
-          <a:p>
-            <a:pPr algn="r" indent="0" marL="0">
-              <a:buNone/>
-            </a:pPr>
-            <a:r>
-              <a:rPr lang="en-US" sz="900" dirty="0">
-                <a:solidFill>
-                  <a:srgbClr val="6B6660"/>
-                </a:solidFill>
-                <a:latin typeface="Calibri" pitchFamily="34" charset="0"/>
-                <a:ea typeface="Calibri" pitchFamily="34" charset="-122"/>
-                <a:cs typeface="Calibri" pitchFamily="34" charset="-120"/>
-              </a:rPr>
-              <a:t>4 / 5</a:t>
-            </a:r>
-            <a:endParaRPr lang="en-US" sz="900" dirty="0"/>
-          </a:p>
-        </p:txBody>
-      </p:sp>
-      <p:sp>
-        <p:nvSpPr>
-          <p:cNvPr id="4" name="Text 2"/>
-          <p:cNvSpPr/>
-          <p:nvPr/>
-        </p:nvSpPr>
-        <p:spPr>
-          <a:xfrm>
-            <a:off x="457200" y="274320"/>
-            <a:ext cx="8229600" cy="640080"/>
-          </a:xfrm>
-          <a:prstGeom prst="rect">
-            <a:avLst/>
-          </a:prstGeom>
-          <a:noFill/>
-          <a:ln/>
-        </p:spPr>
-        <p:txBody>
-          <a:bodyPr wrap="square" rtlCol="0" anchor="ctr"/>
+          <a:bodyPr wrap="square" lIns="0" tIns="0" rIns="0" bIns="0" rtlCol="0" anchor="ctr"/>
           <a:lstStyle/>
           <a:p>
             <a:pPr indent="0" marL="0">
               <a:buNone/>
             </a:pPr>
             <a:r>
-              <a:rPr lang="en-US" sz="2600" b="1" dirty="0">
+              <a:rPr lang="en-US" sz="2000" b="1" dirty="0">
                 <a:solidFill>
                   <a:srgbClr val="1B2A4A"/>
                 </a:solidFill>
@@ -2258,162 +2856,30 @@
                 <a:ea typeface="Georgia" pitchFamily="34" charset="-122"/>
                 <a:cs typeface="Georgia" pitchFamily="34" charset="-120"/>
               </a:rPr>
-              <a:t>Practice Problems</a:t>
-            </a:r>
-            <a:endParaRPr lang="en-US" sz="2600" dirty="0"/>
-          </a:p>
-        </p:txBody>
-      </p:sp>
-      <p:sp>
-        <p:nvSpPr>
-          <p:cNvPr id="5" name="Text 3"/>
-          <p:cNvSpPr/>
-          <p:nvPr/>
-        </p:nvSpPr>
-        <p:spPr>
-          <a:xfrm>
-            <a:off x="457200" y="1188720"/>
+              <a:t>BIDMAS in Action</a:t>
+            </a:r>
+            <a:endParaRPr lang="en-US" sz="2000" dirty="0"/>
+          </a:p>
+        </p:txBody>
+      </p:sp>
+      <p:sp>
+        <p:nvSpPr>
+          <p:cNvPr id="6" name="Shape 4"/>
+          <p:cNvSpPr/>
+          <p:nvPr/>
+        </p:nvSpPr>
+        <p:spPr>
+          <a:xfrm>
+            <a:off x="548640" y="1051560"/>
             <a:ext cx="3840480" cy="3474720"/>
           </a:xfrm>
           <a:prstGeom prst="rect">
             <a:avLst/>
           </a:prstGeom>
-          <a:noFill/>
-          <a:ln/>
-        </p:spPr>
-        <p:txBody>
-          <a:bodyPr wrap="square" rtlCol="0" anchor="t"/>
-          <a:lstStyle/>
-          <a:p>
-            <a:pPr marL="342900" indent="-342900">
-              <a:spcAft>
-                <a:spcPts val="600"/>
-              </a:spcAft>
-              <a:buSzPct val="100000"/>
-              <a:buChar char="•"/>
-            </a:pPr>
-            <a:r>
-              <a:rPr lang="en-US" sz="1400" dirty="0">
-                <a:solidFill>
-                  <a:srgbClr val="3D3A36"/>
-                </a:solidFill>
-                <a:latin typeface="Calibri" pitchFamily="34" charset="0"/>
-                <a:ea typeface="Calibri" pitchFamily="34" charset="-122"/>
-                <a:cs typeface="Calibri" pitchFamily="34" charset="-120"/>
-              </a:rPr>
-              <a:t>5 + 3 × 2 = 5 + 6 = 11</a:t>
-            </a:r>
-            <a:endParaRPr lang="en-US" sz="1400" dirty="0"/>
-          </a:p>
-          <a:p>
-            <a:pPr marL="342900" indent="-342900">
-              <a:spcAft>
-                <a:spcPts val="600"/>
-              </a:spcAft>
-              <a:buSzPct val="100000"/>
-              <a:buChar char="•"/>
-            </a:pPr>
-            <a:r>
-              <a:rPr lang="en-US" sz="1400" dirty="0">
-                <a:solidFill>
-                  <a:srgbClr val="3D3A36"/>
-                </a:solidFill>
-                <a:latin typeface="Calibri" pitchFamily="34" charset="0"/>
-                <a:ea typeface="Calibri" pitchFamily="34" charset="-122"/>
-                <a:cs typeface="Calibri" pitchFamily="34" charset="-120"/>
-              </a:rPr>
-              <a:t>(5 + 3) × 2 = 8 × 2 = 16</a:t>
-            </a:r>
-            <a:endParaRPr lang="en-US" sz="1400" dirty="0"/>
-          </a:p>
-          <a:p>
-            <a:pPr marL="342900" indent="-342900">
-              <a:spcAft>
-                <a:spcPts val="600"/>
-              </a:spcAft>
-              <a:buSzPct val="100000"/>
-              <a:buChar char="•"/>
-            </a:pPr>
-            <a:r>
-              <a:rPr lang="en-US" sz="1400" dirty="0">
-                <a:solidFill>
-                  <a:srgbClr val="3D3A36"/>
-                </a:solidFill>
-                <a:latin typeface="Calibri" pitchFamily="34" charset="0"/>
-                <a:ea typeface="Calibri" pitchFamily="34" charset="-122"/>
-                <a:cs typeface="Calibri" pitchFamily="34" charset="-120"/>
-              </a:rPr>
-              <a:t>4 + 6 ÷ 2 = 4 + 3 = 7</a:t>
-            </a:r>
-            <a:endParaRPr lang="en-US" sz="1400" dirty="0"/>
-          </a:p>
-          <a:p>
-            <a:pPr marL="342900" indent="-342900">
-              <a:spcAft>
-                <a:spcPts val="600"/>
-              </a:spcAft>
-              <a:buSzPct val="100000"/>
-              <a:buChar char="•"/>
-            </a:pPr>
-            <a:r>
-              <a:rPr lang="en-US" sz="1400" dirty="0">
-                <a:solidFill>
-                  <a:srgbClr val="3D3A36"/>
-                </a:solidFill>
-                <a:latin typeface="Calibri" pitchFamily="34" charset="0"/>
-                <a:ea typeface="Calibri" pitchFamily="34" charset="-122"/>
-                <a:cs typeface="Calibri" pitchFamily="34" charset="-120"/>
-              </a:rPr>
-              <a:t>10 − 2² + 1 = 10 − 4 + 1 = 7</a:t>
-            </a:r>
-            <a:endParaRPr lang="en-US" sz="1400" dirty="0"/>
-          </a:p>
-          <a:p>
-            <a:pPr marL="342900" indent="-342900">
-              <a:spcAft>
-                <a:spcPts val="600"/>
-              </a:spcAft>
-              <a:buSzPct val="100000"/>
-              <a:buChar char="•"/>
-            </a:pPr>
-            <a:r>
-              <a:rPr lang="en-US" sz="1400" dirty="0">
-                <a:solidFill>
-                  <a:srgbClr val="3D3A36"/>
-                </a:solidFill>
-                <a:latin typeface="Calibri" pitchFamily="34" charset="0"/>
-                <a:ea typeface="Calibri" pitchFamily="34" charset="-122"/>
-                <a:cs typeface="Calibri" pitchFamily="34" charset="-120"/>
-              </a:rPr>
-              <a:t>3 × (8 − 5)² = 3 × 3² = 3 × 9 = 27</a:t>
-            </a:r>
-            <a:endParaRPr lang="en-US" sz="1400" dirty="0"/>
-          </a:p>
-        </p:txBody>
-      </p:sp>
-      <p:sp>
-        <p:nvSpPr>
-          <p:cNvPr id="6" name="Shape 4"/>
-          <p:cNvSpPr/>
-          <p:nvPr/>
-        </p:nvSpPr>
-        <p:spPr>
-          <a:xfrm>
-            <a:off x="4846320" y="1188720"/>
-            <a:ext cx="3840480" cy="3474720"/>
-          </a:xfrm>
-          <a:prstGeom prst="rect">
-            <a:avLst/>
-          </a:prstGeom>
           <a:solidFill>
             <a:srgbClr val="FFFFFF"/>
           </a:solidFill>
-          <a:ln w="12700">
-            <a:solidFill>
-              <a:srgbClr val="E5E2DC"/>
-            </a:solidFill>
-            <a:prstDash val="solid"/>
-          </a:ln>
+          <a:ln/>
           <a:effectLst>
             <a:outerShdw sx="100000" sy="100000" kx="0" ky="0" algn="bl" rotWithShape="0" blurRad="50800" dist="25400" dir="8100000">
               <a:srgbClr val="000000">
@@ -2431,7 +2897,7 @@
         </p:nvSpPr>
         <p:spPr>
           <a:xfrm>
-            <a:off x="4846320" y="1188720"/>
+            <a:off x="548640" y="1051560"/>
             <a:ext cx="3840480" cy="54864"/>
           </a:xfrm>
           <a:prstGeom prst="rect">
@@ -2451,8 +2917,8 @@
         </p:nvSpPr>
         <p:spPr>
           <a:xfrm>
-            <a:off x="5120640" y="1371600"/>
-            <a:ext cx="3291840" cy="3108960"/>
+            <a:off x="777240" y="1188720"/>
+            <a:ext cx="3383280" cy="457200"/>
           </a:xfrm>
           <a:prstGeom prst="rect">
             <a:avLst/>
@@ -2461,43 +2927,75 @@
           <a:ln/>
         </p:spPr>
         <p:txBody>
+          <a:bodyPr wrap="square" lIns="0" tIns="0" rIns="0" bIns="0" rtlCol="0" anchor="ctr"/>
+          <a:lstStyle/>
+          <a:p>
+            <a:pPr indent="0" marL="0">
+              <a:buNone/>
+            </a:pPr>
+            <a:r>
+              <a:rPr lang="en-US" sz="1500" b="1" dirty="0">
+                <a:solidFill>
+                  <a:srgbClr val="1B2A4A"/>
+                </a:solidFill>
+                <a:latin typeface="Georgia" pitchFamily="34" charset="0"/>
+                <a:ea typeface="Georgia" pitchFamily="34" charset="-122"/>
+                <a:cs typeface="Georgia" pitchFamily="34" charset="-120"/>
+              </a:rPr>
+              <a:t>Example 1: 3 + 4 × 2</a:t>
+            </a:r>
+            <a:endParaRPr lang="en-US" sz="1500" dirty="0"/>
+          </a:p>
+        </p:txBody>
+      </p:sp>
+      <p:sp>
+        <p:nvSpPr>
+          <p:cNvPr id="9" name="Text 7"/>
+          <p:cNvSpPr/>
+          <p:nvPr/>
+        </p:nvSpPr>
+        <p:spPr>
+          <a:xfrm>
+            <a:off x="777240" y="1691640"/>
+            <a:ext cx="3383280" cy="2651760"/>
+          </a:xfrm>
+          <a:prstGeom prst="rect">
+            <a:avLst/>
+          </a:prstGeom>
+          <a:noFill/>
+          <a:ln/>
+        </p:spPr>
+        <p:txBody>
           <a:bodyPr wrap="square" rtlCol="0" anchor="t"/>
           <a:lstStyle/>
           <a:p>
-            <a:pPr indent="0" marL="0">
+            <a:pPr marL="342900" indent="-342900">
               <a:spcAft>
-                <a:spcPts val="400"/>
+                <a:spcPts val="600"/>
               </a:spcAft>
-              <a:buNone/>
-            </a:pPr>
-            <a:r>
-              <a:rPr lang="en-US" sz="1600" b="1" dirty="0">
-                <a:solidFill>
-                  <a:srgbClr val="1B2A4A"/>
+              <a:buSzPct val="100000"/>
+              <a:buChar char="•"/>
+            </a:pPr>
+            <a:r>
+              <a:rPr lang="en-US" sz="1300" dirty="0">
+                <a:solidFill>
+                  <a:srgbClr val="3D3A36"/>
                 </a:solidFill>
                 <a:latin typeface="Calibri" pitchFamily="34" charset="0"/>
                 <a:ea typeface="Calibri" pitchFamily="34" charset="-122"/>
                 <a:cs typeface="Calibri" pitchFamily="34" charset="-120"/>
               </a:rPr>
-              <a:t>AS — Addition &amp; Subtraction</a:t>
-            </a:r>
-            <a:endParaRPr lang="en-US" sz="1600" dirty="0"/>
-          </a:p>
-          <a:p>
-            <a:pPr indent="0" marL="0">
+              <a:t>Step 1: Multiply first → 4 × 2 = 8</a:t>
+            </a:r>
+            <a:endParaRPr lang="en-US" sz="1300" dirty="0"/>
+          </a:p>
+          <a:p>
+            <a:pPr marL="342900" indent="-342900">
               <a:spcAft>
-                <a:spcPts val="400"/>
+                <a:spcPts val="600"/>
               </a:spcAft>
-              <a:buNone/>
-            </a:pPr>
-            <a:endParaRPr lang="en-US" sz="1600" dirty="0"/>
-          </a:p>
-          <a:p>
-            <a:pPr indent="0" marL="0">
-              <a:spcAft>
-                <a:spcPts val="400"/>
-              </a:spcAft>
-              <a:buNone/>
+              <a:buSzPct val="100000"/>
+              <a:buChar char="•"/>
             </a:pPr>
             <a:r>
               <a:rPr lang="en-US" sz="1300" dirty="0">
@@ -2508,16 +3006,17 @@
                 <a:ea typeface="Calibri" pitchFamily="34" charset="-122"/>
                 <a:cs typeface="Calibri" pitchFamily="34" charset="-120"/>
               </a:rPr>
-              <a:t>Lowest priority — done last</a:t>
-            </a:r>
-            <a:endParaRPr lang="en-US" sz="1600" dirty="0"/>
-          </a:p>
-          <a:p>
-            <a:pPr indent="0" marL="0">
+              <a:t>Step 2: Then add → 3 + 8 = 11</a:t>
+            </a:r>
+            <a:endParaRPr lang="en-US" sz="1300" dirty="0"/>
+          </a:p>
+          <a:p>
+            <a:pPr marL="342900" indent="-342900">
               <a:spcAft>
-                <a:spcPts val="400"/>
+                <a:spcPts val="600"/>
               </a:spcAft>
-              <a:buNone/>
+              <a:buSzPct val="100000"/>
+              <a:buChar char="•"/>
             </a:pPr>
             <a:r>
               <a:rPr lang="en-US" sz="1300" dirty="0">
@@ -2528,16 +3027,17 @@
                 <a:ea typeface="Calibri" pitchFamily="34" charset="-122"/>
                 <a:cs typeface="Calibri" pitchFamily="34" charset="-120"/>
               </a:rPr>
-              <a:t>Equal priority: work left to right</a:t>
-            </a:r>
-            <a:endParaRPr lang="en-US" sz="1600" dirty="0"/>
-          </a:p>
-          <a:p>
-            <a:pPr indent="0" marL="0">
+              <a:t>Answer: 11</a:t>
+            </a:r>
+            <a:endParaRPr lang="en-US" sz="1300" dirty="0"/>
+          </a:p>
+          <a:p>
+            <a:pPr marL="342900" indent="-342900">
               <a:spcAft>
-                <a:spcPts val="400"/>
+                <a:spcPts val="600"/>
               </a:spcAft>
-              <a:buNone/>
+              <a:buSzPct val="100000"/>
+              <a:buChar char="•"/>
             </a:pPr>
             <a:r>
               <a:rPr lang="en-US" sz="1300" dirty="0">
@@ -2548,16 +3048,125 @@
                 <a:ea typeface="Calibri" pitchFamily="34" charset="-122"/>
                 <a:cs typeface="Calibri" pitchFamily="34" charset="-120"/>
               </a:rPr>
-              <a:t>10 − 3 + 2 = 7 + 2 = 9 (not 10 − 5 = 5)</a:t>
-            </a:r>
-            <a:endParaRPr lang="en-US" sz="1600" dirty="0"/>
-          </a:p>
+              <a:t>NOT: (3 + 4) × 2 = 14</a:t>
+            </a:r>
+            <a:endParaRPr lang="en-US" sz="1300" dirty="0"/>
+          </a:p>
+        </p:txBody>
+      </p:sp>
+      <p:sp>
+        <p:nvSpPr>
+          <p:cNvPr id="10" name="Shape 8"/>
+          <p:cNvSpPr/>
+          <p:nvPr/>
+        </p:nvSpPr>
+        <p:spPr>
+          <a:xfrm>
+            <a:off x="4754880" y="1051560"/>
+            <a:ext cx="3840480" cy="3474720"/>
+          </a:xfrm>
+          <a:prstGeom prst="rect">
+            <a:avLst/>
+          </a:prstGeom>
+          <a:solidFill>
+            <a:srgbClr val="FFFFFF"/>
+          </a:solidFill>
+          <a:ln/>
+          <a:effectLst>
+            <a:outerShdw sx="100000" sy="100000" kx="0" ky="0" algn="bl" rotWithShape="0" blurRad="50800" dist="25400" dir="8100000">
+              <a:srgbClr val="000000">
+                <a:alpha val="10000"/>
+              </a:srgbClr>
+            </a:outerShdw>
+          </a:effectLst>
+        </p:spPr>
+      </p:sp>
+      <p:sp>
+        <p:nvSpPr>
+          <p:cNvPr id="11" name="Shape 9"/>
+          <p:cNvSpPr/>
+          <p:nvPr/>
+        </p:nvSpPr>
+        <p:spPr>
+          <a:xfrm>
+            <a:off x="4754880" y="1051560"/>
+            <a:ext cx="3840480" cy="54864"/>
+          </a:xfrm>
+          <a:prstGeom prst="rect">
+            <a:avLst/>
+          </a:prstGeom>
+          <a:solidFill>
+            <a:srgbClr val="E9C46A"/>
+          </a:solidFill>
+          <a:ln/>
+        </p:spPr>
+      </p:sp>
+      <p:sp>
+        <p:nvSpPr>
+          <p:cNvPr id="12" name="Text 10"/>
+          <p:cNvSpPr/>
+          <p:nvPr/>
+        </p:nvSpPr>
+        <p:spPr>
+          <a:xfrm>
+            <a:off x="4983480" y="1188720"/>
+            <a:ext cx="3383280" cy="457200"/>
+          </a:xfrm>
+          <a:prstGeom prst="rect">
+            <a:avLst/>
+          </a:prstGeom>
+          <a:noFill/>
+          <a:ln/>
+        </p:spPr>
+        <p:txBody>
+          <a:bodyPr wrap="square" lIns="0" tIns="0" rIns="0" bIns="0" rtlCol="0" anchor="ctr"/>
+          <a:lstStyle/>
           <a:p>
             <a:pPr indent="0" marL="0">
+              <a:buNone/>
+            </a:pPr>
+            <a:r>
+              <a:rPr lang="en-US" sz="1500" b="1" dirty="0">
+                <a:solidFill>
+                  <a:srgbClr val="1B2A4A"/>
+                </a:solidFill>
+                <a:latin typeface="Georgia" pitchFamily="34" charset="0"/>
+                <a:ea typeface="Georgia" pitchFamily="34" charset="-122"/>
+                <a:cs typeface="Georgia" pitchFamily="34" charset="-120"/>
+              </a:rPr>
+              <a:t>Example 2: (6 + 2) × 3 − 1</a:t>
+            </a:r>
+            <a:endParaRPr lang="en-US" sz="1500" dirty="0"/>
+          </a:p>
+        </p:txBody>
+      </p:sp>
+      <p:sp>
+        <p:nvSpPr>
+          <p:cNvPr id="13" name="Text 11"/>
+          <p:cNvSpPr/>
+          <p:nvPr/>
+        </p:nvSpPr>
+        <p:spPr>
+          <a:xfrm>
+            <a:off x="4983480" y="1691640"/>
+            <a:ext cx="3383280" cy="2651760"/>
+          </a:xfrm>
+          <a:prstGeom prst="rect">
+            <a:avLst/>
+          </a:prstGeom>
+          <a:noFill/>
+          <a:ln/>
+        </p:spPr>
+        <p:txBody>
+          <a:bodyPr wrap="square" rtlCol="0" anchor="t"/>
+          <a:lstStyle/>
+          <a:p>
+            <a:pPr marL="342900" indent="-342900">
               <a:spcAft>
-                <a:spcPts val="400"/>
+                <a:spcPts val="600"/>
               </a:spcAft>
-              <a:buNone/>
+              <a:buSzPct val="100000"/>
+              <a:buChar char="•"/>
             </a:pPr>
             <a:r>
               <a:rPr lang="en-US" sz="1300" dirty="0">
@@ -2568,16 +3177,17 @@
                 <a:ea typeface="Calibri" pitchFamily="34" charset="-122"/>
                 <a:cs typeface="Calibri" pitchFamily="34" charset="-120"/>
               </a:rPr>
-              <a:t>Remember: BIDMAS is the ORDER you follow</a:t>
-            </a:r>
-            <a:endParaRPr lang="en-US" sz="1600" dirty="0"/>
-          </a:p>
-          <a:p>
-            <a:pPr indent="0" marL="0">
+              <a:t>Step 1: Brackets → 6 + 2 = 8</a:t>
+            </a:r>
+            <a:endParaRPr lang="en-US" sz="1300" dirty="0"/>
+          </a:p>
+          <a:p>
+            <a:pPr marL="342900" indent="-342900">
               <a:spcAft>
-                <a:spcPts val="400"/>
+                <a:spcPts val="600"/>
               </a:spcAft>
-              <a:buNone/>
+              <a:buSzPct val="100000"/>
+              <a:buChar char="•"/>
             </a:pPr>
             <a:r>
               <a:rPr lang="en-US" sz="1300" dirty="0">
@@ -2588,9 +3198,51 @@
                 <a:ea typeface="Calibri" pitchFamily="34" charset="-122"/>
                 <a:cs typeface="Calibri" pitchFamily="34" charset="-120"/>
               </a:rPr>
-              <a:t>Use brackets to override the default order</a:t>
-            </a:r>
-            <a:endParaRPr lang="en-US" sz="1600" dirty="0"/>
+              <a:t>Step 2: Multiply → 8 × 3 = 24</a:t>
+            </a:r>
+            <a:endParaRPr lang="en-US" sz="1300" dirty="0"/>
+          </a:p>
+          <a:p>
+            <a:pPr marL="342900" indent="-342900">
+              <a:spcAft>
+                <a:spcPts val="600"/>
+              </a:spcAft>
+              <a:buSzPct val="100000"/>
+              <a:buChar char="•"/>
+            </a:pPr>
+            <a:r>
+              <a:rPr lang="en-US" sz="1300" dirty="0">
+                <a:solidFill>
+                  <a:srgbClr val="3D3A36"/>
+                </a:solidFill>
+                <a:latin typeface="Calibri" pitchFamily="34" charset="0"/>
+                <a:ea typeface="Calibri" pitchFamily="34" charset="-122"/>
+                <a:cs typeface="Calibri" pitchFamily="34" charset="-120"/>
+              </a:rPr>
+              <a:t>Step 3: Subtract → 24 − 1 = 23</a:t>
+            </a:r>
+            <a:endParaRPr lang="en-US" sz="1300" dirty="0"/>
+          </a:p>
+          <a:p>
+            <a:pPr marL="342900" indent="-342900">
+              <a:spcAft>
+                <a:spcPts val="600"/>
+              </a:spcAft>
+              <a:buSzPct val="100000"/>
+              <a:buChar char="•"/>
+            </a:pPr>
+            <a:r>
+              <a:rPr lang="en-US" sz="1300" dirty="0">
+                <a:solidFill>
+                  <a:srgbClr val="3D3A36"/>
+                </a:solidFill>
+                <a:latin typeface="Calibri" pitchFamily="34" charset="0"/>
+                <a:ea typeface="Calibri" pitchFamily="34" charset="-122"/>
+                <a:cs typeface="Calibri" pitchFamily="34" charset="-120"/>
+              </a:rPr>
+              <a:t>Answer: 23</a:t>
+            </a:r>
+            <a:endParaRPr lang="en-US" sz="1300" dirty="0"/>
           </a:p>
         </p:txBody>
       </p:sp>
@@ -2608,7 +3260,7 @@
     <p:bg>
       <p:bgPr>
         <a:solidFill>
-          <a:srgbClr val="1B2A4A"/>
+          <a:srgbClr val="FAF8F5"/>
         </a:solidFill>
       </p:bgPr>
     </p:bg>
@@ -2635,27 +3287,67 @@
         <p:spPr>
           <a:xfrm>
             <a:off x="0" y="0"/>
-            <a:ext cx="109728" cy="5143500"/>
-          </a:xfrm>
-          <a:prstGeom prst="rect">
-            <a:avLst/>
-          </a:prstGeom>
-          <a:solidFill>
-            <a:srgbClr val="E9C46A"/>
-          </a:solidFill>
-          <a:ln/>
-        </p:spPr>
-      </p:sp>
-      <p:sp>
-        <p:nvSpPr>
-          <p:cNvPr id="3" name="Text 1"/>
-          <p:cNvSpPr/>
-          <p:nvPr/>
-        </p:nvSpPr>
-        <p:spPr>
-          <a:xfrm>
-            <a:off x="731520" y="457200"/>
-            <a:ext cx="7772400" cy="731520"/>
+            <a:ext cx="9144000" cy="822960"/>
+          </a:xfrm>
+          <a:prstGeom prst="rect">
+            <a:avLst/>
+          </a:prstGeom>
+          <a:solidFill>
+            <a:srgbClr val="FFFFFF"/>
+          </a:solidFill>
+          <a:ln/>
+        </p:spPr>
+      </p:sp>
+      <p:sp>
+        <p:nvSpPr>
+          <p:cNvPr id="3" name="Shape 1"/>
+          <p:cNvSpPr/>
+          <p:nvPr/>
+        </p:nvSpPr>
+        <p:spPr>
+          <a:xfrm>
+            <a:off x="0" y="804672"/>
+            <a:ext cx="9144000" cy="27432"/>
+          </a:xfrm>
+          <a:prstGeom prst="rect">
+            <a:avLst/>
+          </a:prstGeom>
+          <a:solidFill>
+            <a:srgbClr val="E5E2DC"/>
+          </a:solidFill>
+          <a:ln/>
+        </p:spPr>
+      </p:sp>
+      <p:sp>
+        <p:nvSpPr>
+          <p:cNvPr id="4" name="Shape 2"/>
+          <p:cNvSpPr/>
+          <p:nvPr/>
+        </p:nvSpPr>
+        <p:spPr>
+          <a:xfrm>
+            <a:off x="548640" y="201168"/>
+            <a:ext cx="54864" cy="420624"/>
+          </a:xfrm>
+          <a:prstGeom prst="rect">
+            <a:avLst/>
+          </a:prstGeom>
+          <a:solidFill>
+            <a:srgbClr val="2A9D8F"/>
+          </a:solidFill>
+          <a:ln/>
+        </p:spPr>
+      </p:sp>
+      <p:sp>
+        <p:nvSpPr>
+          <p:cNvPr id="5" name="Text 3"/>
+          <p:cNvSpPr/>
+          <p:nvPr/>
+        </p:nvSpPr>
+        <p:spPr>
+          <a:xfrm>
+            <a:off x="777240" y="137160"/>
+            <a:ext cx="7772400" cy="548640"/>
           </a:xfrm>
           <a:prstGeom prst="rect">
             <a:avLst/>
@@ -2664,37 +3356,37 @@
           <a:ln/>
         </p:spPr>
         <p:txBody>
-          <a:bodyPr wrap="square" rtlCol="0" anchor="ctr"/>
+          <a:bodyPr wrap="square" lIns="0" tIns="0" rIns="0" bIns="0" rtlCol="0" anchor="ctr"/>
           <a:lstStyle/>
           <a:p>
             <a:pPr indent="0" marL="0">
               <a:buNone/>
             </a:pPr>
             <a:r>
-              <a:rPr lang="en-US" sz="3200" b="1" dirty="0">
-                <a:solidFill>
-                  <a:srgbClr val="FFFFFF"/>
+              <a:rPr lang="en-US" sz="2000" b="1" dirty="0">
+                <a:solidFill>
+                  <a:srgbClr val="1B2A4A"/>
                 </a:solidFill>
                 <a:latin typeface="Georgia" pitchFamily="34" charset="0"/>
                 <a:ea typeface="Georgia" pitchFamily="34" charset="-122"/>
                 <a:cs typeface="Georgia" pitchFamily="34" charset="-120"/>
               </a:rPr>
-              <a:t>Key Takeaways</a:t>
-            </a:r>
-            <a:endParaRPr lang="en-US" sz="3200" dirty="0"/>
-          </a:p>
-        </p:txBody>
-      </p:sp>
-      <p:sp>
-        <p:nvSpPr>
-          <p:cNvPr id="4" name="Text 2"/>
-          <p:cNvSpPr/>
-          <p:nvPr/>
-        </p:nvSpPr>
-        <p:spPr>
-          <a:xfrm>
-            <a:off x="731520" y="1463040"/>
-            <a:ext cx="7772400" cy="3200400"/>
+              <a:t>Common Mistakes to Avoid</a:t>
+            </a:r>
+            <a:endParaRPr lang="en-US" sz="2000" dirty="0"/>
+          </a:p>
+        </p:txBody>
+      </p:sp>
+      <p:sp>
+        <p:nvSpPr>
+          <p:cNvPr id="6" name="Text 4"/>
+          <p:cNvSpPr/>
+          <p:nvPr/>
+        </p:nvSpPr>
+        <p:spPr>
+          <a:xfrm>
+            <a:off x="731520" y="1051560"/>
+            <a:ext cx="7680960" cy="3108960"/>
           </a:xfrm>
           <a:prstGeom prst="rect">
             <a:avLst/>
@@ -2708,7 +3400,7 @@
           <a:p>
             <a:pPr marL="342900" indent="-342900">
               <a:spcAft>
-                <a:spcPts val="1000"/>
+                <a:spcPts val="800"/>
               </a:spcAft>
               <a:buSzPct val="100000"/>
               <a:buChar char="•"/>
@@ -2716,20 +3408,20 @@
             <a:r>
               <a:rPr lang="en-US" sz="1500" dirty="0">
                 <a:solidFill>
-                  <a:srgbClr val="CADCFC"/>
+                  <a:srgbClr val="3D3A36"/>
                 </a:solidFill>
                 <a:latin typeface="Calibri" pitchFamily="34" charset="0"/>
                 <a:ea typeface="Calibri" pitchFamily="34" charset="-122"/>
                 <a:cs typeface="Calibri" pitchFamily="34" charset="-120"/>
               </a:rPr>
-              <a:t>BIDMAS: Brackets, Indices, Division, Multiplication, Addition, Subtraction</a:t>
+              <a:t>Working left to right WITHOUT following BIDMAS → wrong answer.</a:t>
             </a:r>
             <a:endParaRPr lang="en-US" sz="1500" dirty="0"/>
           </a:p>
           <a:p>
             <a:pPr marL="342900" indent="-342900">
               <a:spcAft>
-                <a:spcPts val="1000"/>
+                <a:spcPts val="800"/>
               </a:spcAft>
               <a:buSzPct val="100000"/>
               <a:buChar char="•"/>
@@ -2737,20 +3429,20 @@
             <a:r>
               <a:rPr lang="en-US" sz="1500" dirty="0">
                 <a:solidFill>
-                  <a:srgbClr val="CADCFC"/>
+                  <a:srgbClr val="3D3A36"/>
                 </a:solidFill>
                 <a:latin typeface="Calibri" pitchFamily="34" charset="0"/>
                 <a:ea typeface="Calibri" pitchFamily="34" charset="-122"/>
                 <a:cs typeface="Calibri" pitchFamily="34" charset="-120"/>
               </a:rPr>
-              <a:t>Brackets first, then indices, then × ÷ (left to right), then + − (left to right)</a:t>
+              <a:t>Forgetting that × and ÷ come BEFORE + and −.</a:t>
             </a:r>
             <a:endParaRPr lang="en-US" sz="1500" dirty="0"/>
           </a:p>
           <a:p>
             <a:pPr marL="342900" indent="-342900">
               <a:spcAft>
-                <a:spcPts val="1000"/>
+                <a:spcPts val="800"/>
               </a:spcAft>
               <a:buSzPct val="100000"/>
               <a:buChar char="•"/>
@@ -2758,20 +3450,20 @@
             <a:r>
               <a:rPr lang="en-US" sz="1500" dirty="0">
                 <a:solidFill>
-                  <a:srgbClr val="CADCFC"/>
+                  <a:srgbClr val="3D3A36"/>
                 </a:solidFill>
                 <a:latin typeface="Calibri" pitchFamily="34" charset="0"/>
                 <a:ea typeface="Calibri" pitchFamily="34" charset="-122"/>
                 <a:cs typeface="Calibri" pitchFamily="34" charset="-120"/>
               </a:rPr>
-              <a:t>Multiplication and division have EQUAL priority (left to right)</a:t>
+              <a:t>Forgetting that × and ÷ have EQUAL priority (do left to right).</a:t>
             </a:r>
             <a:endParaRPr lang="en-US" sz="1500" dirty="0"/>
           </a:p>
           <a:p>
             <a:pPr marL="342900" indent="-342900">
               <a:spcAft>
-                <a:spcPts val="1000"/>
+                <a:spcPts val="800"/>
               </a:spcAft>
               <a:buSzPct val="100000"/>
               <a:buChar char="•"/>
@@ -2779,20 +3471,20 @@
             <a:r>
               <a:rPr lang="en-US" sz="1500" dirty="0">
                 <a:solidFill>
-                  <a:srgbClr val="CADCFC"/>
+                  <a:srgbClr val="3D3A36"/>
                 </a:solidFill>
                 <a:latin typeface="Calibri" pitchFamily="34" charset="0"/>
                 <a:ea typeface="Calibri" pitchFamily="34" charset="-122"/>
                 <a:cs typeface="Calibri" pitchFamily="34" charset="-120"/>
               </a:rPr>
-              <a:t>Addition and subtraction have EQUAL priority (left to right)</a:t>
+              <a:t>Not doing brackets first when there are nested brackets.</a:t>
             </a:r>
             <a:endParaRPr lang="en-US" sz="1500" dirty="0"/>
           </a:p>
           <a:p>
             <a:pPr marL="342900" indent="-342900">
               <a:spcAft>
-                <a:spcPts val="1000"/>
+                <a:spcPts val="800"/>
               </a:spcAft>
               <a:buSzPct val="100000"/>
               <a:buChar char="•"/>
@@ -2800,18 +3492,110 @@
             <a:r>
               <a:rPr lang="en-US" sz="1500" dirty="0">
                 <a:solidFill>
-                  <a:srgbClr val="CADCFC"/>
+                  <a:srgbClr val="3D3A36"/>
                 </a:solidFill>
                 <a:latin typeface="Calibri" pitchFamily="34" charset="0"/>
                 <a:ea typeface="Calibri" pitchFamily="34" charset="-122"/>
                 <a:cs typeface="Calibri" pitchFamily="34" charset="-120"/>
               </a:rPr>
-              <a:t>Use brackets when you want to change the order</a:t>
+              <a:t>Calculator tip: most calculators follow BIDMAS automatically.</a:t>
             </a:r>
             <a:endParaRPr lang="en-US" sz="1500" dirty="0"/>
           </a:p>
         </p:txBody>
       </p:sp>
+    </p:spTree>
+  </p:cSld>
+  <p:clrMapOvr>
+    <a:masterClrMapping/>
+  </p:clrMapOvr>
+</p:sld>
+</file>
+
+<file path=ppt/slides/slide6.xml><?xml version="1.0" encoding="utf-8"?>
+<p:sld xmlns:a="http://schemas.openxmlformats.org/drawingml/2006/main" xmlns:r="http://schemas.openxmlformats.org/officeDocument/2006/relationships" xmlns:p="http://schemas.openxmlformats.org/presentationml/2006/main">
+  <p:cSld name="Slide 6">
+    <p:bg>
+      <p:bgPr>
+        <a:solidFill>
+          <a:srgbClr val="FAF8F5"/>
+        </a:solidFill>
+      </p:bgPr>
+    </p:bg>
+    <p:spTree>
+      <p:nvGrpSpPr>
+        <p:cNvPr id="1" name=""/>
+        <p:cNvGrpSpPr/>
+        <p:nvPr/>
+      </p:nvGrpSpPr>
+      <p:grpSpPr>
+        <a:xfrm>
+          <a:off x="0" y="0"/>
+          <a:ext cx="0" cy="0"/>
+          <a:chOff x="0" y="0"/>
+          <a:chExt cx="0" cy="0"/>
+        </a:xfrm>
+      </p:grpSpPr>
+      <p:sp>
+        <p:nvSpPr>
+          <p:cNvPr id="2" name="Shape 0"/>
+          <p:cNvSpPr/>
+          <p:nvPr/>
+        </p:nvSpPr>
+        <p:spPr>
+          <a:xfrm>
+            <a:off x="0" y="0"/>
+            <a:ext cx="9144000" cy="822960"/>
+          </a:xfrm>
+          <a:prstGeom prst="rect">
+            <a:avLst/>
+          </a:prstGeom>
+          <a:solidFill>
+            <a:srgbClr val="FFFFFF"/>
+          </a:solidFill>
+          <a:ln/>
+        </p:spPr>
+      </p:sp>
+      <p:sp>
+        <p:nvSpPr>
+          <p:cNvPr id="3" name="Shape 1"/>
+          <p:cNvSpPr/>
+          <p:nvPr/>
+        </p:nvSpPr>
+        <p:spPr>
+          <a:xfrm>
+            <a:off x="0" y="804672"/>
+            <a:ext cx="9144000" cy="27432"/>
+          </a:xfrm>
+          <a:prstGeom prst="rect">
+            <a:avLst/>
+          </a:prstGeom>
+          <a:solidFill>
+            <a:srgbClr val="E5E2DC"/>
+          </a:solidFill>
+          <a:ln/>
+        </p:spPr>
+      </p:sp>
+      <p:sp>
+        <p:nvSpPr>
+          <p:cNvPr id="4" name="Shape 2"/>
+          <p:cNvSpPr/>
+          <p:nvPr/>
+        </p:nvSpPr>
+        <p:spPr>
+          <a:xfrm>
+            <a:off x="548640" y="201168"/>
+            <a:ext cx="54864" cy="420624"/>
+          </a:xfrm>
+          <a:prstGeom prst="rect">
+            <a:avLst/>
+          </a:prstGeom>
+          <a:solidFill>
+            <a:srgbClr val="2A9D8F"/>
+          </a:solidFill>
+          <a:ln/>
+        </p:spPr>
+      </p:sp>
       <p:sp>
         <p:nvSpPr>
           <p:cNvPr id="5" name="Text 3"/>
@@ -2820,8 +3604,8 @@
         </p:nvSpPr>
         <p:spPr>
           <a:xfrm>
-            <a:off x="731520" y="4572000"/>
-            <a:ext cx="7772400" cy="365760"/>
+            <a:off x="777240" y="137160"/>
+            <a:ext cx="7772400" cy="548640"/>
           </a:xfrm>
           <a:prstGeom prst="rect">
             <a:avLst/>
@@ -2830,24 +3614,783 @@
           <a:ln/>
         </p:spPr>
         <p:txBody>
-          <a:bodyPr wrap="square" rtlCol="0" anchor="ctr"/>
+          <a:bodyPr wrap="square" lIns="0" tIns="0" rIns="0" bIns="0" rtlCol="0" anchor="ctr"/>
           <a:lstStyle/>
           <a:p>
             <a:pPr indent="0" marL="0">
               <a:buNone/>
             </a:pPr>
             <a:r>
-              <a:rPr lang="en-US" sz="1100" dirty="0">
-                <a:solidFill>
-                  <a:srgbClr val="E9C46A"/>
+              <a:rPr lang="en-US" sz="2000" b="1" dirty="0">
+                <a:solidFill>
+                  <a:srgbClr val="1B2A4A"/>
+                </a:solidFill>
+                <a:latin typeface="Georgia" pitchFamily="34" charset="0"/>
+                <a:ea typeface="Georgia" pitchFamily="34" charset="-122"/>
+                <a:cs typeface="Georgia" pitchFamily="34" charset="-120"/>
+              </a:rPr>
+              <a:t>Check Your Understanding</a:t>
+            </a:r>
+            <a:endParaRPr lang="en-US" sz="2000" dirty="0"/>
+          </a:p>
+        </p:txBody>
+      </p:sp>
+      <p:sp>
+        <p:nvSpPr>
+          <p:cNvPr id="6" name="Shape 4"/>
+          <p:cNvSpPr/>
+          <p:nvPr/>
+        </p:nvSpPr>
+        <p:spPr>
+          <a:xfrm>
+            <a:off x="731520" y="1051560"/>
+            <a:ext cx="7680960" cy="438912"/>
+          </a:xfrm>
+          <a:prstGeom prst="rect">
+            <a:avLst/>
+          </a:prstGeom>
+          <a:solidFill>
+            <a:srgbClr val="FFFFFF"/>
+          </a:solidFill>
+          <a:ln/>
+        </p:spPr>
+      </p:sp>
+      <p:sp>
+        <p:nvSpPr>
+          <p:cNvPr id="7" name="Text 5"/>
+          <p:cNvSpPr/>
+          <p:nvPr/>
+        </p:nvSpPr>
+        <p:spPr>
+          <a:xfrm>
+            <a:off x="868680" y="1051560"/>
+            <a:ext cx="320040" cy="438912"/>
+          </a:xfrm>
+          <a:prstGeom prst="rect">
+            <a:avLst/>
+          </a:prstGeom>
+          <a:noFill/>
+          <a:ln/>
+        </p:spPr>
+        <p:txBody>
+          <a:bodyPr wrap="square" rtlCol="0" anchor="ctr"/>
+          <a:lstStyle/>
+          <a:p>
+            <a:pPr indent="0" marL="0">
+              <a:buNone/>
+            </a:pPr>
+            <a:r>
+              <a:rPr lang="en-US" sz="1400" dirty="0">
+                <a:solidFill>
+                  <a:srgbClr val="2A9D8F"/>
+                </a:solidFill>
+              </a:rPr>
+              <a:t>☐</a:t>
+            </a:r>
+            <a:endParaRPr lang="en-US" sz="1400" dirty="0"/>
+          </a:p>
+        </p:txBody>
+      </p:sp>
+      <p:sp>
+        <p:nvSpPr>
+          <p:cNvPr id="8" name="Text 6"/>
+          <p:cNvSpPr/>
+          <p:nvPr/>
+        </p:nvSpPr>
+        <p:spPr>
+          <a:xfrm>
+            <a:off x="1234440" y="1051560"/>
+            <a:ext cx="6949440" cy="438912"/>
+          </a:xfrm>
+          <a:prstGeom prst="rect">
+            <a:avLst/>
+          </a:prstGeom>
+          <a:noFill/>
+          <a:ln/>
+        </p:spPr>
+        <p:txBody>
+          <a:bodyPr wrap="square" rtlCol="0" anchor="ctr"/>
+          <a:lstStyle/>
+          <a:p>
+            <a:pPr indent="0" marL="0">
+              <a:buNone/>
+            </a:pPr>
+            <a:r>
+              <a:rPr lang="en-US" sz="1300" dirty="0">
+                <a:solidFill>
+                  <a:srgbClr val="3D3A36"/>
                 </a:solidFill>
                 <a:latin typeface="Calibri" pitchFamily="34" charset="0"/>
                 <a:ea typeface="Calibri" pitchFamily="34" charset="-122"/>
                 <a:cs typeface="Calibri" pitchFamily="34" charset="-120"/>
               </a:rPr>
+              <a:t>I can state the order of operations (BIDMAS)</a:t>
+            </a:r>
+            <a:endParaRPr lang="en-US" sz="1300" dirty="0"/>
+          </a:p>
+        </p:txBody>
+      </p:sp>
+      <p:sp>
+        <p:nvSpPr>
+          <p:cNvPr id="9" name="Shape 7"/>
+          <p:cNvSpPr/>
+          <p:nvPr/>
+        </p:nvSpPr>
+        <p:spPr>
+          <a:xfrm>
+            <a:off x="731520" y="1554480"/>
+            <a:ext cx="7680960" cy="438912"/>
+          </a:xfrm>
+          <a:prstGeom prst="rect">
+            <a:avLst/>
+          </a:prstGeom>
+          <a:solidFill>
+            <a:srgbClr val="F8F6F3"/>
+          </a:solidFill>
+          <a:ln/>
+        </p:spPr>
+      </p:sp>
+      <p:sp>
+        <p:nvSpPr>
+          <p:cNvPr id="10" name="Text 8"/>
+          <p:cNvSpPr/>
+          <p:nvPr/>
+        </p:nvSpPr>
+        <p:spPr>
+          <a:xfrm>
+            <a:off x="868680" y="1554480"/>
+            <a:ext cx="320040" cy="438912"/>
+          </a:xfrm>
+          <a:prstGeom prst="rect">
+            <a:avLst/>
+          </a:prstGeom>
+          <a:noFill/>
+          <a:ln/>
+        </p:spPr>
+        <p:txBody>
+          <a:bodyPr wrap="square" rtlCol="0" anchor="ctr"/>
+          <a:lstStyle/>
+          <a:p>
+            <a:pPr indent="0" marL="0">
+              <a:buNone/>
+            </a:pPr>
+            <a:r>
+              <a:rPr lang="en-US" sz="1400" dirty="0">
+                <a:solidFill>
+                  <a:srgbClr val="2A9D8F"/>
+                </a:solidFill>
+              </a:rPr>
+              <a:t>☐</a:t>
+            </a:r>
+            <a:endParaRPr lang="en-US" sz="1400" dirty="0"/>
+          </a:p>
+        </p:txBody>
+      </p:sp>
+      <p:sp>
+        <p:nvSpPr>
+          <p:cNvPr id="11" name="Text 9"/>
+          <p:cNvSpPr/>
+          <p:nvPr/>
+        </p:nvSpPr>
+        <p:spPr>
+          <a:xfrm>
+            <a:off x="1234440" y="1554480"/>
+            <a:ext cx="6949440" cy="438912"/>
+          </a:xfrm>
+          <a:prstGeom prst="rect">
+            <a:avLst/>
+          </a:prstGeom>
+          <a:noFill/>
+          <a:ln/>
+        </p:spPr>
+        <p:txBody>
+          <a:bodyPr wrap="square" rtlCol="0" anchor="ctr"/>
+          <a:lstStyle/>
+          <a:p>
+            <a:pPr indent="0" marL="0">
+              <a:buNone/>
+            </a:pPr>
+            <a:r>
+              <a:rPr lang="en-US" sz="1300" dirty="0">
+                <a:solidFill>
+                  <a:srgbClr val="3D3A36"/>
+                </a:solidFill>
+                <a:latin typeface="Calibri" pitchFamily="34" charset="0"/>
+                <a:ea typeface="Calibri" pitchFamily="34" charset="-122"/>
+                <a:cs typeface="Calibri" pitchFamily="34" charset="-120"/>
+              </a:rPr>
+              <a:t>I can solve multi-step calculations using BIDMAS</a:t>
+            </a:r>
+            <a:endParaRPr lang="en-US" sz="1300" dirty="0"/>
+          </a:p>
+        </p:txBody>
+      </p:sp>
+      <p:sp>
+        <p:nvSpPr>
+          <p:cNvPr id="12" name="Shape 10"/>
+          <p:cNvSpPr/>
+          <p:nvPr/>
+        </p:nvSpPr>
+        <p:spPr>
+          <a:xfrm>
+            <a:off x="731520" y="2057400"/>
+            <a:ext cx="7680960" cy="438912"/>
+          </a:xfrm>
+          <a:prstGeom prst="rect">
+            <a:avLst/>
+          </a:prstGeom>
+          <a:solidFill>
+            <a:srgbClr val="FFFFFF"/>
+          </a:solidFill>
+          <a:ln/>
+        </p:spPr>
+      </p:sp>
+      <p:sp>
+        <p:nvSpPr>
+          <p:cNvPr id="13" name="Text 11"/>
+          <p:cNvSpPr/>
+          <p:nvPr/>
+        </p:nvSpPr>
+        <p:spPr>
+          <a:xfrm>
+            <a:off x="868680" y="2057400"/>
+            <a:ext cx="320040" cy="438912"/>
+          </a:xfrm>
+          <a:prstGeom prst="rect">
+            <a:avLst/>
+          </a:prstGeom>
+          <a:noFill/>
+          <a:ln/>
+        </p:spPr>
+        <p:txBody>
+          <a:bodyPr wrap="square" rtlCol="0" anchor="ctr"/>
+          <a:lstStyle/>
+          <a:p>
+            <a:pPr indent="0" marL="0">
+              <a:buNone/>
+            </a:pPr>
+            <a:r>
+              <a:rPr lang="en-US" sz="1400" dirty="0">
+                <a:solidFill>
+                  <a:srgbClr val="2A9D8F"/>
+                </a:solidFill>
+              </a:rPr>
+              <a:t>☐</a:t>
+            </a:r>
+            <a:endParaRPr lang="en-US" sz="1400" dirty="0"/>
+          </a:p>
+        </p:txBody>
+      </p:sp>
+      <p:sp>
+        <p:nvSpPr>
+          <p:cNvPr id="14" name="Text 12"/>
+          <p:cNvSpPr/>
+          <p:nvPr/>
+        </p:nvSpPr>
+        <p:spPr>
+          <a:xfrm>
+            <a:off x="1234440" y="2057400"/>
+            <a:ext cx="6949440" cy="438912"/>
+          </a:xfrm>
+          <a:prstGeom prst="rect">
+            <a:avLst/>
+          </a:prstGeom>
+          <a:noFill/>
+          <a:ln/>
+        </p:spPr>
+        <p:txBody>
+          <a:bodyPr wrap="square" rtlCol="0" anchor="ctr"/>
+          <a:lstStyle/>
+          <a:p>
+            <a:pPr indent="0" marL="0">
+              <a:buNone/>
+            </a:pPr>
+            <a:r>
+              <a:rPr lang="en-US" sz="1300" dirty="0">
+                <a:solidFill>
+                  <a:srgbClr val="3D3A36"/>
+                </a:solidFill>
+                <a:latin typeface="Calibri" pitchFamily="34" charset="0"/>
+                <a:ea typeface="Calibri" pitchFamily="34" charset="-122"/>
+                <a:cs typeface="Calibri" pitchFamily="34" charset="-120"/>
+              </a:rPr>
+              <a:t>I know that × and ÷ come before + and −</a:t>
+            </a:r>
+            <a:endParaRPr lang="en-US" sz="1300" dirty="0"/>
+          </a:p>
+        </p:txBody>
+      </p:sp>
+      <p:sp>
+        <p:nvSpPr>
+          <p:cNvPr id="15" name="Shape 13"/>
+          <p:cNvSpPr/>
+          <p:nvPr/>
+        </p:nvSpPr>
+        <p:spPr>
+          <a:xfrm>
+            <a:off x="731520" y="2560320"/>
+            <a:ext cx="7680960" cy="438912"/>
+          </a:xfrm>
+          <a:prstGeom prst="rect">
+            <a:avLst/>
+          </a:prstGeom>
+          <a:solidFill>
+            <a:srgbClr val="F8F6F3"/>
+          </a:solidFill>
+          <a:ln/>
+        </p:spPr>
+      </p:sp>
+      <p:sp>
+        <p:nvSpPr>
+          <p:cNvPr id="16" name="Text 14"/>
+          <p:cNvSpPr/>
+          <p:nvPr/>
+        </p:nvSpPr>
+        <p:spPr>
+          <a:xfrm>
+            <a:off x="868680" y="2560320"/>
+            <a:ext cx="320040" cy="438912"/>
+          </a:xfrm>
+          <a:prstGeom prst="rect">
+            <a:avLst/>
+          </a:prstGeom>
+          <a:noFill/>
+          <a:ln/>
+        </p:spPr>
+        <p:txBody>
+          <a:bodyPr wrap="square" rtlCol="0" anchor="ctr"/>
+          <a:lstStyle/>
+          <a:p>
+            <a:pPr indent="0" marL="0">
+              <a:buNone/>
+            </a:pPr>
+            <a:r>
+              <a:rPr lang="en-US" sz="1400" dirty="0">
+                <a:solidFill>
+                  <a:srgbClr val="2A9D8F"/>
+                </a:solidFill>
+              </a:rPr>
+              <a:t>☐</a:t>
+            </a:r>
+            <a:endParaRPr lang="en-US" sz="1400" dirty="0"/>
+          </a:p>
+        </p:txBody>
+      </p:sp>
+      <p:sp>
+        <p:nvSpPr>
+          <p:cNvPr id="17" name="Text 15"/>
+          <p:cNvSpPr/>
+          <p:nvPr/>
+        </p:nvSpPr>
+        <p:spPr>
+          <a:xfrm>
+            <a:off x="1234440" y="2560320"/>
+            <a:ext cx="6949440" cy="438912"/>
+          </a:xfrm>
+          <a:prstGeom prst="rect">
+            <a:avLst/>
+          </a:prstGeom>
+          <a:noFill/>
+          <a:ln/>
+        </p:spPr>
+        <p:txBody>
+          <a:bodyPr wrap="square" rtlCol="0" anchor="ctr"/>
+          <a:lstStyle/>
+          <a:p>
+            <a:pPr indent="0" marL="0">
+              <a:buNone/>
+            </a:pPr>
+            <a:r>
+              <a:rPr lang="en-US" sz="1300" dirty="0">
+                <a:solidFill>
+                  <a:srgbClr val="3D3A36"/>
+                </a:solidFill>
+                <a:latin typeface="Calibri" pitchFamily="34" charset="0"/>
+                <a:ea typeface="Calibri" pitchFamily="34" charset="-122"/>
+                <a:cs typeface="Calibri" pitchFamily="34" charset="-120"/>
+              </a:rPr>
+              <a:t>I know that × and ÷ have equal priority (left to right)</a:t>
+            </a:r>
+            <a:endParaRPr lang="en-US" sz="1300" dirty="0"/>
+          </a:p>
+        </p:txBody>
+      </p:sp>
+      <p:sp>
+        <p:nvSpPr>
+          <p:cNvPr id="18" name="Shape 16"/>
+          <p:cNvSpPr/>
+          <p:nvPr/>
+        </p:nvSpPr>
+        <p:spPr>
+          <a:xfrm>
+            <a:off x="731520" y="3063240"/>
+            <a:ext cx="7680960" cy="438912"/>
+          </a:xfrm>
+          <a:prstGeom prst="rect">
+            <a:avLst/>
+          </a:prstGeom>
+          <a:solidFill>
+            <a:srgbClr val="FFFFFF"/>
+          </a:solidFill>
+          <a:ln/>
+        </p:spPr>
+      </p:sp>
+      <p:sp>
+        <p:nvSpPr>
+          <p:cNvPr id="19" name="Text 17"/>
+          <p:cNvSpPr/>
+          <p:nvPr/>
+        </p:nvSpPr>
+        <p:spPr>
+          <a:xfrm>
+            <a:off x="868680" y="3063240"/>
+            <a:ext cx="320040" cy="438912"/>
+          </a:xfrm>
+          <a:prstGeom prst="rect">
+            <a:avLst/>
+          </a:prstGeom>
+          <a:noFill/>
+          <a:ln/>
+        </p:spPr>
+        <p:txBody>
+          <a:bodyPr wrap="square" rtlCol="0" anchor="ctr"/>
+          <a:lstStyle/>
+          <a:p>
+            <a:pPr indent="0" marL="0">
+              <a:buNone/>
+            </a:pPr>
+            <a:r>
+              <a:rPr lang="en-US" sz="1400" dirty="0">
+                <a:solidFill>
+                  <a:srgbClr val="2A9D8F"/>
+                </a:solidFill>
+              </a:rPr>
+              <a:t>☐</a:t>
+            </a:r>
+            <a:endParaRPr lang="en-US" sz="1400" dirty="0"/>
+          </a:p>
+        </p:txBody>
+      </p:sp>
+      <p:sp>
+        <p:nvSpPr>
+          <p:cNvPr id="20" name="Text 18"/>
+          <p:cNvSpPr/>
+          <p:nvPr/>
+        </p:nvSpPr>
+        <p:spPr>
+          <a:xfrm>
+            <a:off x="1234440" y="3063240"/>
+            <a:ext cx="6949440" cy="438912"/>
+          </a:xfrm>
+          <a:prstGeom prst="rect">
+            <a:avLst/>
+          </a:prstGeom>
+          <a:noFill/>
+          <a:ln/>
+        </p:spPr>
+        <p:txBody>
+          <a:bodyPr wrap="square" rtlCol="0" anchor="ctr"/>
+          <a:lstStyle/>
+          <a:p>
+            <a:pPr indent="0" marL="0">
+              <a:buNone/>
+            </a:pPr>
+            <a:r>
+              <a:rPr lang="en-US" sz="1300" dirty="0">
+                <a:solidFill>
+                  <a:srgbClr val="3D3A36"/>
+                </a:solidFill>
+                <a:latin typeface="Calibri" pitchFamily="34" charset="0"/>
+                <a:ea typeface="Calibri" pitchFamily="34" charset="-122"/>
+                <a:cs typeface="Calibri" pitchFamily="34" charset="-120"/>
+              </a:rPr>
+              <a:t>I can use brackets to change the order of operations</a:t>
+            </a:r>
+            <a:endParaRPr lang="en-US" sz="1300" dirty="0"/>
+          </a:p>
+        </p:txBody>
+      </p:sp>
+      <p:sp>
+        <p:nvSpPr>
+          <p:cNvPr id="21" name="Shape 19"/>
+          <p:cNvSpPr/>
+          <p:nvPr/>
+        </p:nvSpPr>
+        <p:spPr>
+          <a:xfrm>
+            <a:off x="731520" y="3749040"/>
+            <a:ext cx="7680960" cy="594360"/>
+          </a:xfrm>
+          <a:prstGeom prst="rect">
+            <a:avLst/>
+          </a:prstGeom>
+          <a:solidFill>
+            <a:srgbClr val="E8F5F3"/>
+          </a:solidFill>
+          <a:ln/>
+          <a:effectLst>
+            <a:outerShdw sx="100000" sy="100000" kx="0" ky="0" algn="bl" rotWithShape="0" blurRad="50800" dist="25400" dir="8100000">
+              <a:srgbClr val="000000">
+                <a:alpha val="10000"/>
+              </a:srgbClr>
+            </a:outerShdw>
+          </a:effectLst>
+        </p:spPr>
+      </p:sp>
+      <p:sp>
+        <p:nvSpPr>
+          <p:cNvPr id="22" name="Text 20"/>
+          <p:cNvSpPr/>
+          <p:nvPr/>
+        </p:nvSpPr>
+        <p:spPr>
+          <a:xfrm>
+            <a:off x="914400" y="3749040"/>
+            <a:ext cx="7315200" cy="594360"/>
+          </a:xfrm>
+          <a:prstGeom prst="rect">
+            <a:avLst/>
+          </a:prstGeom>
+          <a:noFill/>
+          <a:ln/>
+        </p:spPr>
+        <p:txBody>
+          <a:bodyPr wrap="square" rtlCol="0" anchor="ctr"/>
+          <a:lstStyle/>
+          <a:p>
+            <a:pPr indent="0" marL="0">
+              <a:buNone/>
+            </a:pPr>
+            <a:r>
+              <a:rPr lang="en-US" sz="1200" b="1" dirty="0">
+                <a:solidFill>
+                  <a:srgbClr val="2A9D8F"/>
+                </a:solidFill>
+                <a:latin typeface="Calibri" pitchFamily="34" charset="0"/>
+                <a:ea typeface="Calibri" pitchFamily="34" charset="-122"/>
+                <a:cs typeface="Calibri" pitchFamily="34" charset="-120"/>
+              </a:rPr>
+              <a:t>Key Idea: </a:t>
+            </a:r>
+            <a:pPr indent="0" marL="0">
+              <a:buNone/>
+            </a:pPr>
+            <a:r>
+              <a:rPr lang="en-US" sz="1200" i="1" dirty="0">
+                <a:solidFill>
+                  <a:srgbClr val="3D3A36"/>
+                </a:solidFill>
+                <a:latin typeface="Calibri" pitchFamily="34" charset="0"/>
+                <a:ea typeface="Calibri" pitchFamily="34" charset="-122"/>
+                <a:cs typeface="Calibri" pitchFamily="34" charset="-120"/>
+              </a:rPr>
+              <a:t>BIDMAS ensures everyone gets the same answer to the same calculation.</a:t>
+            </a:r>
+            <a:endParaRPr lang="en-US" sz="1200" dirty="0"/>
+          </a:p>
+        </p:txBody>
+      </p:sp>
+    </p:spTree>
+  </p:cSld>
+  <p:clrMapOvr>
+    <a:masterClrMapping/>
+  </p:clrMapOvr>
+</p:sld>
+</file>
+
+<file path=ppt/slides/slide7.xml><?xml version="1.0" encoding="utf-8"?>
+<p:sld xmlns:a="http://schemas.openxmlformats.org/drawingml/2006/main" xmlns:r="http://schemas.openxmlformats.org/officeDocument/2006/relationships" xmlns:p="http://schemas.openxmlformats.org/presentationml/2006/main">
+  <p:cSld name="Slide 7">
+    <p:spTree>
+      <p:nvGrpSpPr>
+        <p:cNvPr id="1" name=""/>
+        <p:cNvGrpSpPr/>
+        <p:nvPr/>
+      </p:nvGrpSpPr>
+      <p:grpSpPr>
+        <a:xfrm>
+          <a:off x="0" y="0"/>
+          <a:ext cx="0" cy="0"/>
+          <a:chOff x="0" y="0"/>
+          <a:chExt cx="0" cy="0"/>
+        </a:xfrm>
+      </p:grpSpPr>
+      <p:sp>
+        <p:nvSpPr>
+          <p:cNvPr id="2" name="Shape 0"/>
+          <p:cNvSpPr/>
+          <p:nvPr/>
+        </p:nvSpPr>
+        <p:spPr>
+          <a:xfrm>
+            <a:off x="0" y="0"/>
+            <a:ext cx="9144000" cy="5143500"/>
+          </a:xfrm>
+          <a:prstGeom prst="rect">
+            <a:avLst/>
+          </a:prstGeom>
+          <a:solidFill>
+            <a:srgbClr val="1B2A4A"/>
+          </a:solidFill>
+          <a:ln/>
+        </p:spPr>
+      </p:sp>
+      <p:sp>
+        <p:nvSpPr>
+          <p:cNvPr id="3" name="Shape 1"/>
+          <p:cNvSpPr/>
+          <p:nvPr/>
+        </p:nvSpPr>
+        <p:spPr>
+          <a:xfrm>
+            <a:off x="0" y="4777740"/>
+            <a:ext cx="9144000" cy="365760"/>
+          </a:xfrm>
+          <a:prstGeom prst="rect">
+            <a:avLst/>
+          </a:prstGeom>
+          <a:solidFill>
+            <a:srgbClr val="2A9D8F"/>
+          </a:solidFill>
+          <a:ln/>
+        </p:spPr>
+      </p:sp>
+      <p:sp>
+        <p:nvSpPr>
+          <p:cNvPr id="4" name="Shape 2"/>
+          <p:cNvSpPr/>
+          <p:nvPr/>
+        </p:nvSpPr>
+        <p:spPr>
+          <a:xfrm>
+            <a:off x="-914400" y="-914400"/>
+            <a:ext cx="3657600" cy="3657600"/>
+          </a:xfrm>
+          <a:prstGeom prst="ellipse">
+            <a:avLst/>
+          </a:prstGeom>
+          <a:solidFill>
+            <a:srgbClr val="2A9D8F">
+              <a:alpha val="10000"/>
+            </a:srgbClr>
+          </a:solidFill>
+          <a:ln/>
+        </p:spPr>
+      </p:sp>
+      <p:sp>
+        <p:nvSpPr>
+          <p:cNvPr id="5" name="Text 3"/>
+          <p:cNvSpPr/>
+          <p:nvPr/>
+        </p:nvSpPr>
+        <p:spPr>
+          <a:xfrm>
+            <a:off x="731520" y="1463040"/>
+            <a:ext cx="7680960" cy="822960"/>
+          </a:xfrm>
+          <a:prstGeom prst="rect">
+            <a:avLst/>
+          </a:prstGeom>
+          <a:noFill/>
+          <a:ln/>
+        </p:spPr>
+        <p:txBody>
+          <a:bodyPr wrap="square" rtlCol="0" anchor="ctr"/>
+          <a:lstStyle/>
+          <a:p>
+            <a:pPr algn="ctr" indent="0" marL="0">
+              <a:buNone/>
+            </a:pPr>
+            <a:r>
+              <a:rPr lang="en-US" sz="3400" b="1" dirty="0">
+                <a:solidFill>
+                  <a:srgbClr val="FFFFFF"/>
+                </a:solidFill>
+                <a:latin typeface="Georgia" pitchFamily="34" charset="0"/>
+                <a:ea typeface="Georgia" pitchFamily="34" charset="-122"/>
+                <a:cs typeface="Georgia" pitchFamily="34" charset="-120"/>
+              </a:rPr>
+              <a:t>Review &amp; Practise</a:t>
+            </a:r>
+            <a:endParaRPr lang="en-US" sz="3400" dirty="0"/>
+          </a:p>
+        </p:txBody>
+      </p:sp>
+      <p:sp>
+        <p:nvSpPr>
+          <p:cNvPr id="6" name="Text 4"/>
+          <p:cNvSpPr/>
+          <p:nvPr/>
+        </p:nvSpPr>
+        <p:spPr>
+          <a:xfrm>
+            <a:off x="731520" y="2468880"/>
+            <a:ext cx="7680960" cy="457200"/>
+          </a:xfrm>
+          <a:prstGeom prst="rect">
+            <a:avLst/>
+          </a:prstGeom>
+          <a:noFill/>
+          <a:ln/>
+        </p:spPr>
+        <p:txBody>
+          <a:bodyPr wrap="square" rtlCol="0" anchor="ctr"/>
+          <a:lstStyle/>
+          <a:p>
+            <a:pPr algn="ctr" indent="0" marL="0">
+              <a:buNone/>
+            </a:pPr>
+            <a:r>
+              <a:rPr lang="en-US" sz="1800" dirty="0">
+                <a:solidFill>
+                  <a:srgbClr val="2A9D8F"/>
+                </a:solidFill>
+                <a:latin typeface="Calibri" pitchFamily="34" charset="0"/>
+                <a:ea typeface="Calibri" pitchFamily="34" charset="-122"/>
+                <a:cs typeface="Calibri" pitchFamily="34" charset="-120"/>
+              </a:rPr>
               <a:t>mrzocchi.com</a:t>
             </a:r>
-            <a:endParaRPr lang="en-US" sz="1100" dirty="0"/>
+            <a:endParaRPr lang="en-US" sz="1800" dirty="0"/>
+          </a:p>
+        </p:txBody>
+      </p:sp>
+      <p:sp>
+        <p:nvSpPr>
+          <p:cNvPr id="7" name="Text 5"/>
+          <p:cNvSpPr/>
+          <p:nvPr/>
+        </p:nvSpPr>
+        <p:spPr>
+          <a:xfrm>
+            <a:off x="731520" y="3108960"/>
+            <a:ext cx="7680960" cy="457200"/>
+          </a:xfrm>
+          <a:prstGeom prst="rect">
+            <a:avLst/>
+          </a:prstGeom>
+          <a:noFill/>
+          <a:ln/>
+        </p:spPr>
+        <p:txBody>
+          <a:bodyPr wrap="square" rtlCol="0" anchor="ctr"/>
+          <a:lstStyle/>
+          <a:p>
+            <a:pPr algn="ctr" indent="0" marL="0">
+              <a:buNone/>
+            </a:pPr>
+            <a:r>
+              <a:rPr lang="en-US" sz="1300" dirty="0">
+                <a:solidFill>
+                  <a:srgbClr val="9B9690"/>
+                </a:solidFill>
+                <a:latin typeface="Calibri" pitchFamily="34" charset="0"/>
+                <a:ea typeface="Calibri" pitchFamily="34" charset="-122"/>
+                <a:cs typeface="Calibri" pitchFamily="34" charset="-120"/>
+              </a:rPr>
+              <a:t>Use the Self-Quiz, Review Games, and Practice Builder to test yourself.</a:t>
+            </a:r>
+            <a:endParaRPr lang="en-US" sz="1300" dirty="0"/>
           </a:p>
         </p:txBody>
       </p:sp>
